--- a/output_pptx/Psalm_23.pptx
+++ b/output_pptx/Psalm_23.pptx
@@ -28,6 +28,27 @@
     <p:sldId id="276" r:id="rId27"/>
     <p:sldId id="277" r:id="rId28"/>
     <p:sldId id="278" r:id="rId29"/>
+    <p:sldId id="279" r:id="rId30"/>
+    <p:sldId id="280" r:id="rId31"/>
+    <p:sldId id="281" r:id="rId32"/>
+    <p:sldId id="282" r:id="rId33"/>
+    <p:sldId id="283" r:id="rId34"/>
+    <p:sldId id="284" r:id="rId35"/>
+    <p:sldId id="285" r:id="rId36"/>
+    <p:sldId id="286" r:id="rId37"/>
+    <p:sldId id="287" r:id="rId38"/>
+    <p:sldId id="288" r:id="rId39"/>
+    <p:sldId id="289" r:id="rId40"/>
+    <p:sldId id="290" r:id="rId41"/>
+    <p:sldId id="291" r:id="rId42"/>
+    <p:sldId id="292" r:id="rId43"/>
+    <p:sldId id="293" r:id="rId44"/>
+    <p:sldId id="294" r:id="rId45"/>
+    <p:sldId id="295" r:id="rId46"/>
+    <p:sldId id="296" r:id="rId47"/>
+    <p:sldId id="297" r:id="rId48"/>
+    <p:sldId id="298" r:id="rId49"/>
+    <p:sldId id="299" r:id="rId50"/>
   </p:sldIdLst>
   <p:sldSz cx="12191695" cy="6858000" type="screen4x3"/>
   <p:notesSz cx="6858000" cy="9144000"/>
@@ -3126,23 +3147,23 @@
         </p:nvSpPr>
         <p:spPr>
           <a:xfrm>
-            <a:off x="594360" y="2258568"/>
-            <a:ext cx="11002975" cy="685800"/>
-          </a:xfrm>
-          <a:prstGeom prst="rect">
-            <a:avLst/>
-          </a:prstGeom>
-          <a:noFill/>
-        </p:spPr>
-        <p:txBody>
-          <a:bodyPr wrap="square">
-            <a:spAutoFit/>
-          </a:bodyPr>
-          <a:lstStyle/>
-          <a:p>
-            <a:pPr algn="ctr"/>
-            <a:r>
-              <a:rPr sz="3610" b="1" i="0">
+            <a:off x="640080" y="2052828"/>
+            <a:ext cx="10911535" cy="731520"/>
+          </a:xfrm>
+          <a:prstGeom prst="rect">
+            <a:avLst/>
+          </a:prstGeom>
+          <a:noFill/>
+        </p:spPr>
+        <p:txBody>
+          <a:bodyPr wrap="square">
+            <a:spAutoFit/>
+          </a:bodyPr>
+          <a:lstStyle/>
+          <a:p>
+            <a:pPr algn="ctr"/>
+            <a:r>
+              <a:rPr sz="3900" b="1" i="0">
                 <a:solidFill>
                   <a:srgbClr val="FFFFFF"/>
                 </a:solidFill>
@@ -3161,99 +3182,29 @@
         </p:nvSpPr>
         <p:spPr>
           <a:xfrm>
-            <a:off x="594360" y="2980944"/>
-            <a:ext cx="11002975" cy="347472"/>
-          </a:xfrm>
-          <a:prstGeom prst="rect">
-            <a:avLst/>
-          </a:prstGeom>
-          <a:noFill/>
-        </p:spPr>
-        <p:txBody>
-          <a:bodyPr wrap="square">
-            <a:spAutoFit/>
-          </a:bodyPr>
-          <a:lstStyle/>
-          <a:p>
-            <a:pPr algn="ctr"/>
-            <a:r>
-              <a:rPr sz="2200" b="0" i="1">
-                <a:solidFill>
-                  <a:srgbClr val="8C8C8C"/>
-                </a:solidFill>
-                <a:latin typeface="Arial"/>
-              </a:rPr>
-              <a:t/>
-            </a:r>
-          </a:p>
-        </p:txBody>
-      </p:sp>
-      <p:sp>
-        <p:nvSpPr>
-          <p:cNvPr id="4" name="TextBox 3"/>
-          <p:cNvSpPr txBox="1"/>
-          <p:nvPr/>
-        </p:nvSpPr>
-        <p:spPr>
-          <a:xfrm>
-            <a:off x="594360" y="3529584"/>
-            <a:ext cx="11002975" cy="685800"/>
-          </a:xfrm>
-          <a:prstGeom prst="rect">
-            <a:avLst/>
-          </a:prstGeom>
-          <a:noFill/>
-        </p:spPr>
-        <p:txBody>
-          <a:bodyPr wrap="square">
-            <a:spAutoFit/>
-          </a:bodyPr>
-          <a:lstStyle/>
-          <a:p>
-            <a:pPr algn="ctr"/>
-            <a:r>
-              <a:rPr sz="4400" b="1" i="0">
+            <a:off x="640080" y="2985516"/>
+            <a:ext cx="10911535" cy="731520"/>
+          </a:xfrm>
+          <a:prstGeom prst="rect">
+            <a:avLst/>
+          </a:prstGeom>
+          <a:noFill/>
+        </p:spPr>
+        <p:txBody>
+          <a:bodyPr wrap="square">
+            <a:spAutoFit/>
+          </a:bodyPr>
+          <a:lstStyle/>
+          <a:p>
+            <a:pPr algn="ctr"/>
+            <a:r>
+              <a:rPr sz="4800" b="1" i="0">
                 <a:solidFill>
                   <a:srgbClr val="FFFFFF"/>
                 </a:solidFill>
                 <a:latin typeface="Arial"/>
               </a:rPr>
               <a:t>Faz-me deitar em verdes pastos</a:t>
-            </a:r>
-          </a:p>
-        </p:txBody>
-      </p:sp>
-      <p:sp>
-        <p:nvSpPr>
-          <p:cNvPr id="5" name="TextBox 4"/>
-          <p:cNvSpPr txBox="1"/>
-          <p:nvPr/>
-        </p:nvSpPr>
-        <p:spPr>
-          <a:xfrm>
-            <a:off x="594360" y="4251960"/>
-            <a:ext cx="11002975" cy="347472"/>
-          </a:xfrm>
-          <a:prstGeom prst="rect">
-            <a:avLst/>
-          </a:prstGeom>
-          <a:noFill/>
-        </p:spPr>
-        <p:txBody>
-          <a:bodyPr wrap="square">
-            <a:spAutoFit/>
-          </a:bodyPr>
-          <a:lstStyle/>
-          <a:p>
-            <a:pPr algn="ctr"/>
-            <a:r>
-              <a:rPr sz="2200" b="0" i="1">
-                <a:solidFill>
-                  <a:srgbClr val="8C8C8C"/>
-                </a:solidFill>
-                <a:latin typeface="Arial"/>
-              </a:rPr>
-              <a:t/>
             </a:r>
           </a:p>
         </p:txBody>
@@ -3292,134 +3243,29 @@
         </p:nvSpPr>
         <p:spPr>
           <a:xfrm>
-            <a:off x="594360" y="2258568"/>
-            <a:ext cx="11002975" cy="685800"/>
-          </a:xfrm>
-          <a:prstGeom prst="rect">
-            <a:avLst/>
-          </a:prstGeom>
-          <a:noFill/>
-        </p:spPr>
-        <p:txBody>
-          <a:bodyPr wrap="square">
-            <a:spAutoFit/>
-          </a:bodyPr>
-          <a:lstStyle/>
-          <a:p>
-            <a:pPr algn="ctr"/>
-            <a:r>
-              <a:rPr sz="3805" b="1" i="0">
+            <a:off x="640080" y="2702052"/>
+            <a:ext cx="10911535" cy="731520"/>
+          </a:xfrm>
+          <a:prstGeom prst="rect">
+            <a:avLst/>
+          </a:prstGeom>
+          <a:noFill/>
+        </p:spPr>
+        <p:txBody>
+          <a:bodyPr wrap="square">
+            <a:spAutoFit/>
+          </a:bodyPr>
+          <a:lstStyle/>
+          <a:p>
+            <a:pPr algn="ctr"/>
+            <a:r>
+              <a:rPr sz="4800" b="1" i="0">
                 <a:solidFill>
                   <a:srgbClr val="FFFFFF"/>
                 </a:solidFill>
                 <a:latin typeface="Arial"/>
               </a:rPr>
-              <a:t>Ainda que eu ande pelo vale da sombra</a:t>
-            </a:r>
-          </a:p>
-        </p:txBody>
-      </p:sp>
-      <p:sp>
-        <p:nvSpPr>
-          <p:cNvPr id="3" name="TextBox 2"/>
-          <p:cNvSpPr txBox="1"/>
-          <p:nvPr/>
-        </p:nvSpPr>
-        <p:spPr>
-          <a:xfrm>
-            <a:off x="594360" y="2980944"/>
-            <a:ext cx="11002975" cy="347472"/>
-          </a:xfrm>
-          <a:prstGeom prst="rect">
-            <a:avLst/>
-          </a:prstGeom>
-          <a:noFill/>
-        </p:spPr>
-        <p:txBody>
-          <a:bodyPr wrap="square">
-            <a:spAutoFit/>
-          </a:bodyPr>
-          <a:lstStyle/>
-          <a:p>
-            <a:pPr algn="ctr"/>
-            <a:r>
-              <a:rPr sz="2200" b="0" i="1">
-                <a:solidFill>
-                  <a:srgbClr val="8C8C8C"/>
-                </a:solidFill>
-                <a:latin typeface="Arial"/>
-              </a:rPr>
-              <a:t/>
-            </a:r>
-          </a:p>
-        </p:txBody>
-      </p:sp>
-      <p:sp>
-        <p:nvSpPr>
-          <p:cNvPr id="4" name="TextBox 3"/>
-          <p:cNvSpPr txBox="1"/>
-          <p:nvPr/>
-        </p:nvSpPr>
-        <p:spPr>
-          <a:xfrm>
-            <a:off x="594360" y="3529584"/>
-            <a:ext cx="11002975" cy="685800"/>
-          </a:xfrm>
-          <a:prstGeom prst="rect">
-            <a:avLst/>
-          </a:prstGeom>
-          <a:noFill/>
-        </p:spPr>
-        <p:txBody>
-          <a:bodyPr wrap="square">
-            <a:spAutoFit/>
-          </a:bodyPr>
-          <a:lstStyle/>
-          <a:p>
-            <a:pPr algn="ctr"/>
-            <a:r>
-              <a:rPr sz="4400" b="1" i="0">
-                <a:solidFill>
-                  <a:srgbClr val="FFFFFF"/>
-                </a:solidFill>
-                <a:latin typeface="Arial"/>
-              </a:rPr>
-              <a:t>Não temerei o mal</a:t>
-            </a:r>
-          </a:p>
-        </p:txBody>
-      </p:sp>
-      <p:sp>
-        <p:nvSpPr>
-          <p:cNvPr id="5" name="TextBox 4"/>
-          <p:cNvSpPr txBox="1"/>
-          <p:nvPr/>
-        </p:nvSpPr>
-        <p:spPr>
-          <a:xfrm>
-            <a:off x="594360" y="4251960"/>
-            <a:ext cx="11002975" cy="347472"/>
-          </a:xfrm>
-          <a:prstGeom prst="rect">
-            <a:avLst/>
-          </a:prstGeom>
-          <a:noFill/>
-        </p:spPr>
-        <p:txBody>
-          <a:bodyPr wrap="square">
-            <a:spAutoFit/>
-          </a:bodyPr>
-          <a:lstStyle/>
-          <a:p>
-            <a:pPr algn="ctr"/>
-            <a:r>
-              <a:rPr sz="2200" b="0" i="1">
-                <a:solidFill>
-                  <a:srgbClr val="8C8C8C"/>
-                </a:solidFill>
-                <a:latin typeface="Arial"/>
-              </a:rPr>
-              <a:t/>
+              <a:t>Caminhando na vereda da justiça</a:t>
             </a:r>
           </a:p>
         </p:txBody>
@@ -3458,29 +3304,29 @@
         </p:nvSpPr>
         <p:spPr>
           <a:xfrm>
-            <a:off x="594360" y="2258568"/>
-            <a:ext cx="11002975" cy="685800"/>
-          </a:xfrm>
-          <a:prstGeom prst="rect">
-            <a:avLst/>
-          </a:prstGeom>
-          <a:noFill/>
-        </p:spPr>
-        <p:txBody>
-          <a:bodyPr wrap="square">
-            <a:spAutoFit/>
-          </a:bodyPr>
-          <a:lstStyle/>
-          <a:p>
-            <a:pPr algn="ctr"/>
-            <a:r>
-              <a:rPr sz="4400" b="1" i="0">
+            <a:off x="640080" y="2500884"/>
+            <a:ext cx="10911535" cy="731520"/>
+          </a:xfrm>
+          <a:prstGeom prst="rect">
+            <a:avLst/>
+          </a:prstGeom>
+          <a:noFill/>
+        </p:spPr>
+        <p:txBody>
+          <a:bodyPr wrap="square">
+            <a:spAutoFit/>
+          </a:bodyPr>
+          <a:lstStyle/>
+          <a:p>
+            <a:pPr algn="ctr"/>
+            <a:r>
+              <a:rPr sz="4800" b="1" i="0">
                 <a:solidFill>
                   <a:srgbClr val="FFFFFF"/>
                 </a:solidFill>
                 <a:latin typeface="Arial"/>
               </a:rPr>
-              <a:t>Pois Tu estás comigo</a:t>
+              <a:t>導いてくださる</a:t>
             </a:r>
           </a:p>
         </p:txBody>
@@ -3493,29 +3339,29 @@
         </p:nvSpPr>
         <p:spPr>
           <a:xfrm>
-            <a:off x="594360" y="2980944"/>
-            <a:ext cx="11002975" cy="347472"/>
-          </a:xfrm>
-          <a:prstGeom prst="rect">
-            <a:avLst/>
-          </a:prstGeom>
-          <a:noFill/>
-        </p:spPr>
-        <p:txBody>
-          <a:bodyPr wrap="square">
-            <a:spAutoFit/>
-          </a:bodyPr>
-          <a:lstStyle/>
-          <a:p>
-            <a:pPr algn="ctr"/>
-            <a:r>
-              <a:rPr sz="2200" b="0" i="1">
-                <a:solidFill>
-                  <a:srgbClr val="8C8C8C"/>
-                </a:solidFill>
-                <a:latin typeface="Arial"/>
-              </a:rPr>
-              <a:t/>
+            <a:off x="640080" y="3268980"/>
+            <a:ext cx="10911535" cy="365760"/>
+          </a:xfrm>
+          <a:prstGeom prst="rect">
+            <a:avLst/>
+          </a:prstGeom>
+          <a:noFill/>
+        </p:spPr>
+        <p:txBody>
+          <a:bodyPr wrap="square">
+            <a:spAutoFit/>
+          </a:bodyPr>
+          <a:lstStyle/>
+          <a:p>
+            <a:pPr algn="ctr"/>
+            <a:r>
+              <a:rPr sz="2400" b="0" i="1">
+                <a:solidFill>
+                  <a:srgbClr val="AAAAAA"/>
+                </a:solidFill>
+                <a:latin typeface="Arial"/>
+              </a:rPr>
+              <a:t>michibii tekudasaru</a:t>
             </a:r>
           </a:p>
         </p:txBody>
@@ -3528,64 +3374,29 @@
         </p:nvSpPr>
         <p:spPr>
           <a:xfrm>
-            <a:off x="594360" y="3529584"/>
-            <a:ext cx="11002975" cy="685800"/>
-          </a:xfrm>
-          <a:prstGeom prst="rect">
-            <a:avLst/>
-          </a:prstGeom>
-          <a:noFill/>
-        </p:spPr>
-        <p:txBody>
-          <a:bodyPr wrap="square">
-            <a:spAutoFit/>
-          </a:bodyPr>
-          <a:lstStyle/>
-          <a:p>
-            <a:pPr algn="ctr"/>
-            <a:r>
-              <a:rPr sz="4022" b="1" i="0">
-                <a:solidFill>
-                  <a:srgbClr val="FFFFFF"/>
-                </a:solidFill>
-                <a:latin typeface="Arial"/>
-              </a:rPr>
-              <a:t>Teu cajado e teu bordão me consolam</a:t>
-            </a:r>
-          </a:p>
-        </p:txBody>
-      </p:sp>
-      <p:sp>
-        <p:nvSpPr>
-          <p:cNvPr id="5" name="TextBox 4"/>
-          <p:cNvSpPr txBox="1"/>
-          <p:nvPr/>
-        </p:nvSpPr>
-        <p:spPr>
-          <a:xfrm>
-            <a:off x="594360" y="4251960"/>
-            <a:ext cx="11002975" cy="347472"/>
-          </a:xfrm>
-          <a:prstGeom prst="rect">
-            <a:avLst/>
-          </a:prstGeom>
-          <a:noFill/>
-        </p:spPr>
-        <p:txBody>
-          <a:bodyPr wrap="square">
-            <a:spAutoFit/>
-          </a:bodyPr>
-          <a:lstStyle/>
-          <a:p>
-            <a:pPr algn="ctr"/>
-            <a:r>
-              <a:rPr sz="2200" b="0" i="1">
-                <a:solidFill>
-                  <a:srgbClr val="8C8C8C"/>
-                </a:solidFill>
-                <a:latin typeface="Arial"/>
-              </a:rPr>
-              <a:t/>
+            <a:off x="640080" y="4046220"/>
+            <a:ext cx="10911535" cy="310896"/>
+          </a:xfrm>
+          <a:prstGeom prst="rect">
+            <a:avLst/>
+          </a:prstGeom>
+          <a:noFill/>
+        </p:spPr>
+        <p:txBody>
+          <a:bodyPr wrap="square">
+            <a:spAutoFit/>
+          </a:bodyPr>
+          <a:lstStyle/>
+          <a:p>
+            <a:pPr algn="ctr"/>
+            <a:r>
+              <a:rPr sz="2000" b="0" i="1">
+                <a:solidFill>
+                  <a:srgbClr val="828282"/>
+                </a:solidFill>
+                <a:latin typeface="Arial"/>
+              </a:rPr>
+              <a:t>O Senhor é meu pastor e nada me faltará</a:t>
             </a:r>
           </a:p>
         </p:txBody>
@@ -3624,29 +3435,29 @@
         </p:nvSpPr>
         <p:spPr>
           <a:xfrm>
-            <a:off x="594360" y="2258568"/>
-            <a:ext cx="11002975" cy="685800"/>
-          </a:xfrm>
-          <a:prstGeom prst="rect">
-            <a:avLst/>
-          </a:prstGeom>
-          <a:noFill/>
-        </p:spPr>
-        <p:txBody>
-          <a:bodyPr wrap="square">
-            <a:spAutoFit/>
-          </a:bodyPr>
-          <a:lstStyle/>
-          <a:p>
-            <a:pPr algn="ctr"/>
-            <a:r>
-              <a:rPr sz="3610" b="1" i="0">
+            <a:off x="640080" y="2052828"/>
+            <a:ext cx="10911535" cy="731520"/>
+          </a:xfrm>
+          <a:prstGeom prst="rect">
+            <a:avLst/>
+          </a:prstGeom>
+          <a:noFill/>
+        </p:spPr>
+        <p:txBody>
+          <a:bodyPr wrap="square">
+            <a:spAutoFit/>
+          </a:bodyPr>
+          <a:lstStyle/>
+          <a:p>
+            <a:pPr algn="ctr"/>
+            <a:r>
+              <a:rPr sz="4800" b="1" i="0">
                 <a:solidFill>
                   <a:srgbClr val="FFFFFF"/>
                 </a:solidFill>
                 <a:latin typeface="Arial"/>
               </a:rPr>
-              <a:t>O Senhor é meu pastor e nada me faltará</a:t>
+              <a:t>Por amor do Seu nome</a:t>
             </a:r>
           </a:p>
         </p:txBody>
@@ -3659,99 +3470,29 @@
         </p:nvSpPr>
         <p:spPr>
           <a:xfrm>
-            <a:off x="594360" y="2980944"/>
-            <a:ext cx="11002975" cy="347472"/>
-          </a:xfrm>
-          <a:prstGeom prst="rect">
-            <a:avLst/>
-          </a:prstGeom>
-          <a:noFill/>
-        </p:spPr>
-        <p:txBody>
-          <a:bodyPr wrap="square">
-            <a:spAutoFit/>
-          </a:bodyPr>
-          <a:lstStyle/>
-          <a:p>
-            <a:pPr algn="ctr"/>
-            <a:r>
-              <a:rPr sz="2200" b="0" i="1">
-                <a:solidFill>
-                  <a:srgbClr val="8C8C8C"/>
-                </a:solidFill>
-                <a:latin typeface="Arial"/>
-              </a:rPr>
-              <a:t/>
-            </a:r>
-          </a:p>
-        </p:txBody>
-      </p:sp>
-      <p:sp>
-        <p:nvSpPr>
-          <p:cNvPr id="4" name="TextBox 3"/>
-          <p:cNvSpPr txBox="1"/>
-          <p:nvPr/>
-        </p:nvSpPr>
-        <p:spPr>
-          <a:xfrm>
-            <a:off x="594360" y="3529584"/>
-            <a:ext cx="11002975" cy="685800"/>
-          </a:xfrm>
-          <a:prstGeom prst="rect">
-            <a:avLst/>
-          </a:prstGeom>
-          <a:noFill/>
-        </p:spPr>
-        <p:txBody>
-          <a:bodyPr wrap="square">
-            <a:spAutoFit/>
-          </a:bodyPr>
-          <a:lstStyle/>
-          <a:p>
-            <a:pPr algn="ctr"/>
-            <a:r>
-              <a:rPr sz="4400" b="1" i="0">
+            <a:off x="640080" y="2985516"/>
+            <a:ext cx="10911535" cy="731520"/>
+          </a:xfrm>
+          <a:prstGeom prst="rect">
+            <a:avLst/>
+          </a:prstGeom>
+          <a:noFill/>
+        </p:spPr>
+        <p:txBody>
+          <a:bodyPr wrap="square">
+            <a:spAutoFit/>
+          </a:bodyPr>
+          <a:lstStyle/>
+          <a:p>
+            <a:pPr algn="ctr"/>
+            <a:r>
+              <a:rPr sz="4100" b="1" i="0">
                 <a:solidFill>
                   <a:srgbClr val="FFFFFF"/>
                 </a:solidFill>
                 <a:latin typeface="Arial"/>
               </a:rPr>
-              <a:t/>
-            </a:r>
-          </a:p>
-        </p:txBody>
-      </p:sp>
-      <p:sp>
-        <p:nvSpPr>
-          <p:cNvPr id="5" name="TextBox 4"/>
-          <p:cNvSpPr txBox="1"/>
-          <p:nvPr/>
-        </p:nvSpPr>
-        <p:spPr>
-          <a:xfrm>
-            <a:off x="594360" y="4251960"/>
-            <a:ext cx="11002975" cy="347472"/>
-          </a:xfrm>
-          <a:prstGeom prst="rect">
-            <a:avLst/>
-          </a:prstGeom>
-          <a:noFill/>
-        </p:spPr>
-        <p:txBody>
-          <a:bodyPr wrap="square">
-            <a:spAutoFit/>
-          </a:bodyPr>
-          <a:lstStyle/>
-          <a:p>
-            <a:pPr algn="ctr"/>
-            <a:r>
-              <a:rPr sz="2200" b="0" i="1">
-                <a:solidFill>
-                  <a:srgbClr val="8C8C8C"/>
-                </a:solidFill>
-                <a:latin typeface="Arial"/>
-              </a:rPr>
-              <a:t/>
+              <a:t>Ainda que eu ande pelo vale da sombra</a:t>
             </a:r>
           </a:p>
         </p:txBody>
@@ -3790,29 +3531,29 @@
         </p:nvSpPr>
         <p:spPr>
           <a:xfrm>
-            <a:off x="594360" y="2258568"/>
-            <a:ext cx="11002975" cy="685800"/>
-          </a:xfrm>
-          <a:prstGeom prst="rect">
-            <a:avLst/>
-          </a:prstGeom>
-          <a:noFill/>
-        </p:spPr>
-        <p:txBody>
-          <a:bodyPr wrap="square">
-            <a:spAutoFit/>
-          </a:bodyPr>
-          <a:lstStyle/>
-          <a:p>
-            <a:pPr algn="ctr"/>
-            <a:r>
-              <a:rPr sz="4400" b="1" i="0">
+            <a:off x="640080" y="2500884"/>
+            <a:ext cx="10911535" cy="731520"/>
+          </a:xfrm>
+          <a:prstGeom prst="rect">
+            <a:avLst/>
+          </a:prstGeom>
+          <a:noFill/>
+        </p:spPr>
+        <p:txBody>
+          <a:bodyPr wrap="square">
+            <a:spAutoFit/>
+          </a:bodyPr>
+          <a:lstStyle/>
+          <a:p>
+            <a:pPr algn="ctr"/>
+            <a:r>
+              <a:rPr sz="4800" b="1" i="0">
                 <a:solidFill>
                   <a:srgbClr val="FFFFFF"/>
                 </a:solidFill>
                 <a:latin typeface="Arial"/>
               </a:rPr>
-              <a:t/>
+              <a:t>主よ　あなただけを</a:t>
             </a:r>
           </a:p>
         </p:txBody>
@@ -3825,29 +3566,29 @@
         </p:nvSpPr>
         <p:spPr>
           <a:xfrm>
-            <a:off x="594360" y="2980944"/>
-            <a:ext cx="11002975" cy="347472"/>
-          </a:xfrm>
-          <a:prstGeom prst="rect">
-            <a:avLst/>
-          </a:prstGeom>
-          <a:noFill/>
-        </p:spPr>
-        <p:txBody>
-          <a:bodyPr wrap="square">
-            <a:spAutoFit/>
-          </a:bodyPr>
-          <a:lstStyle/>
-          <a:p>
-            <a:pPr algn="ctr"/>
-            <a:r>
-              <a:rPr sz="2200" b="0" i="1">
-                <a:solidFill>
-                  <a:srgbClr val="8C8C8C"/>
-                </a:solidFill>
-                <a:latin typeface="Arial"/>
-              </a:rPr>
-              <a:t/>
+            <a:off x="640080" y="3268980"/>
+            <a:ext cx="10911535" cy="365760"/>
+          </a:xfrm>
+          <a:prstGeom prst="rect">
+            <a:avLst/>
+          </a:prstGeom>
+          <a:noFill/>
+        </p:spPr>
+        <p:txBody>
+          <a:bodyPr wrap="square">
+            <a:spAutoFit/>
+          </a:bodyPr>
+          <a:lstStyle/>
+          <a:p>
+            <a:pPr algn="ctr"/>
+            <a:r>
+              <a:rPr sz="2400" b="0" i="1">
+                <a:solidFill>
+                  <a:srgbClr val="AAAAAA"/>
+                </a:solidFill>
+                <a:latin typeface="Arial"/>
+              </a:rPr>
+              <a:t>shu yo anatadakewo</a:t>
             </a:r>
           </a:p>
         </p:txBody>
@@ -3860,64 +3601,29 @@
         </p:nvSpPr>
         <p:spPr>
           <a:xfrm>
-            <a:off x="594360" y="3529584"/>
-            <a:ext cx="11002975" cy="685800"/>
-          </a:xfrm>
-          <a:prstGeom prst="rect">
-            <a:avLst/>
-          </a:prstGeom>
-          <a:noFill/>
-        </p:spPr>
-        <p:txBody>
-          <a:bodyPr wrap="square">
-            <a:spAutoFit/>
-          </a:bodyPr>
-          <a:lstStyle/>
-          <a:p>
-            <a:pPr algn="ctr"/>
-            <a:r>
-              <a:rPr sz="4400" b="1" i="0">
-                <a:solidFill>
-                  <a:srgbClr val="FFFFFF"/>
-                </a:solidFill>
-                <a:latin typeface="Arial"/>
-              </a:rPr>
-              <a:t/>
-            </a:r>
-          </a:p>
-        </p:txBody>
-      </p:sp>
-      <p:sp>
-        <p:nvSpPr>
-          <p:cNvPr id="5" name="TextBox 4"/>
-          <p:cNvSpPr txBox="1"/>
-          <p:nvPr/>
-        </p:nvSpPr>
-        <p:spPr>
-          <a:xfrm>
-            <a:off x="594360" y="4251960"/>
-            <a:ext cx="11002975" cy="347472"/>
-          </a:xfrm>
-          <a:prstGeom prst="rect">
-            <a:avLst/>
-          </a:prstGeom>
-          <a:noFill/>
-        </p:spPr>
-        <p:txBody>
-          <a:bodyPr wrap="square">
-            <a:spAutoFit/>
-          </a:bodyPr>
-          <a:lstStyle/>
-          <a:p>
-            <a:pPr algn="ctr"/>
-            <a:r>
-              <a:rPr sz="2200" b="0" i="1">
-                <a:solidFill>
-                  <a:srgbClr val="8C8C8C"/>
-                </a:solidFill>
-                <a:latin typeface="Arial"/>
-              </a:rPr>
-              <a:t/>
+            <a:off x="640080" y="4046220"/>
+            <a:ext cx="10911535" cy="310896"/>
+          </a:xfrm>
+          <a:prstGeom prst="rect">
+            <a:avLst/>
+          </a:prstGeom>
+          <a:noFill/>
+        </p:spPr>
+        <p:txBody>
+          <a:bodyPr wrap="square">
+            <a:spAutoFit/>
+          </a:bodyPr>
+          <a:lstStyle/>
+          <a:p>
+            <a:pPr algn="ctr"/>
+            <a:r>
+              <a:rPr sz="2000" b="0" i="1">
+                <a:solidFill>
+                  <a:srgbClr val="828282"/>
+                </a:solidFill>
+                <a:latin typeface="Arial"/>
+              </a:rPr>
+              <a:t>O Senhor é meu pastor e nada me faltará</a:t>
             </a:r>
           </a:p>
         </p:txBody>
@@ -3956,134 +3662,29 @@
         </p:nvSpPr>
         <p:spPr>
           <a:xfrm>
-            <a:off x="594360" y="2258568"/>
-            <a:ext cx="11002975" cy="685800"/>
-          </a:xfrm>
-          <a:prstGeom prst="rect">
-            <a:avLst/>
-          </a:prstGeom>
-          <a:noFill/>
-        </p:spPr>
-        <p:txBody>
-          <a:bodyPr wrap="square">
-            <a:spAutoFit/>
-          </a:bodyPr>
-          <a:lstStyle/>
-          <a:p>
-            <a:pPr algn="ctr"/>
-            <a:r>
-              <a:rPr sz="4400" b="1" i="0">
+            <a:off x="640080" y="2702052"/>
+            <a:ext cx="10911535" cy="731520"/>
+          </a:xfrm>
+          <a:prstGeom prst="rect">
+            <a:avLst/>
+          </a:prstGeom>
+          <a:noFill/>
+        </p:spPr>
+        <p:txBody>
+          <a:bodyPr wrap="square">
+            <a:spAutoFit/>
+          </a:bodyPr>
+          <a:lstStyle/>
+          <a:p>
+            <a:pPr algn="ctr"/>
+            <a:r>
+              <a:rPr sz="4800" b="1" i="0">
                 <a:solidFill>
                   <a:srgbClr val="FFFFFF"/>
                 </a:solidFill>
                 <a:latin typeface="Arial"/>
               </a:rPr>
-              <a:t/>
-            </a:r>
-          </a:p>
-        </p:txBody>
-      </p:sp>
-      <p:sp>
-        <p:nvSpPr>
-          <p:cNvPr id="3" name="TextBox 2"/>
-          <p:cNvSpPr txBox="1"/>
-          <p:nvPr/>
-        </p:nvSpPr>
-        <p:spPr>
-          <a:xfrm>
-            <a:off x="594360" y="2980944"/>
-            <a:ext cx="11002975" cy="347472"/>
-          </a:xfrm>
-          <a:prstGeom prst="rect">
-            <a:avLst/>
-          </a:prstGeom>
-          <a:noFill/>
-        </p:spPr>
-        <p:txBody>
-          <a:bodyPr wrap="square">
-            <a:spAutoFit/>
-          </a:bodyPr>
-          <a:lstStyle/>
-          <a:p>
-            <a:pPr algn="ctr"/>
-            <a:r>
-              <a:rPr sz="2200" b="0" i="1">
-                <a:solidFill>
-                  <a:srgbClr val="8C8C8C"/>
-                </a:solidFill>
-                <a:latin typeface="Arial"/>
-              </a:rPr>
-              <a:t/>
-            </a:r>
-          </a:p>
-        </p:txBody>
-      </p:sp>
-      <p:sp>
-        <p:nvSpPr>
-          <p:cNvPr id="4" name="TextBox 3"/>
-          <p:cNvSpPr txBox="1"/>
-          <p:nvPr/>
-        </p:nvSpPr>
-        <p:spPr>
-          <a:xfrm>
-            <a:off x="594360" y="3529584"/>
-            <a:ext cx="11002975" cy="685800"/>
-          </a:xfrm>
-          <a:prstGeom prst="rect">
-            <a:avLst/>
-          </a:prstGeom>
-          <a:noFill/>
-        </p:spPr>
-        <p:txBody>
-          <a:bodyPr wrap="square">
-            <a:spAutoFit/>
-          </a:bodyPr>
-          <a:lstStyle/>
-          <a:p>
-            <a:pPr algn="ctr"/>
-            <a:r>
-              <a:rPr sz="4400" b="1" i="0">
-                <a:solidFill>
-                  <a:srgbClr val="FFFFFF"/>
-                </a:solidFill>
-                <a:latin typeface="Arial"/>
-              </a:rPr>
-              <a:t/>
-            </a:r>
-          </a:p>
-        </p:txBody>
-      </p:sp>
-      <p:sp>
-        <p:nvSpPr>
-          <p:cNvPr id="5" name="TextBox 4"/>
-          <p:cNvSpPr txBox="1"/>
-          <p:nvPr/>
-        </p:nvSpPr>
-        <p:spPr>
-          <a:xfrm>
-            <a:off x="594360" y="4251960"/>
-            <a:ext cx="11002975" cy="347472"/>
-          </a:xfrm>
-          <a:prstGeom prst="rect">
-            <a:avLst/>
-          </a:prstGeom>
-          <a:noFill/>
-        </p:spPr>
-        <p:txBody>
-          <a:bodyPr wrap="square">
-            <a:spAutoFit/>
-          </a:bodyPr>
-          <a:lstStyle/>
-          <a:p>
-            <a:pPr algn="ctr"/>
-            <a:r>
-              <a:rPr sz="2200" b="0" i="1">
-                <a:solidFill>
-                  <a:srgbClr val="8C8C8C"/>
-                </a:solidFill>
-                <a:latin typeface="Arial"/>
-              </a:rPr>
-              <a:t/>
+              <a:t>Pois Tu estás comigo</a:t>
             </a:r>
           </a:p>
         </p:txBody>
@@ -4122,29 +3723,29 @@
         </p:nvSpPr>
         <p:spPr>
           <a:xfrm>
-            <a:off x="594360" y="2258568"/>
-            <a:ext cx="11002975" cy="685800"/>
-          </a:xfrm>
-          <a:prstGeom prst="rect">
-            <a:avLst/>
-          </a:prstGeom>
-          <a:noFill/>
-        </p:spPr>
-        <p:txBody>
-          <a:bodyPr wrap="square">
-            <a:spAutoFit/>
-          </a:bodyPr>
-          <a:lstStyle/>
-          <a:p>
-            <a:pPr algn="ctr"/>
-            <a:r>
-              <a:rPr sz="4400" b="1" i="0">
+            <a:off x="640080" y="2500884"/>
+            <a:ext cx="10911535" cy="731520"/>
+          </a:xfrm>
+          <a:prstGeom prst="rect">
+            <a:avLst/>
+          </a:prstGeom>
+          <a:noFill/>
+        </p:spPr>
+        <p:txBody>
+          <a:bodyPr wrap="square">
+            <a:spAutoFit/>
+          </a:bodyPr>
+          <a:lstStyle/>
+          <a:p>
+            <a:pPr algn="ctr"/>
+            <a:r>
+              <a:rPr sz="4800" b="1" i="0">
                 <a:solidFill>
                   <a:srgbClr val="FFFFFF"/>
                 </a:solidFill>
                 <a:latin typeface="Arial"/>
               </a:rPr>
-              <a:t/>
+              <a:t>信じ　歩みます</a:t>
             </a:r>
           </a:p>
         </p:txBody>
@@ -4157,29 +3758,29 @@
         </p:nvSpPr>
         <p:spPr>
           <a:xfrm>
-            <a:off x="594360" y="2980944"/>
-            <a:ext cx="11002975" cy="347472"/>
-          </a:xfrm>
-          <a:prstGeom prst="rect">
-            <a:avLst/>
-          </a:prstGeom>
-          <a:noFill/>
-        </p:spPr>
-        <p:txBody>
-          <a:bodyPr wrap="square">
-            <a:spAutoFit/>
-          </a:bodyPr>
-          <a:lstStyle/>
-          <a:p>
-            <a:pPr algn="ctr"/>
-            <a:r>
-              <a:rPr sz="2200" b="0" i="1">
-                <a:solidFill>
-                  <a:srgbClr val="8C8C8C"/>
-                </a:solidFill>
-                <a:latin typeface="Arial"/>
-              </a:rPr>
-              <a:t/>
+            <a:off x="640080" y="3268980"/>
+            <a:ext cx="10911535" cy="365760"/>
+          </a:xfrm>
+          <a:prstGeom prst="rect">
+            <a:avLst/>
+          </a:prstGeom>
+          <a:noFill/>
+        </p:spPr>
+        <p:txBody>
+          <a:bodyPr wrap="square">
+            <a:spAutoFit/>
+          </a:bodyPr>
+          <a:lstStyle/>
+          <a:p>
+            <a:pPr algn="ctr"/>
+            <a:r>
+              <a:rPr sz="2400" b="0" i="1">
+                <a:solidFill>
+                  <a:srgbClr val="AAAAAA"/>
+                </a:solidFill>
+                <a:latin typeface="Arial"/>
+              </a:rPr>
+              <a:t>shinji ayumi masu</a:t>
             </a:r>
           </a:p>
         </p:txBody>
@@ -4192,64 +3793,29 @@
         </p:nvSpPr>
         <p:spPr>
           <a:xfrm>
-            <a:off x="594360" y="3529584"/>
-            <a:ext cx="11002975" cy="685800"/>
-          </a:xfrm>
-          <a:prstGeom prst="rect">
-            <a:avLst/>
-          </a:prstGeom>
-          <a:noFill/>
-        </p:spPr>
-        <p:txBody>
-          <a:bodyPr wrap="square">
-            <a:spAutoFit/>
-          </a:bodyPr>
-          <a:lstStyle/>
-          <a:p>
-            <a:pPr algn="ctr"/>
-            <a:r>
-              <a:rPr sz="4400" b="1" i="0">
-                <a:solidFill>
-                  <a:srgbClr val="FFFFFF"/>
-                </a:solidFill>
-                <a:latin typeface="Arial"/>
-              </a:rPr>
-              <a:t/>
-            </a:r>
-          </a:p>
-        </p:txBody>
-      </p:sp>
-      <p:sp>
-        <p:nvSpPr>
-          <p:cNvPr id="5" name="TextBox 4"/>
-          <p:cNvSpPr txBox="1"/>
-          <p:nvPr/>
-        </p:nvSpPr>
-        <p:spPr>
-          <a:xfrm>
-            <a:off x="594360" y="4251960"/>
-            <a:ext cx="11002975" cy="347472"/>
-          </a:xfrm>
-          <a:prstGeom prst="rect">
-            <a:avLst/>
-          </a:prstGeom>
-          <a:noFill/>
-        </p:spPr>
-        <p:txBody>
-          <a:bodyPr wrap="square">
-            <a:spAutoFit/>
-          </a:bodyPr>
-          <a:lstStyle/>
-          <a:p>
-            <a:pPr algn="ctr"/>
-            <a:r>
-              <a:rPr sz="2200" b="0" i="1">
-                <a:solidFill>
-                  <a:srgbClr val="8C8C8C"/>
-                </a:solidFill>
-                <a:latin typeface="Arial"/>
-              </a:rPr>
-              <a:t/>
+            <a:off x="640080" y="4046220"/>
+            <a:ext cx="10911535" cy="310896"/>
+          </a:xfrm>
+          <a:prstGeom prst="rect">
+            <a:avLst/>
+          </a:prstGeom>
+          <a:noFill/>
+        </p:spPr>
+        <p:txBody>
+          <a:bodyPr wrap="square">
+            <a:spAutoFit/>
+          </a:bodyPr>
+          <a:lstStyle/>
+          <a:p>
+            <a:pPr algn="ctr"/>
+            <a:r>
+              <a:rPr sz="2000" b="0" i="1">
+                <a:solidFill>
+                  <a:srgbClr val="828282"/>
+                </a:solidFill>
+                <a:latin typeface="Arial"/>
+              </a:rPr>
+              <a:t>O Senhor é meu pastor e nada me faltará</a:t>
             </a:r>
           </a:p>
         </p:txBody>
@@ -4288,134 +3854,29 @@
         </p:nvSpPr>
         <p:spPr>
           <a:xfrm>
-            <a:off x="594360" y="2258568"/>
-            <a:ext cx="11002975" cy="685800"/>
-          </a:xfrm>
-          <a:prstGeom prst="rect">
-            <a:avLst/>
-          </a:prstGeom>
-          <a:noFill/>
-        </p:spPr>
-        <p:txBody>
-          <a:bodyPr wrap="square">
-            <a:spAutoFit/>
-          </a:bodyPr>
-          <a:lstStyle/>
-          <a:p>
-            <a:pPr algn="ctr"/>
-            <a:r>
-              <a:rPr sz="4400" b="1" i="0">
+            <a:off x="640080" y="2702052"/>
+            <a:ext cx="10911535" cy="731520"/>
+          </a:xfrm>
+          <a:prstGeom prst="rect">
+            <a:avLst/>
+          </a:prstGeom>
+          <a:noFill/>
+        </p:spPr>
+        <p:txBody>
+          <a:bodyPr wrap="square">
+            <a:spAutoFit/>
+          </a:bodyPr>
+          <a:lstStyle/>
+          <a:p>
+            <a:pPr algn="ctr"/>
+            <a:r>
+              <a:rPr sz="4300" b="1" i="0">
                 <a:solidFill>
                   <a:srgbClr val="FFFFFF"/>
                 </a:solidFill>
                 <a:latin typeface="Arial"/>
               </a:rPr>
-              <a:t/>
-            </a:r>
-          </a:p>
-        </p:txBody>
-      </p:sp>
-      <p:sp>
-        <p:nvSpPr>
-          <p:cNvPr id="3" name="TextBox 2"/>
-          <p:cNvSpPr txBox="1"/>
-          <p:nvPr/>
-        </p:nvSpPr>
-        <p:spPr>
-          <a:xfrm>
-            <a:off x="594360" y="2980944"/>
-            <a:ext cx="11002975" cy="347472"/>
-          </a:xfrm>
-          <a:prstGeom prst="rect">
-            <a:avLst/>
-          </a:prstGeom>
-          <a:noFill/>
-        </p:spPr>
-        <p:txBody>
-          <a:bodyPr wrap="square">
-            <a:spAutoFit/>
-          </a:bodyPr>
-          <a:lstStyle/>
-          <a:p>
-            <a:pPr algn="ctr"/>
-            <a:r>
-              <a:rPr sz="2200" b="0" i="1">
-                <a:solidFill>
-                  <a:srgbClr val="8C8C8C"/>
-                </a:solidFill>
-                <a:latin typeface="Arial"/>
-              </a:rPr>
-              <a:t/>
-            </a:r>
-          </a:p>
-        </p:txBody>
-      </p:sp>
-      <p:sp>
-        <p:nvSpPr>
-          <p:cNvPr id="4" name="TextBox 3"/>
-          <p:cNvSpPr txBox="1"/>
-          <p:nvPr/>
-        </p:nvSpPr>
-        <p:spPr>
-          <a:xfrm>
-            <a:off x="594360" y="3529584"/>
-            <a:ext cx="11002975" cy="685800"/>
-          </a:xfrm>
-          <a:prstGeom prst="rect">
-            <a:avLst/>
-          </a:prstGeom>
-          <a:noFill/>
-        </p:spPr>
-        <p:txBody>
-          <a:bodyPr wrap="square">
-            <a:spAutoFit/>
-          </a:bodyPr>
-          <a:lstStyle/>
-          <a:p>
-            <a:pPr algn="ctr"/>
-            <a:r>
-              <a:rPr sz="4400" b="1" i="0">
-                <a:solidFill>
-                  <a:srgbClr val="FFFFFF"/>
-                </a:solidFill>
-                <a:latin typeface="Arial"/>
-              </a:rPr>
-              <a:t/>
-            </a:r>
-          </a:p>
-        </p:txBody>
-      </p:sp>
-      <p:sp>
-        <p:nvSpPr>
-          <p:cNvPr id="5" name="TextBox 4"/>
-          <p:cNvSpPr txBox="1"/>
-          <p:nvPr/>
-        </p:nvSpPr>
-        <p:spPr>
-          <a:xfrm>
-            <a:off x="594360" y="4251960"/>
-            <a:ext cx="11002975" cy="347472"/>
-          </a:xfrm>
-          <a:prstGeom prst="rect">
-            <a:avLst/>
-          </a:prstGeom>
-          <a:noFill/>
-        </p:spPr>
-        <p:txBody>
-          <a:bodyPr wrap="square">
-            <a:spAutoFit/>
-          </a:bodyPr>
-          <a:lstStyle/>
-          <a:p>
-            <a:pPr algn="ctr"/>
-            <a:r>
-              <a:rPr sz="2200" b="0" i="1">
-                <a:solidFill>
-                  <a:srgbClr val="8C8C8C"/>
-                </a:solidFill>
-                <a:latin typeface="Arial"/>
-              </a:rPr>
-              <a:t/>
+              <a:t>Teu cajado e teu bordão me consolam</a:t>
             </a:r>
           </a:p>
         </p:txBody>
@@ -4454,29 +3915,29 @@
         </p:nvSpPr>
         <p:spPr>
           <a:xfrm>
-            <a:off x="594360" y="2258568"/>
-            <a:ext cx="11002975" cy="685800"/>
-          </a:xfrm>
-          <a:prstGeom prst="rect">
-            <a:avLst/>
-          </a:prstGeom>
-          <a:noFill/>
-        </p:spPr>
-        <p:txBody>
-          <a:bodyPr wrap="square">
-            <a:spAutoFit/>
-          </a:bodyPr>
-          <a:lstStyle/>
-          <a:p>
-            <a:pPr algn="ctr"/>
-            <a:r>
-              <a:rPr sz="4400" b="1" i="0">
+            <a:off x="640080" y="2500884"/>
+            <a:ext cx="10911535" cy="731520"/>
+          </a:xfrm>
+          <a:prstGeom prst="rect">
+            <a:avLst/>
+          </a:prstGeom>
+          <a:noFill/>
+        </p:spPr>
+        <p:txBody>
+          <a:bodyPr wrap="square">
+            <a:spAutoFit/>
+          </a:bodyPr>
+          <a:lstStyle/>
+          <a:p>
+            <a:pPr algn="ctr"/>
+            <a:r>
+              <a:rPr sz="4800" b="1" i="0">
                 <a:solidFill>
                   <a:srgbClr val="FFFFFF"/>
                 </a:solidFill>
                 <a:latin typeface="Arial"/>
               </a:rPr>
-              <a:t/>
+              <a:t>いつくしみと　恵みが</a:t>
             </a:r>
           </a:p>
         </p:txBody>
@@ -4489,29 +3950,29 @@
         </p:nvSpPr>
         <p:spPr>
           <a:xfrm>
-            <a:off x="594360" y="2980944"/>
-            <a:ext cx="11002975" cy="347472"/>
-          </a:xfrm>
-          <a:prstGeom prst="rect">
-            <a:avLst/>
-          </a:prstGeom>
-          <a:noFill/>
-        </p:spPr>
-        <p:txBody>
-          <a:bodyPr wrap="square">
-            <a:spAutoFit/>
-          </a:bodyPr>
-          <a:lstStyle/>
-          <a:p>
-            <a:pPr algn="ctr"/>
-            <a:r>
-              <a:rPr sz="2200" b="0" i="1">
-                <a:solidFill>
-                  <a:srgbClr val="8C8C8C"/>
-                </a:solidFill>
-                <a:latin typeface="Arial"/>
-              </a:rPr>
-              <a:t/>
+            <a:off x="640080" y="3268980"/>
+            <a:ext cx="10911535" cy="365760"/>
+          </a:xfrm>
+          <a:prstGeom prst="rect">
+            <a:avLst/>
+          </a:prstGeom>
+          <a:noFill/>
+        </p:spPr>
+        <p:txBody>
+          <a:bodyPr wrap="square">
+            <a:spAutoFit/>
+          </a:bodyPr>
+          <a:lstStyle/>
+          <a:p>
+            <a:pPr algn="ctr"/>
+            <a:r>
+              <a:rPr sz="2400" b="0" i="1">
+                <a:solidFill>
+                  <a:srgbClr val="AAAAAA"/>
+                </a:solidFill>
+                <a:latin typeface="Arial"/>
+              </a:rPr>
+              <a:t>itsukushimito megumi ga</a:t>
             </a:r>
           </a:p>
         </p:txBody>
@@ -4524,64 +3985,29 @@
         </p:nvSpPr>
         <p:spPr>
           <a:xfrm>
-            <a:off x="594360" y="3529584"/>
-            <a:ext cx="11002975" cy="685800"/>
-          </a:xfrm>
-          <a:prstGeom prst="rect">
-            <a:avLst/>
-          </a:prstGeom>
-          <a:noFill/>
-        </p:spPr>
-        <p:txBody>
-          <a:bodyPr wrap="square">
-            <a:spAutoFit/>
-          </a:bodyPr>
-          <a:lstStyle/>
-          <a:p>
-            <a:pPr algn="ctr"/>
-            <a:r>
-              <a:rPr sz="4400" b="1" i="0">
-                <a:solidFill>
-                  <a:srgbClr val="FFFFFF"/>
-                </a:solidFill>
-                <a:latin typeface="Arial"/>
-              </a:rPr>
-              <a:t/>
-            </a:r>
-          </a:p>
-        </p:txBody>
-      </p:sp>
-      <p:sp>
-        <p:nvSpPr>
-          <p:cNvPr id="5" name="TextBox 4"/>
-          <p:cNvSpPr txBox="1"/>
-          <p:nvPr/>
-        </p:nvSpPr>
-        <p:spPr>
-          <a:xfrm>
-            <a:off x="594360" y="4251960"/>
-            <a:ext cx="11002975" cy="347472"/>
-          </a:xfrm>
-          <a:prstGeom prst="rect">
-            <a:avLst/>
-          </a:prstGeom>
-          <a:noFill/>
-        </p:spPr>
-        <p:txBody>
-          <a:bodyPr wrap="square">
-            <a:spAutoFit/>
-          </a:bodyPr>
-          <a:lstStyle/>
-          <a:p>
-            <a:pPr algn="ctr"/>
-            <a:r>
-              <a:rPr sz="2200" b="0" i="1">
-                <a:solidFill>
-                  <a:srgbClr val="8C8C8C"/>
-                </a:solidFill>
-                <a:latin typeface="Arial"/>
-              </a:rPr>
-              <a:t/>
+            <a:off x="640080" y="4046220"/>
+            <a:ext cx="10911535" cy="310896"/>
+          </a:xfrm>
+          <a:prstGeom prst="rect">
+            <a:avLst/>
+          </a:prstGeom>
+          <a:noFill/>
+        </p:spPr>
+        <p:txBody>
+          <a:bodyPr wrap="square">
+            <a:spAutoFit/>
+          </a:bodyPr>
+          <a:lstStyle/>
+          <a:p>
+            <a:pPr algn="ctr"/>
+            <a:r>
+              <a:rPr sz="2000" b="0" i="1">
+                <a:solidFill>
+                  <a:srgbClr val="828282"/>
+                </a:solidFill>
+                <a:latin typeface="Arial"/>
+              </a:rPr>
+              <a:t>O Senhor é meu pastor e nada me faltará</a:t>
             </a:r>
           </a:p>
         </p:txBody>
@@ -4620,134 +4046,29 @@
         </p:nvSpPr>
         <p:spPr>
           <a:xfrm>
-            <a:off x="594360" y="2258568"/>
-            <a:ext cx="11002975" cy="685800"/>
-          </a:xfrm>
-          <a:prstGeom prst="rect">
-            <a:avLst/>
-          </a:prstGeom>
-          <a:noFill/>
-        </p:spPr>
-        <p:txBody>
-          <a:bodyPr wrap="square">
-            <a:spAutoFit/>
-          </a:bodyPr>
-          <a:lstStyle/>
-          <a:p>
-            <a:pPr algn="ctr"/>
-            <a:r>
-              <a:rPr sz="4400" b="1" i="0">
+            <a:off x="640080" y="2702052"/>
+            <a:ext cx="10911535" cy="731520"/>
+          </a:xfrm>
+          <a:prstGeom prst="rect">
+            <a:avLst/>
+          </a:prstGeom>
+          <a:noFill/>
+        </p:spPr>
+        <p:txBody>
+          <a:bodyPr wrap="square">
+            <a:spAutoFit/>
+          </a:bodyPr>
+          <a:lstStyle/>
+          <a:p>
+            <a:pPr algn="ctr"/>
+            <a:r>
+              <a:rPr sz="3900" b="1" i="0">
                 <a:solidFill>
                   <a:srgbClr val="FFFFFF"/>
                 </a:solidFill>
                 <a:latin typeface="Arial"/>
               </a:rPr>
-              <a:t/>
-            </a:r>
-          </a:p>
-        </p:txBody>
-      </p:sp>
-      <p:sp>
-        <p:nvSpPr>
-          <p:cNvPr id="3" name="TextBox 2"/>
-          <p:cNvSpPr txBox="1"/>
-          <p:nvPr/>
-        </p:nvSpPr>
-        <p:spPr>
-          <a:xfrm>
-            <a:off x="594360" y="2980944"/>
-            <a:ext cx="11002975" cy="347472"/>
-          </a:xfrm>
-          <a:prstGeom prst="rect">
-            <a:avLst/>
-          </a:prstGeom>
-          <a:noFill/>
-        </p:spPr>
-        <p:txBody>
-          <a:bodyPr wrap="square">
-            <a:spAutoFit/>
-          </a:bodyPr>
-          <a:lstStyle/>
-          <a:p>
-            <a:pPr algn="ctr"/>
-            <a:r>
-              <a:rPr sz="2200" b="0" i="1">
-                <a:solidFill>
-                  <a:srgbClr val="8C8C8C"/>
-                </a:solidFill>
-                <a:latin typeface="Arial"/>
-              </a:rPr>
-              <a:t/>
-            </a:r>
-          </a:p>
-        </p:txBody>
-      </p:sp>
-      <p:sp>
-        <p:nvSpPr>
-          <p:cNvPr id="4" name="TextBox 3"/>
-          <p:cNvSpPr txBox="1"/>
-          <p:nvPr/>
-        </p:nvSpPr>
-        <p:spPr>
-          <a:xfrm>
-            <a:off x="594360" y="3529584"/>
-            <a:ext cx="11002975" cy="685800"/>
-          </a:xfrm>
-          <a:prstGeom prst="rect">
-            <a:avLst/>
-          </a:prstGeom>
-          <a:noFill/>
-        </p:spPr>
-        <p:txBody>
-          <a:bodyPr wrap="square">
-            <a:spAutoFit/>
-          </a:bodyPr>
-          <a:lstStyle/>
-          <a:p>
-            <a:pPr algn="ctr"/>
-            <a:r>
-              <a:rPr sz="4400" b="1" i="0">
-                <a:solidFill>
-                  <a:srgbClr val="FFFFFF"/>
-                </a:solidFill>
-                <a:latin typeface="Arial"/>
-              </a:rPr>
-              <a:t/>
-            </a:r>
-          </a:p>
-        </p:txBody>
-      </p:sp>
-      <p:sp>
-        <p:nvSpPr>
-          <p:cNvPr id="5" name="TextBox 4"/>
-          <p:cNvSpPr txBox="1"/>
-          <p:nvPr/>
-        </p:nvSpPr>
-        <p:spPr>
-          <a:xfrm>
-            <a:off x="594360" y="4251960"/>
-            <a:ext cx="11002975" cy="347472"/>
-          </a:xfrm>
-          <a:prstGeom prst="rect">
-            <a:avLst/>
-          </a:prstGeom>
-          <a:noFill/>
-        </p:spPr>
-        <p:txBody>
-          <a:bodyPr wrap="square">
-            <a:spAutoFit/>
-          </a:bodyPr>
-          <a:lstStyle/>
-          <a:p>
-            <a:pPr algn="ctr"/>
-            <a:r>
-              <a:rPr sz="2200" b="0" i="1">
-                <a:solidFill>
-                  <a:srgbClr val="8C8C8C"/>
-                </a:solidFill>
-                <a:latin typeface="Arial"/>
-              </a:rPr>
-              <a:t/>
+              <a:t>O Senhor é meu pastor e nada me faltará</a:t>
             </a:r>
           </a:p>
         </p:txBody>
@@ -4786,29 +4107,29 @@
         </p:nvSpPr>
         <p:spPr>
           <a:xfrm>
-            <a:off x="594360" y="2258568"/>
-            <a:ext cx="11002975" cy="685800"/>
-          </a:xfrm>
-          <a:prstGeom prst="rect">
-            <a:avLst/>
-          </a:prstGeom>
-          <a:noFill/>
-        </p:spPr>
-        <p:txBody>
-          <a:bodyPr wrap="square">
-            <a:spAutoFit/>
-          </a:bodyPr>
-          <a:lstStyle/>
-          <a:p>
-            <a:pPr algn="ctr"/>
-            <a:r>
-              <a:rPr sz="4400" b="1" i="0">
+            <a:off x="640080" y="2500884"/>
+            <a:ext cx="10911535" cy="731520"/>
+          </a:xfrm>
+          <a:prstGeom prst="rect">
+            <a:avLst/>
+          </a:prstGeom>
+          <a:noFill/>
+        </p:spPr>
+        <p:txBody>
+          <a:bodyPr wrap="square">
+            <a:spAutoFit/>
+          </a:bodyPr>
+          <a:lstStyle/>
+          <a:p>
+            <a:pPr algn="ctr"/>
+            <a:r>
+              <a:rPr sz="4800" b="1" i="0">
                 <a:solidFill>
                   <a:srgbClr val="FFFFFF"/>
                 </a:solidFill>
                 <a:latin typeface="Arial"/>
               </a:rPr>
-              <a:t/>
+              <a:t>私を追うでしょう</a:t>
             </a:r>
           </a:p>
         </p:txBody>
@@ -4821,29 +4142,29 @@
         </p:nvSpPr>
         <p:spPr>
           <a:xfrm>
-            <a:off x="594360" y="2980944"/>
-            <a:ext cx="11002975" cy="347472"/>
-          </a:xfrm>
-          <a:prstGeom prst="rect">
-            <a:avLst/>
-          </a:prstGeom>
-          <a:noFill/>
-        </p:spPr>
-        <p:txBody>
-          <a:bodyPr wrap="square">
-            <a:spAutoFit/>
-          </a:bodyPr>
-          <a:lstStyle/>
-          <a:p>
-            <a:pPr algn="ctr"/>
-            <a:r>
-              <a:rPr sz="2200" b="0" i="1">
-                <a:solidFill>
-                  <a:srgbClr val="8C8C8C"/>
-                </a:solidFill>
-                <a:latin typeface="Arial"/>
-              </a:rPr>
-              <a:t/>
+            <a:off x="640080" y="3268980"/>
+            <a:ext cx="10911535" cy="365760"/>
+          </a:xfrm>
+          <a:prstGeom prst="rect">
+            <a:avLst/>
+          </a:prstGeom>
+          <a:noFill/>
+        </p:spPr>
+        <p:txBody>
+          <a:bodyPr wrap="square">
+            <a:spAutoFit/>
+          </a:bodyPr>
+          <a:lstStyle/>
+          <a:p>
+            <a:pPr algn="ctr"/>
+            <a:r>
+              <a:rPr sz="2400" b="0" i="1">
+                <a:solidFill>
+                  <a:srgbClr val="AAAAAA"/>
+                </a:solidFill>
+                <a:latin typeface="Arial"/>
+              </a:rPr>
+              <a:t>watashi wo ou deshou</a:t>
             </a:r>
           </a:p>
         </p:txBody>
@@ -4856,64 +4177,29 @@
         </p:nvSpPr>
         <p:spPr>
           <a:xfrm>
-            <a:off x="594360" y="3529584"/>
-            <a:ext cx="11002975" cy="685800"/>
-          </a:xfrm>
-          <a:prstGeom prst="rect">
-            <a:avLst/>
-          </a:prstGeom>
-          <a:noFill/>
-        </p:spPr>
-        <p:txBody>
-          <a:bodyPr wrap="square">
-            <a:spAutoFit/>
-          </a:bodyPr>
-          <a:lstStyle/>
-          <a:p>
-            <a:pPr algn="ctr"/>
-            <a:r>
-              <a:rPr sz="4400" b="1" i="0">
-                <a:solidFill>
-                  <a:srgbClr val="FFFFFF"/>
-                </a:solidFill>
-                <a:latin typeface="Arial"/>
-              </a:rPr>
-              <a:t/>
-            </a:r>
-          </a:p>
-        </p:txBody>
-      </p:sp>
-      <p:sp>
-        <p:nvSpPr>
-          <p:cNvPr id="5" name="TextBox 4"/>
-          <p:cNvSpPr txBox="1"/>
-          <p:nvPr/>
-        </p:nvSpPr>
-        <p:spPr>
-          <a:xfrm>
-            <a:off x="594360" y="4251960"/>
-            <a:ext cx="11002975" cy="347472"/>
-          </a:xfrm>
-          <a:prstGeom prst="rect">
-            <a:avLst/>
-          </a:prstGeom>
-          <a:noFill/>
-        </p:spPr>
-        <p:txBody>
-          <a:bodyPr wrap="square">
-            <a:spAutoFit/>
-          </a:bodyPr>
-          <a:lstStyle/>
-          <a:p>
-            <a:pPr algn="ctr"/>
-            <a:r>
-              <a:rPr sz="2200" b="0" i="1">
-                <a:solidFill>
-                  <a:srgbClr val="8C8C8C"/>
-                </a:solidFill>
-                <a:latin typeface="Arial"/>
-              </a:rPr>
-              <a:t/>
+            <a:off x="640080" y="4046220"/>
+            <a:ext cx="10911535" cy="310896"/>
+          </a:xfrm>
+          <a:prstGeom prst="rect">
+            <a:avLst/>
+          </a:prstGeom>
+          <a:noFill/>
+        </p:spPr>
+        <p:txBody>
+          <a:bodyPr wrap="square">
+            <a:spAutoFit/>
+          </a:bodyPr>
+          <a:lstStyle/>
+          <a:p>
+            <a:pPr algn="ctr"/>
+            <a:r>
+              <a:rPr sz="2000" b="0" i="1">
+                <a:solidFill>
+                  <a:srgbClr val="828282"/>
+                </a:solidFill>
+                <a:latin typeface="Arial"/>
+              </a:rPr>
+              <a:t>O Senhor é meu pastor e nada me faltará</a:t>
             </a:r>
           </a:p>
         </p:txBody>
@@ -4952,23 +4238,23 @@
         </p:nvSpPr>
         <p:spPr>
           <a:xfrm>
-            <a:off x="594360" y="2258568"/>
-            <a:ext cx="11002975" cy="685800"/>
-          </a:xfrm>
-          <a:prstGeom prst="rect">
-            <a:avLst/>
-          </a:prstGeom>
-          <a:noFill/>
-        </p:spPr>
-        <p:txBody>
-          <a:bodyPr wrap="square">
-            <a:spAutoFit/>
-          </a:bodyPr>
-          <a:lstStyle/>
-          <a:p>
-            <a:pPr algn="ctr"/>
-            <a:r>
-              <a:rPr sz="4400" b="1" i="0">
+            <a:off x="640080" y="2052828"/>
+            <a:ext cx="10911535" cy="731520"/>
+          </a:xfrm>
+          <a:prstGeom prst="rect">
+            <a:avLst/>
+          </a:prstGeom>
+          <a:noFill/>
+        </p:spPr>
+        <p:txBody>
+          <a:bodyPr wrap="square">
+            <a:spAutoFit/>
+          </a:bodyPr>
+          <a:lstStyle/>
+          <a:p>
+            <a:pPr algn="ctr"/>
+            <a:r>
+              <a:rPr sz="4800" b="1" i="0">
                 <a:solidFill>
                   <a:srgbClr val="FFFFFF"/>
                 </a:solidFill>
@@ -4987,99 +4273,29 @@
         </p:nvSpPr>
         <p:spPr>
           <a:xfrm>
-            <a:off x="594360" y="2980944"/>
-            <a:ext cx="11002975" cy="347472"/>
-          </a:xfrm>
-          <a:prstGeom prst="rect">
-            <a:avLst/>
-          </a:prstGeom>
-          <a:noFill/>
-        </p:spPr>
-        <p:txBody>
-          <a:bodyPr wrap="square">
-            <a:spAutoFit/>
-          </a:bodyPr>
-          <a:lstStyle/>
-          <a:p>
-            <a:pPr algn="ctr"/>
-            <a:r>
-              <a:rPr sz="2200" b="0" i="1">
-                <a:solidFill>
-                  <a:srgbClr val="8C8C8C"/>
-                </a:solidFill>
-                <a:latin typeface="Arial"/>
-              </a:rPr>
-              <a:t/>
-            </a:r>
-          </a:p>
-        </p:txBody>
-      </p:sp>
-      <p:sp>
-        <p:nvSpPr>
-          <p:cNvPr id="4" name="TextBox 3"/>
-          <p:cNvSpPr txBox="1"/>
-          <p:nvPr/>
-        </p:nvSpPr>
-        <p:spPr>
-          <a:xfrm>
-            <a:off x="594360" y="3529584"/>
-            <a:ext cx="11002975" cy="685800"/>
-          </a:xfrm>
-          <a:prstGeom prst="rect">
-            <a:avLst/>
-          </a:prstGeom>
-          <a:noFill/>
-        </p:spPr>
-        <p:txBody>
-          <a:bodyPr wrap="square">
-            <a:spAutoFit/>
-          </a:bodyPr>
-          <a:lstStyle/>
-          <a:p>
-            <a:pPr algn="ctr"/>
-            <a:r>
-              <a:rPr sz="4400" b="1" i="0">
+            <a:off x="640080" y="2985516"/>
+            <a:ext cx="10911535" cy="731520"/>
+          </a:xfrm>
+          <a:prstGeom prst="rect">
+            <a:avLst/>
+          </a:prstGeom>
+          <a:noFill/>
+        </p:spPr>
+        <p:txBody>
+          <a:bodyPr wrap="square">
+            <a:spAutoFit/>
+          </a:bodyPr>
+          <a:lstStyle/>
+          <a:p>
+            <a:pPr algn="ctr"/>
+            <a:r>
+              <a:rPr sz="4800" b="1" i="0">
                 <a:solidFill>
                   <a:srgbClr val="FFFFFF"/>
                 </a:solidFill>
                 <a:latin typeface="Arial"/>
               </a:rPr>
               <a:t>Restaurada é minha alma</a:t>
-            </a:r>
-          </a:p>
-        </p:txBody>
-      </p:sp>
-      <p:sp>
-        <p:nvSpPr>
-          <p:cNvPr id="5" name="TextBox 4"/>
-          <p:cNvSpPr txBox="1"/>
-          <p:nvPr/>
-        </p:nvSpPr>
-        <p:spPr>
-          <a:xfrm>
-            <a:off x="594360" y="4251960"/>
-            <a:ext cx="11002975" cy="347472"/>
-          </a:xfrm>
-          <a:prstGeom prst="rect">
-            <a:avLst/>
-          </a:prstGeom>
-          <a:noFill/>
-        </p:spPr>
-        <p:txBody>
-          <a:bodyPr wrap="square">
-            <a:spAutoFit/>
-          </a:bodyPr>
-          <a:lstStyle/>
-          <a:p>
-            <a:pPr algn="ctr"/>
-            <a:r>
-              <a:rPr sz="2200" b="0" i="1">
-                <a:solidFill>
-                  <a:srgbClr val="8C8C8C"/>
-                </a:solidFill>
-                <a:latin typeface="Arial"/>
-              </a:rPr>
-              <a:t/>
             </a:r>
           </a:p>
         </p:txBody>
@@ -5118,29 +4334,29 @@
         </p:nvSpPr>
         <p:spPr>
           <a:xfrm>
-            <a:off x="594360" y="2258568"/>
-            <a:ext cx="11002975" cy="685800"/>
-          </a:xfrm>
-          <a:prstGeom prst="rect">
-            <a:avLst/>
-          </a:prstGeom>
-          <a:noFill/>
-        </p:spPr>
-        <p:txBody>
-          <a:bodyPr wrap="square">
-            <a:spAutoFit/>
-          </a:bodyPr>
-          <a:lstStyle/>
-          <a:p>
-            <a:pPr algn="ctr"/>
-            <a:r>
-              <a:rPr sz="4400" b="1" i="0">
+            <a:off x="640080" y="2052828"/>
+            <a:ext cx="10911535" cy="731520"/>
+          </a:xfrm>
+          <a:prstGeom prst="rect">
+            <a:avLst/>
+          </a:prstGeom>
+          <a:noFill/>
+        </p:spPr>
+        <p:txBody>
+          <a:bodyPr wrap="square">
+            <a:spAutoFit/>
+          </a:bodyPr>
+          <a:lstStyle/>
+          <a:p>
+            <a:pPr algn="ctr"/>
+            <a:r>
+              <a:rPr sz="4800" b="1" i="0">
                 <a:solidFill>
                   <a:srgbClr val="FFFFFF"/>
                 </a:solidFill>
                 <a:latin typeface="Arial"/>
               </a:rPr>
-              <a:t/>
+              <a:t>Faz-me deitar em verdes pastos</a:t>
             </a:r>
           </a:p>
         </p:txBody>
@@ -5153,99 +4369,29 @@
         </p:nvSpPr>
         <p:spPr>
           <a:xfrm>
-            <a:off x="594360" y="2980944"/>
-            <a:ext cx="11002975" cy="347472"/>
-          </a:xfrm>
-          <a:prstGeom prst="rect">
-            <a:avLst/>
-          </a:prstGeom>
-          <a:noFill/>
-        </p:spPr>
-        <p:txBody>
-          <a:bodyPr wrap="square">
-            <a:spAutoFit/>
-          </a:bodyPr>
-          <a:lstStyle/>
-          <a:p>
-            <a:pPr algn="ctr"/>
-            <a:r>
-              <a:rPr sz="2200" b="0" i="1">
-                <a:solidFill>
-                  <a:srgbClr val="8C8C8C"/>
-                </a:solidFill>
-                <a:latin typeface="Arial"/>
-              </a:rPr>
-              <a:t/>
-            </a:r>
-          </a:p>
-        </p:txBody>
-      </p:sp>
-      <p:sp>
-        <p:nvSpPr>
-          <p:cNvPr id="4" name="TextBox 3"/>
-          <p:cNvSpPr txBox="1"/>
-          <p:nvPr/>
-        </p:nvSpPr>
-        <p:spPr>
-          <a:xfrm>
-            <a:off x="594360" y="3529584"/>
-            <a:ext cx="11002975" cy="685800"/>
-          </a:xfrm>
-          <a:prstGeom prst="rect">
-            <a:avLst/>
-          </a:prstGeom>
-          <a:noFill/>
-        </p:spPr>
-        <p:txBody>
-          <a:bodyPr wrap="square">
-            <a:spAutoFit/>
-          </a:bodyPr>
-          <a:lstStyle/>
-          <a:p>
-            <a:pPr algn="ctr"/>
-            <a:r>
-              <a:rPr sz="4400" b="1" i="0">
+            <a:off x="640080" y="2985516"/>
+            <a:ext cx="10911535" cy="731520"/>
+          </a:xfrm>
+          <a:prstGeom prst="rect">
+            <a:avLst/>
+          </a:prstGeom>
+          <a:noFill/>
+        </p:spPr>
+        <p:txBody>
+          <a:bodyPr wrap="square">
+            <a:spAutoFit/>
+          </a:bodyPr>
+          <a:lstStyle/>
+          <a:p>
+            <a:pPr algn="ctr"/>
+            <a:r>
+              <a:rPr sz="4800" b="1" i="0">
                 <a:solidFill>
                   <a:srgbClr val="FFFFFF"/>
                 </a:solidFill>
                 <a:latin typeface="Arial"/>
               </a:rPr>
-              <a:t/>
-            </a:r>
-          </a:p>
-        </p:txBody>
-      </p:sp>
-      <p:sp>
-        <p:nvSpPr>
-          <p:cNvPr id="5" name="TextBox 4"/>
-          <p:cNvSpPr txBox="1"/>
-          <p:nvPr/>
-        </p:nvSpPr>
-        <p:spPr>
-          <a:xfrm>
-            <a:off x="594360" y="4251960"/>
-            <a:ext cx="11002975" cy="347472"/>
-          </a:xfrm>
-          <a:prstGeom prst="rect">
-            <a:avLst/>
-          </a:prstGeom>
-          <a:noFill/>
-        </p:spPr>
-        <p:txBody>
-          <a:bodyPr wrap="square">
-            <a:spAutoFit/>
-          </a:bodyPr>
-          <a:lstStyle/>
-          <a:p>
-            <a:pPr algn="ctr"/>
-            <a:r>
-              <a:rPr sz="2200" b="0" i="1">
-                <a:solidFill>
-                  <a:srgbClr val="8C8C8C"/>
-                </a:solidFill>
-                <a:latin typeface="Arial"/>
-              </a:rPr>
-              <a:t/>
+              <a:t>Por amor do Seu nome</a:t>
             </a:r>
           </a:p>
         </p:txBody>
@@ -5284,29 +4430,29 @@
         </p:nvSpPr>
         <p:spPr>
           <a:xfrm>
-            <a:off x="594360" y="2258568"/>
-            <a:ext cx="11002975" cy="685800"/>
-          </a:xfrm>
-          <a:prstGeom prst="rect">
-            <a:avLst/>
-          </a:prstGeom>
-          <a:noFill/>
-        </p:spPr>
-        <p:txBody>
-          <a:bodyPr wrap="square">
-            <a:spAutoFit/>
-          </a:bodyPr>
-          <a:lstStyle/>
-          <a:p>
-            <a:pPr algn="ctr"/>
-            <a:r>
-              <a:rPr sz="4400" b="1" i="0">
+            <a:off x="640080" y="2052828"/>
+            <a:ext cx="10911535" cy="731520"/>
+          </a:xfrm>
+          <a:prstGeom prst="rect">
+            <a:avLst/>
+          </a:prstGeom>
+          <a:noFill/>
+        </p:spPr>
+        <p:txBody>
+          <a:bodyPr wrap="square">
+            <a:spAutoFit/>
+          </a:bodyPr>
+          <a:lstStyle/>
+          <a:p>
+            <a:pPr algn="ctr"/>
+            <a:r>
+              <a:rPr sz="4100" b="1" i="0">
                 <a:solidFill>
                   <a:srgbClr val="FFFFFF"/>
                 </a:solidFill>
                 <a:latin typeface="Arial"/>
               </a:rPr>
-              <a:t/>
+              <a:t>Ainda que eu ande pelo vale da sombra</a:t>
             </a:r>
           </a:p>
         </p:txBody>
@@ -5319,99 +4465,29 @@
         </p:nvSpPr>
         <p:spPr>
           <a:xfrm>
-            <a:off x="594360" y="2980944"/>
-            <a:ext cx="11002975" cy="347472"/>
-          </a:xfrm>
-          <a:prstGeom prst="rect">
-            <a:avLst/>
-          </a:prstGeom>
-          <a:noFill/>
-        </p:spPr>
-        <p:txBody>
-          <a:bodyPr wrap="square">
-            <a:spAutoFit/>
-          </a:bodyPr>
-          <a:lstStyle/>
-          <a:p>
-            <a:pPr algn="ctr"/>
-            <a:r>
-              <a:rPr sz="2200" b="0" i="1">
-                <a:solidFill>
-                  <a:srgbClr val="8C8C8C"/>
-                </a:solidFill>
-                <a:latin typeface="Arial"/>
-              </a:rPr>
-              <a:t/>
-            </a:r>
-          </a:p>
-        </p:txBody>
-      </p:sp>
-      <p:sp>
-        <p:nvSpPr>
-          <p:cNvPr id="4" name="TextBox 3"/>
-          <p:cNvSpPr txBox="1"/>
-          <p:nvPr/>
-        </p:nvSpPr>
-        <p:spPr>
-          <a:xfrm>
-            <a:off x="594360" y="3529584"/>
-            <a:ext cx="11002975" cy="685800"/>
-          </a:xfrm>
-          <a:prstGeom prst="rect">
-            <a:avLst/>
-          </a:prstGeom>
-          <a:noFill/>
-        </p:spPr>
-        <p:txBody>
-          <a:bodyPr wrap="square">
-            <a:spAutoFit/>
-          </a:bodyPr>
-          <a:lstStyle/>
-          <a:p>
-            <a:pPr algn="ctr"/>
-            <a:r>
-              <a:rPr sz="4400" b="1" i="0">
+            <a:off x="640080" y="2985516"/>
+            <a:ext cx="10911535" cy="731520"/>
+          </a:xfrm>
+          <a:prstGeom prst="rect">
+            <a:avLst/>
+          </a:prstGeom>
+          <a:noFill/>
+        </p:spPr>
+        <p:txBody>
+          <a:bodyPr wrap="square">
+            <a:spAutoFit/>
+          </a:bodyPr>
+          <a:lstStyle/>
+          <a:p>
+            <a:pPr algn="ctr"/>
+            <a:r>
+              <a:rPr sz="4800" b="1" i="0">
                 <a:solidFill>
                   <a:srgbClr val="FFFFFF"/>
                 </a:solidFill>
                 <a:latin typeface="Arial"/>
               </a:rPr>
-              <a:t/>
-            </a:r>
-          </a:p>
-        </p:txBody>
-      </p:sp>
-      <p:sp>
-        <p:nvSpPr>
-          <p:cNvPr id="5" name="TextBox 4"/>
-          <p:cNvSpPr txBox="1"/>
-          <p:nvPr/>
-        </p:nvSpPr>
-        <p:spPr>
-          <a:xfrm>
-            <a:off x="594360" y="4251960"/>
-            <a:ext cx="11002975" cy="347472"/>
-          </a:xfrm>
-          <a:prstGeom prst="rect">
-            <a:avLst/>
-          </a:prstGeom>
-          <a:noFill/>
-        </p:spPr>
-        <p:txBody>
-          <a:bodyPr wrap="square">
-            <a:spAutoFit/>
-          </a:bodyPr>
-          <a:lstStyle/>
-          <a:p>
-            <a:pPr algn="ctr"/>
-            <a:r>
-              <a:rPr sz="2200" b="0" i="1">
-                <a:solidFill>
-                  <a:srgbClr val="8C8C8C"/>
-                </a:solidFill>
-                <a:latin typeface="Arial"/>
-              </a:rPr>
-              <a:t/>
+              <a:t>Não temerei o mal</a:t>
             </a:r>
           </a:p>
         </p:txBody>
@@ -5450,29 +4526,29 @@
         </p:nvSpPr>
         <p:spPr>
           <a:xfrm>
-            <a:off x="594360" y="2258568"/>
-            <a:ext cx="11002975" cy="685800"/>
-          </a:xfrm>
-          <a:prstGeom prst="rect">
-            <a:avLst/>
-          </a:prstGeom>
-          <a:noFill/>
-        </p:spPr>
-        <p:txBody>
-          <a:bodyPr wrap="square">
-            <a:spAutoFit/>
-          </a:bodyPr>
-          <a:lstStyle/>
-          <a:p>
-            <a:pPr algn="ctr"/>
-            <a:r>
-              <a:rPr sz="4400" b="1" i="0">
+            <a:off x="640080" y="2052828"/>
+            <a:ext cx="10911535" cy="731520"/>
+          </a:xfrm>
+          <a:prstGeom prst="rect">
+            <a:avLst/>
+          </a:prstGeom>
+          <a:noFill/>
+        </p:spPr>
+        <p:txBody>
+          <a:bodyPr wrap="square">
+            <a:spAutoFit/>
+          </a:bodyPr>
+          <a:lstStyle/>
+          <a:p>
+            <a:pPr algn="ctr"/>
+            <a:r>
+              <a:rPr sz="4800" b="1" i="0">
                 <a:solidFill>
                   <a:srgbClr val="FFFFFF"/>
                 </a:solidFill>
                 <a:latin typeface="Arial"/>
               </a:rPr>
-              <a:t/>
+              <a:t>Pois Tu estás comigo</a:t>
             </a:r>
           </a:p>
         </p:txBody>
@@ -5485,99 +4561,29 @@
         </p:nvSpPr>
         <p:spPr>
           <a:xfrm>
-            <a:off x="594360" y="2980944"/>
-            <a:ext cx="11002975" cy="347472"/>
-          </a:xfrm>
-          <a:prstGeom prst="rect">
-            <a:avLst/>
-          </a:prstGeom>
-          <a:noFill/>
-        </p:spPr>
-        <p:txBody>
-          <a:bodyPr wrap="square">
-            <a:spAutoFit/>
-          </a:bodyPr>
-          <a:lstStyle/>
-          <a:p>
-            <a:pPr algn="ctr"/>
-            <a:r>
-              <a:rPr sz="2200" b="0" i="1">
-                <a:solidFill>
-                  <a:srgbClr val="8C8C8C"/>
-                </a:solidFill>
-                <a:latin typeface="Arial"/>
-              </a:rPr>
-              <a:t/>
-            </a:r>
-          </a:p>
-        </p:txBody>
-      </p:sp>
-      <p:sp>
-        <p:nvSpPr>
-          <p:cNvPr id="4" name="TextBox 3"/>
-          <p:cNvSpPr txBox="1"/>
-          <p:nvPr/>
-        </p:nvSpPr>
-        <p:spPr>
-          <a:xfrm>
-            <a:off x="594360" y="3529584"/>
-            <a:ext cx="11002975" cy="685800"/>
-          </a:xfrm>
-          <a:prstGeom prst="rect">
-            <a:avLst/>
-          </a:prstGeom>
-          <a:noFill/>
-        </p:spPr>
-        <p:txBody>
-          <a:bodyPr wrap="square">
-            <a:spAutoFit/>
-          </a:bodyPr>
-          <a:lstStyle/>
-          <a:p>
-            <a:pPr algn="ctr"/>
-            <a:r>
-              <a:rPr sz="4400" b="1" i="0">
+            <a:off x="640080" y="2985516"/>
+            <a:ext cx="10911535" cy="731520"/>
+          </a:xfrm>
+          <a:prstGeom prst="rect">
+            <a:avLst/>
+          </a:prstGeom>
+          <a:noFill/>
+        </p:spPr>
+        <p:txBody>
+          <a:bodyPr wrap="square">
+            <a:spAutoFit/>
+          </a:bodyPr>
+          <a:lstStyle/>
+          <a:p>
+            <a:pPr algn="ctr"/>
+            <a:r>
+              <a:rPr sz="4300" b="1" i="0">
                 <a:solidFill>
                   <a:srgbClr val="FFFFFF"/>
                 </a:solidFill>
                 <a:latin typeface="Arial"/>
               </a:rPr>
-              <a:t/>
-            </a:r>
-          </a:p>
-        </p:txBody>
-      </p:sp>
-      <p:sp>
-        <p:nvSpPr>
-          <p:cNvPr id="5" name="TextBox 4"/>
-          <p:cNvSpPr txBox="1"/>
-          <p:nvPr/>
-        </p:nvSpPr>
-        <p:spPr>
-          <a:xfrm>
-            <a:off x="594360" y="4251960"/>
-            <a:ext cx="11002975" cy="347472"/>
-          </a:xfrm>
-          <a:prstGeom prst="rect">
-            <a:avLst/>
-          </a:prstGeom>
-          <a:noFill/>
-        </p:spPr>
-        <p:txBody>
-          <a:bodyPr wrap="square">
-            <a:spAutoFit/>
-          </a:bodyPr>
-          <a:lstStyle/>
-          <a:p>
-            <a:pPr algn="ctr"/>
-            <a:r>
-              <a:rPr sz="2200" b="0" i="1">
-                <a:solidFill>
-                  <a:srgbClr val="8C8C8C"/>
-                </a:solidFill>
-                <a:latin typeface="Arial"/>
-              </a:rPr>
-              <a:t/>
+              <a:t>Teu cajado e teu bordão me consolam</a:t>
             </a:r>
           </a:p>
         </p:txBody>
@@ -5616,33 +4622,129 @@
         </p:nvSpPr>
         <p:spPr>
           <a:xfrm>
-            <a:off x="594360" y="2894076"/>
-            <a:ext cx="11002975" cy="685800"/>
-          </a:xfrm>
-          <a:prstGeom prst="rect">
-            <a:avLst/>
-          </a:prstGeom>
-          <a:noFill/>
-        </p:spPr>
-        <p:txBody>
-          <a:bodyPr wrap="square">
-            <a:spAutoFit/>
-          </a:bodyPr>
-          <a:lstStyle/>
-          <a:p>
-            <a:pPr algn="ctr"/>
-            <a:r>
-              <a:rPr sz="4400" b="1" i="0">
+            <a:off x="640080" y="2052828"/>
+            <a:ext cx="10911535" cy="731520"/>
+          </a:xfrm>
+          <a:prstGeom prst="rect">
+            <a:avLst/>
+          </a:prstGeom>
+          <a:noFill/>
+        </p:spPr>
+        <p:txBody>
+          <a:bodyPr wrap="square">
+            <a:spAutoFit/>
+          </a:bodyPr>
+          <a:lstStyle/>
+          <a:p>
+            <a:pPr algn="ctr"/>
+            <a:r>
+              <a:rPr sz="3900" b="1" i="0">
                 <a:solidFill>
                   <a:srgbClr val="FFFFFF"/>
                 </a:solidFill>
                 <a:latin typeface="Arial"/>
               </a:rPr>
+              <a:t>O Senhor é meu pastor e nada me faltará</a:t>
+            </a:r>
+          </a:p>
+        </p:txBody>
+      </p:sp>
+      <p:sp>
+        <p:nvSpPr>
+          <p:cNvPr id="3" name="TextBox 2"/>
+          <p:cNvSpPr txBox="1"/>
+          <p:nvPr/>
+        </p:nvSpPr>
+        <p:spPr>
+          <a:xfrm>
+            <a:off x="640080" y="2985516"/>
+            <a:ext cx="10911535" cy="731520"/>
+          </a:xfrm>
+          <a:prstGeom prst="rect">
+            <a:avLst/>
+          </a:prstGeom>
+          <a:noFill/>
+        </p:spPr>
+        <p:txBody>
+          <a:bodyPr wrap="square">
+            <a:spAutoFit/>
+          </a:bodyPr>
+          <a:lstStyle/>
+          <a:p>
+            <a:pPr algn="ctr"/>
+            <a:r>
+              <a:rPr sz="4800" b="1" i="0">
+                <a:solidFill>
+                  <a:srgbClr val="FFFFFF"/>
+                </a:solidFill>
+                <a:latin typeface="Arial"/>
+              </a:rPr>
               <a:t/>
             </a:r>
           </a:p>
         </p:txBody>
       </p:sp>
+    </p:spTree>
+  </p:cSld>
+  <p:clrMapOvr>
+    <a:masterClrMapping/>
+  </p:clrMapOvr>
+</p:sld>
+</file>
+
+<file path=ppt/slides/slide24.xml><?xml version="1.0" encoding="utf-8"?>
+<p:sld xmlns:a="http://schemas.openxmlformats.org/drawingml/2006/main" xmlns:p="http://schemas.openxmlformats.org/presentationml/2006/main" xmlns:r="http://schemas.openxmlformats.org/officeDocument/2006/relationships">
+  <p:cSld>
+    <p:bg>
+      <p:bgPr>
+        <a:solidFill>
+          <a:srgbClr val="000000"/>
+        </a:solidFill>
+        <a:effectLst/>
+      </p:bgPr>
+    </p:bg>
+    <p:spTree>
+      <p:nvGrpSpPr>
+        <p:cNvPr id="1" name=""/>
+        <p:cNvGrpSpPr/>
+        <p:nvPr/>
+      </p:nvGrpSpPr>
+      <p:grpSpPr/>
+      <p:sp>
+        <p:nvSpPr>
+          <p:cNvPr id="2" name="TextBox 1"/>
+          <p:cNvSpPr txBox="1"/>
+          <p:nvPr/>
+        </p:nvSpPr>
+        <p:spPr>
+          <a:xfrm>
+            <a:off x="640080" y="2052828"/>
+            <a:ext cx="10911535" cy="731520"/>
+          </a:xfrm>
+          <a:prstGeom prst="rect">
+            <a:avLst/>
+          </a:prstGeom>
+          <a:noFill/>
+        </p:spPr>
+        <p:txBody>
+          <a:bodyPr wrap="square">
+            <a:spAutoFit/>
+          </a:bodyPr>
+          <a:lstStyle/>
+          <a:p>
+            <a:pPr algn="ctr"/>
+            <a:r>
+              <a:rPr sz="4800" b="1" i="0">
+                <a:solidFill>
+                  <a:srgbClr val="FFFFFF"/>
+                </a:solidFill>
+                <a:latin typeface="Arial"/>
+              </a:rPr>
+              <a:t/>
+            </a:r>
+          </a:p>
+        </p:txBody>
+      </p:sp>
       <p:sp>
         <p:nvSpPr>
           <p:cNvPr id="3" name="TextBox 2"/>
@@ -5651,25 +4753,505 @@
         </p:nvSpPr>
         <p:spPr>
           <a:xfrm>
-            <a:off x="594360" y="3616452"/>
-            <a:ext cx="11002975" cy="347472"/>
-          </a:xfrm>
-          <a:prstGeom prst="rect">
-            <a:avLst/>
-          </a:prstGeom>
-          <a:noFill/>
-        </p:spPr>
-        <p:txBody>
-          <a:bodyPr wrap="square">
-            <a:spAutoFit/>
-          </a:bodyPr>
-          <a:lstStyle/>
-          <a:p>
-            <a:pPr algn="ctr"/>
-            <a:r>
-              <a:rPr sz="2200" b="0" i="1">
-                <a:solidFill>
-                  <a:srgbClr val="8C8C8C"/>
+            <a:off x="640080" y="2985516"/>
+            <a:ext cx="10911535" cy="731520"/>
+          </a:xfrm>
+          <a:prstGeom prst="rect">
+            <a:avLst/>
+          </a:prstGeom>
+          <a:noFill/>
+        </p:spPr>
+        <p:txBody>
+          <a:bodyPr wrap="square">
+            <a:spAutoFit/>
+          </a:bodyPr>
+          <a:lstStyle/>
+          <a:p>
+            <a:pPr algn="ctr"/>
+            <a:r>
+              <a:rPr sz="4800" b="1" i="0">
+                <a:solidFill>
+                  <a:srgbClr val="FFFFFF"/>
+                </a:solidFill>
+                <a:latin typeface="Arial"/>
+              </a:rPr>
+              <a:t/>
+            </a:r>
+          </a:p>
+        </p:txBody>
+      </p:sp>
+    </p:spTree>
+  </p:cSld>
+  <p:clrMapOvr>
+    <a:masterClrMapping/>
+  </p:clrMapOvr>
+</p:sld>
+</file>
+
+<file path=ppt/slides/slide25.xml><?xml version="1.0" encoding="utf-8"?>
+<p:sld xmlns:a="http://schemas.openxmlformats.org/drawingml/2006/main" xmlns:p="http://schemas.openxmlformats.org/presentationml/2006/main" xmlns:r="http://schemas.openxmlformats.org/officeDocument/2006/relationships">
+  <p:cSld>
+    <p:bg>
+      <p:bgPr>
+        <a:solidFill>
+          <a:srgbClr val="000000"/>
+        </a:solidFill>
+        <a:effectLst/>
+      </p:bgPr>
+    </p:bg>
+    <p:spTree>
+      <p:nvGrpSpPr>
+        <p:cNvPr id="1" name=""/>
+        <p:cNvGrpSpPr/>
+        <p:nvPr/>
+      </p:nvGrpSpPr>
+      <p:grpSpPr/>
+      <p:sp>
+        <p:nvSpPr>
+          <p:cNvPr id="2" name="TextBox 1"/>
+          <p:cNvSpPr txBox="1"/>
+          <p:nvPr/>
+        </p:nvSpPr>
+        <p:spPr>
+          <a:xfrm>
+            <a:off x="640080" y="2052828"/>
+            <a:ext cx="10911535" cy="731520"/>
+          </a:xfrm>
+          <a:prstGeom prst="rect">
+            <a:avLst/>
+          </a:prstGeom>
+          <a:noFill/>
+        </p:spPr>
+        <p:txBody>
+          <a:bodyPr wrap="square">
+            <a:spAutoFit/>
+          </a:bodyPr>
+          <a:lstStyle/>
+          <a:p>
+            <a:pPr algn="ctr"/>
+            <a:r>
+              <a:rPr sz="4800" b="1" i="0">
+                <a:solidFill>
+                  <a:srgbClr val="FFFFFF"/>
+                </a:solidFill>
+                <a:latin typeface="Arial"/>
+              </a:rPr>
+              <a:t/>
+            </a:r>
+          </a:p>
+        </p:txBody>
+      </p:sp>
+      <p:sp>
+        <p:nvSpPr>
+          <p:cNvPr id="3" name="TextBox 2"/>
+          <p:cNvSpPr txBox="1"/>
+          <p:nvPr/>
+        </p:nvSpPr>
+        <p:spPr>
+          <a:xfrm>
+            <a:off x="640080" y="2985516"/>
+            <a:ext cx="10911535" cy="731520"/>
+          </a:xfrm>
+          <a:prstGeom prst="rect">
+            <a:avLst/>
+          </a:prstGeom>
+          <a:noFill/>
+        </p:spPr>
+        <p:txBody>
+          <a:bodyPr wrap="square">
+            <a:spAutoFit/>
+          </a:bodyPr>
+          <a:lstStyle/>
+          <a:p>
+            <a:pPr algn="ctr"/>
+            <a:r>
+              <a:rPr sz="4800" b="1" i="0">
+                <a:solidFill>
+                  <a:srgbClr val="FFFFFF"/>
+                </a:solidFill>
+                <a:latin typeface="Arial"/>
+              </a:rPr>
+              <a:t/>
+            </a:r>
+          </a:p>
+        </p:txBody>
+      </p:sp>
+    </p:spTree>
+  </p:cSld>
+  <p:clrMapOvr>
+    <a:masterClrMapping/>
+  </p:clrMapOvr>
+</p:sld>
+</file>
+
+<file path=ppt/slides/slide26.xml><?xml version="1.0" encoding="utf-8"?>
+<p:sld xmlns:a="http://schemas.openxmlformats.org/drawingml/2006/main" xmlns:p="http://schemas.openxmlformats.org/presentationml/2006/main" xmlns:r="http://schemas.openxmlformats.org/officeDocument/2006/relationships">
+  <p:cSld>
+    <p:bg>
+      <p:bgPr>
+        <a:solidFill>
+          <a:srgbClr val="000000"/>
+        </a:solidFill>
+        <a:effectLst/>
+      </p:bgPr>
+    </p:bg>
+    <p:spTree>
+      <p:nvGrpSpPr>
+        <p:cNvPr id="1" name=""/>
+        <p:cNvGrpSpPr/>
+        <p:nvPr/>
+      </p:nvGrpSpPr>
+      <p:grpSpPr/>
+      <p:sp>
+        <p:nvSpPr>
+          <p:cNvPr id="2" name="TextBox 1"/>
+          <p:cNvSpPr txBox="1"/>
+          <p:nvPr/>
+        </p:nvSpPr>
+        <p:spPr>
+          <a:xfrm>
+            <a:off x="640080" y="2500884"/>
+            <a:ext cx="10911535" cy="731520"/>
+          </a:xfrm>
+          <a:prstGeom prst="rect">
+            <a:avLst/>
+          </a:prstGeom>
+          <a:noFill/>
+        </p:spPr>
+        <p:txBody>
+          <a:bodyPr wrap="square">
+            <a:spAutoFit/>
+          </a:bodyPr>
+          <a:lstStyle/>
+          <a:p>
+            <a:pPr algn="ctr"/>
+            <a:r>
+              <a:rPr sz="4800" b="1" i="0">
+                <a:solidFill>
+                  <a:srgbClr val="FFFFFF"/>
+                </a:solidFill>
+                <a:latin typeface="Arial"/>
+              </a:rPr>
+              <a:t>死の影の谷を</a:t>
+            </a:r>
+          </a:p>
+        </p:txBody>
+      </p:sp>
+      <p:sp>
+        <p:nvSpPr>
+          <p:cNvPr id="3" name="TextBox 2"/>
+          <p:cNvSpPr txBox="1"/>
+          <p:nvPr/>
+        </p:nvSpPr>
+        <p:spPr>
+          <a:xfrm>
+            <a:off x="640080" y="3268980"/>
+            <a:ext cx="10911535" cy="365760"/>
+          </a:xfrm>
+          <a:prstGeom prst="rect">
+            <a:avLst/>
+          </a:prstGeom>
+          <a:noFill/>
+        </p:spPr>
+        <p:txBody>
+          <a:bodyPr wrap="square">
+            <a:spAutoFit/>
+          </a:bodyPr>
+          <a:lstStyle/>
+          <a:p>
+            <a:pPr algn="ctr"/>
+            <a:r>
+              <a:rPr sz="2400" b="0" i="1">
+                <a:solidFill>
+                  <a:srgbClr val="AAAAAA"/>
+                </a:solidFill>
+                <a:latin typeface="Arial"/>
+              </a:rPr>
+              <a:t>shino kage no tani wo</a:t>
+            </a:r>
+          </a:p>
+        </p:txBody>
+      </p:sp>
+      <p:sp>
+        <p:nvSpPr>
+          <p:cNvPr id="4" name="TextBox 3"/>
+          <p:cNvSpPr txBox="1"/>
+          <p:nvPr/>
+        </p:nvSpPr>
+        <p:spPr>
+          <a:xfrm>
+            <a:off x="640080" y="4046220"/>
+            <a:ext cx="10911535" cy="310896"/>
+          </a:xfrm>
+          <a:prstGeom prst="rect">
+            <a:avLst/>
+          </a:prstGeom>
+          <a:noFill/>
+        </p:spPr>
+        <p:txBody>
+          <a:bodyPr wrap="square">
+            <a:spAutoFit/>
+          </a:bodyPr>
+          <a:lstStyle/>
+          <a:p>
+            <a:pPr algn="ctr"/>
+            <a:r>
+              <a:rPr sz="2000" b="0" i="1">
+                <a:solidFill>
+                  <a:srgbClr val="828282"/>
+                </a:solidFill>
+                <a:latin typeface="Arial"/>
+              </a:rPr>
+              <a:t>O Senhor é meu pastor e nada me faltará</a:t>
+            </a:r>
+          </a:p>
+        </p:txBody>
+      </p:sp>
+    </p:spTree>
+  </p:cSld>
+  <p:clrMapOvr>
+    <a:masterClrMapping/>
+  </p:clrMapOvr>
+</p:sld>
+</file>
+
+<file path=ppt/slides/slide27.xml><?xml version="1.0" encoding="utf-8"?>
+<p:sld xmlns:a="http://schemas.openxmlformats.org/drawingml/2006/main" xmlns:p="http://schemas.openxmlformats.org/presentationml/2006/main" xmlns:r="http://schemas.openxmlformats.org/officeDocument/2006/relationships">
+  <p:cSld>
+    <p:bg>
+      <p:bgPr>
+        <a:solidFill>
+          <a:srgbClr val="000000"/>
+        </a:solidFill>
+        <a:effectLst/>
+      </p:bgPr>
+    </p:bg>
+    <p:spTree>
+      <p:nvGrpSpPr>
+        <p:cNvPr id="1" name=""/>
+        <p:cNvGrpSpPr/>
+        <p:nvPr/>
+      </p:nvGrpSpPr>
+      <p:grpSpPr/>
+      <p:sp>
+        <p:nvSpPr>
+          <p:cNvPr id="2" name="TextBox 1"/>
+          <p:cNvSpPr txBox="1"/>
+          <p:nvPr/>
+        </p:nvSpPr>
+        <p:spPr>
+          <a:xfrm>
+            <a:off x="640080" y="2702052"/>
+            <a:ext cx="10911535" cy="731520"/>
+          </a:xfrm>
+          <a:prstGeom prst="rect">
+            <a:avLst/>
+          </a:prstGeom>
+          <a:noFill/>
+        </p:spPr>
+        <p:txBody>
+          <a:bodyPr wrap="square">
+            <a:spAutoFit/>
+          </a:bodyPr>
+          <a:lstStyle/>
+          <a:p>
+            <a:pPr algn="ctr"/>
+            <a:r>
+              <a:rPr sz="4800" b="1" i="0">
+                <a:solidFill>
+                  <a:srgbClr val="FFFFFF"/>
+                </a:solidFill>
+                <a:latin typeface="Arial"/>
+              </a:rPr>
+              <a:t/>
+            </a:r>
+          </a:p>
+        </p:txBody>
+      </p:sp>
+    </p:spTree>
+  </p:cSld>
+  <p:clrMapOvr>
+    <a:masterClrMapping/>
+  </p:clrMapOvr>
+</p:sld>
+</file>
+
+<file path=ppt/slides/slide28.xml><?xml version="1.0" encoding="utf-8"?>
+<p:sld xmlns:a="http://schemas.openxmlformats.org/drawingml/2006/main" xmlns:p="http://schemas.openxmlformats.org/presentationml/2006/main" xmlns:r="http://schemas.openxmlformats.org/officeDocument/2006/relationships">
+  <p:cSld>
+    <p:bg>
+      <p:bgPr>
+        <a:solidFill>
+          <a:srgbClr val="000000"/>
+        </a:solidFill>
+        <a:effectLst/>
+      </p:bgPr>
+    </p:bg>
+    <p:spTree>
+      <p:nvGrpSpPr>
+        <p:cNvPr id="1" name=""/>
+        <p:cNvGrpSpPr/>
+        <p:nvPr/>
+      </p:nvGrpSpPr>
+      <p:grpSpPr/>
+      <p:sp>
+        <p:nvSpPr>
+          <p:cNvPr id="2" name="TextBox 1"/>
+          <p:cNvSpPr txBox="1"/>
+          <p:nvPr/>
+        </p:nvSpPr>
+        <p:spPr>
+          <a:xfrm>
+            <a:off x="640080" y="2500884"/>
+            <a:ext cx="10911535" cy="731520"/>
+          </a:xfrm>
+          <a:prstGeom prst="rect">
+            <a:avLst/>
+          </a:prstGeom>
+          <a:noFill/>
+        </p:spPr>
+        <p:txBody>
+          <a:bodyPr wrap="square">
+            <a:spAutoFit/>
+          </a:bodyPr>
+          <a:lstStyle/>
+          <a:p>
+            <a:pPr algn="ctr"/>
+            <a:r>
+              <a:rPr sz="4800" b="1" i="0">
+                <a:solidFill>
+                  <a:srgbClr val="FFFFFF"/>
+                </a:solidFill>
+                <a:latin typeface="Arial"/>
+              </a:rPr>
+              <a:t>歩むときにも</a:t>
+            </a:r>
+          </a:p>
+        </p:txBody>
+      </p:sp>
+      <p:sp>
+        <p:nvSpPr>
+          <p:cNvPr id="3" name="TextBox 2"/>
+          <p:cNvSpPr txBox="1"/>
+          <p:nvPr/>
+        </p:nvSpPr>
+        <p:spPr>
+          <a:xfrm>
+            <a:off x="640080" y="3268980"/>
+            <a:ext cx="10911535" cy="365760"/>
+          </a:xfrm>
+          <a:prstGeom prst="rect">
+            <a:avLst/>
+          </a:prstGeom>
+          <a:noFill/>
+        </p:spPr>
+        <p:txBody>
+          <a:bodyPr wrap="square">
+            <a:spAutoFit/>
+          </a:bodyPr>
+          <a:lstStyle/>
+          <a:p>
+            <a:pPr algn="ctr"/>
+            <a:r>
+              <a:rPr sz="2400" b="0" i="1">
+                <a:solidFill>
+                  <a:srgbClr val="AAAAAA"/>
+                </a:solidFill>
+                <a:latin typeface="Arial"/>
+              </a:rPr>
+              <a:t>ayumu tokinimo</a:t>
+            </a:r>
+          </a:p>
+        </p:txBody>
+      </p:sp>
+      <p:sp>
+        <p:nvSpPr>
+          <p:cNvPr id="4" name="TextBox 3"/>
+          <p:cNvSpPr txBox="1"/>
+          <p:nvPr/>
+        </p:nvSpPr>
+        <p:spPr>
+          <a:xfrm>
+            <a:off x="640080" y="4046220"/>
+            <a:ext cx="10911535" cy="310896"/>
+          </a:xfrm>
+          <a:prstGeom prst="rect">
+            <a:avLst/>
+          </a:prstGeom>
+          <a:noFill/>
+        </p:spPr>
+        <p:txBody>
+          <a:bodyPr wrap="square">
+            <a:spAutoFit/>
+          </a:bodyPr>
+          <a:lstStyle/>
+          <a:p>
+            <a:pPr algn="ctr"/>
+            <a:r>
+              <a:rPr sz="2000" b="0" i="1">
+                <a:solidFill>
+                  <a:srgbClr val="828282"/>
+                </a:solidFill>
+                <a:latin typeface="Arial"/>
+              </a:rPr>
+              <a:t>O Senhor é meu pastor e nada me faltará</a:t>
+            </a:r>
+          </a:p>
+        </p:txBody>
+      </p:sp>
+    </p:spTree>
+  </p:cSld>
+  <p:clrMapOvr>
+    <a:masterClrMapping/>
+  </p:clrMapOvr>
+</p:sld>
+</file>
+
+<file path=ppt/slides/slide29.xml><?xml version="1.0" encoding="utf-8"?>
+<p:sld xmlns:a="http://schemas.openxmlformats.org/drawingml/2006/main" xmlns:p="http://schemas.openxmlformats.org/presentationml/2006/main" xmlns:r="http://schemas.openxmlformats.org/officeDocument/2006/relationships">
+  <p:cSld>
+    <p:bg>
+      <p:bgPr>
+        <a:solidFill>
+          <a:srgbClr val="000000"/>
+        </a:solidFill>
+        <a:effectLst/>
+      </p:bgPr>
+    </p:bg>
+    <p:spTree>
+      <p:nvGrpSpPr>
+        <p:cNvPr id="1" name=""/>
+        <p:cNvGrpSpPr/>
+        <p:nvPr/>
+      </p:nvGrpSpPr>
+      <p:grpSpPr/>
+      <p:sp>
+        <p:nvSpPr>
+          <p:cNvPr id="2" name="TextBox 1"/>
+          <p:cNvSpPr txBox="1"/>
+          <p:nvPr/>
+        </p:nvSpPr>
+        <p:spPr>
+          <a:xfrm>
+            <a:off x="640080" y="2702052"/>
+            <a:ext cx="10911535" cy="731520"/>
+          </a:xfrm>
+          <a:prstGeom prst="rect">
+            <a:avLst/>
+          </a:prstGeom>
+          <a:noFill/>
+        </p:spPr>
+        <p:txBody>
+          <a:bodyPr wrap="square">
+            <a:spAutoFit/>
+          </a:bodyPr>
+          <a:lstStyle/>
+          <a:p>
+            <a:pPr algn="ctr"/>
+            <a:r>
+              <a:rPr sz="4800" b="1" i="0">
+                <a:solidFill>
+                  <a:srgbClr val="FFFFFF"/>
                 </a:solidFill>
                 <a:latin typeface="Arial"/>
               </a:rPr>
@@ -5712,23 +5294,23 @@
         </p:nvSpPr>
         <p:spPr>
           <a:xfrm>
-            <a:off x="594360" y="2258568"/>
-            <a:ext cx="11002975" cy="685800"/>
-          </a:xfrm>
-          <a:prstGeom prst="rect">
-            <a:avLst/>
-          </a:prstGeom>
-          <a:noFill/>
-        </p:spPr>
-        <p:txBody>
-          <a:bodyPr wrap="square">
-            <a:spAutoFit/>
-          </a:bodyPr>
-          <a:lstStyle/>
-          <a:p>
-            <a:pPr algn="ctr"/>
-            <a:r>
-              <a:rPr sz="4400" b="1" i="0">
+            <a:off x="640080" y="2052828"/>
+            <a:ext cx="10911535" cy="731520"/>
+          </a:xfrm>
+          <a:prstGeom prst="rect">
+            <a:avLst/>
+          </a:prstGeom>
+          <a:noFill/>
+        </p:spPr>
+        <p:txBody>
+          <a:bodyPr wrap="square">
+            <a:spAutoFit/>
+          </a:bodyPr>
+          <a:lstStyle/>
+          <a:p>
+            <a:pPr algn="ctr"/>
+            <a:r>
+              <a:rPr sz="4800" b="1" i="0">
                 <a:solidFill>
                   <a:srgbClr val="FFFFFF"/>
                 </a:solidFill>
@@ -5747,25 +5329,217 @@
         </p:nvSpPr>
         <p:spPr>
           <a:xfrm>
-            <a:off x="594360" y="2980944"/>
-            <a:ext cx="11002975" cy="347472"/>
-          </a:xfrm>
-          <a:prstGeom prst="rect">
-            <a:avLst/>
-          </a:prstGeom>
-          <a:noFill/>
-        </p:spPr>
-        <p:txBody>
-          <a:bodyPr wrap="square">
-            <a:spAutoFit/>
-          </a:bodyPr>
-          <a:lstStyle/>
-          <a:p>
-            <a:pPr algn="ctr"/>
-            <a:r>
-              <a:rPr sz="2200" b="0" i="1">
-                <a:solidFill>
-                  <a:srgbClr val="8C8C8C"/>
+            <a:off x="640080" y="2985516"/>
+            <a:ext cx="10911535" cy="731520"/>
+          </a:xfrm>
+          <a:prstGeom prst="rect">
+            <a:avLst/>
+          </a:prstGeom>
+          <a:noFill/>
+        </p:spPr>
+        <p:txBody>
+          <a:bodyPr wrap="square">
+            <a:spAutoFit/>
+          </a:bodyPr>
+          <a:lstStyle/>
+          <a:p>
+            <a:pPr algn="ctr"/>
+            <a:r>
+              <a:rPr sz="4100" b="1" i="0">
+                <a:solidFill>
+                  <a:srgbClr val="FFFFFF"/>
+                </a:solidFill>
+                <a:latin typeface="Arial"/>
+              </a:rPr>
+              <a:t>Ainda que eu ande pelo vale da sombra</a:t>
+            </a:r>
+          </a:p>
+        </p:txBody>
+      </p:sp>
+    </p:spTree>
+  </p:cSld>
+  <p:clrMapOvr>
+    <a:masterClrMapping/>
+  </p:clrMapOvr>
+</p:sld>
+</file>
+
+<file path=ppt/slides/slide30.xml><?xml version="1.0" encoding="utf-8"?>
+<p:sld xmlns:a="http://schemas.openxmlformats.org/drawingml/2006/main" xmlns:p="http://schemas.openxmlformats.org/presentationml/2006/main" xmlns:r="http://schemas.openxmlformats.org/officeDocument/2006/relationships">
+  <p:cSld>
+    <p:bg>
+      <p:bgPr>
+        <a:solidFill>
+          <a:srgbClr val="000000"/>
+        </a:solidFill>
+        <a:effectLst/>
+      </p:bgPr>
+    </p:bg>
+    <p:spTree>
+      <p:nvGrpSpPr>
+        <p:cNvPr id="1" name=""/>
+        <p:cNvGrpSpPr/>
+        <p:nvPr/>
+      </p:nvGrpSpPr>
+      <p:grpSpPr/>
+      <p:sp>
+        <p:nvSpPr>
+          <p:cNvPr id="2" name="TextBox 1"/>
+          <p:cNvSpPr txBox="1"/>
+          <p:nvPr/>
+        </p:nvSpPr>
+        <p:spPr>
+          <a:xfrm>
+            <a:off x="640080" y="2500884"/>
+            <a:ext cx="10911535" cy="731520"/>
+          </a:xfrm>
+          <a:prstGeom prst="rect">
+            <a:avLst/>
+          </a:prstGeom>
+          <a:noFill/>
+        </p:spPr>
+        <p:txBody>
+          <a:bodyPr wrap="square">
+            <a:spAutoFit/>
+          </a:bodyPr>
+          <a:lstStyle/>
+          <a:p>
+            <a:pPr algn="ctr"/>
+            <a:r>
+              <a:rPr sz="4800" b="1" i="0">
+                <a:solidFill>
+                  <a:srgbClr val="FFFFFF"/>
+                </a:solidFill>
+                <a:latin typeface="Arial"/>
+              </a:rPr>
+              <a:t>私はなにも恐れない</a:t>
+            </a:r>
+          </a:p>
+        </p:txBody>
+      </p:sp>
+      <p:sp>
+        <p:nvSpPr>
+          <p:cNvPr id="3" name="TextBox 2"/>
+          <p:cNvSpPr txBox="1"/>
+          <p:nvPr/>
+        </p:nvSpPr>
+        <p:spPr>
+          <a:xfrm>
+            <a:off x="640080" y="3268980"/>
+            <a:ext cx="10911535" cy="365760"/>
+          </a:xfrm>
+          <a:prstGeom prst="rect">
+            <a:avLst/>
+          </a:prstGeom>
+          <a:noFill/>
+        </p:spPr>
+        <p:txBody>
+          <a:bodyPr wrap="square">
+            <a:spAutoFit/>
+          </a:bodyPr>
+          <a:lstStyle/>
+          <a:p>
+            <a:pPr algn="ctr"/>
+            <a:r>
+              <a:rPr sz="2400" b="0" i="1">
+                <a:solidFill>
+                  <a:srgbClr val="AAAAAA"/>
+                </a:solidFill>
+                <a:latin typeface="Arial"/>
+              </a:rPr>
+              <a:t>watashi hananimo osore nai</a:t>
+            </a:r>
+          </a:p>
+        </p:txBody>
+      </p:sp>
+      <p:sp>
+        <p:nvSpPr>
+          <p:cNvPr id="4" name="TextBox 3"/>
+          <p:cNvSpPr txBox="1"/>
+          <p:nvPr/>
+        </p:nvSpPr>
+        <p:spPr>
+          <a:xfrm>
+            <a:off x="640080" y="4046220"/>
+            <a:ext cx="10911535" cy="310896"/>
+          </a:xfrm>
+          <a:prstGeom prst="rect">
+            <a:avLst/>
+          </a:prstGeom>
+          <a:noFill/>
+        </p:spPr>
+        <p:txBody>
+          <a:bodyPr wrap="square">
+            <a:spAutoFit/>
+          </a:bodyPr>
+          <a:lstStyle/>
+          <a:p>
+            <a:pPr algn="ctr"/>
+            <a:r>
+              <a:rPr sz="2000" b="0" i="1">
+                <a:solidFill>
+                  <a:srgbClr val="828282"/>
+                </a:solidFill>
+                <a:latin typeface="Arial"/>
+              </a:rPr>
+              <a:t>O Senhor é meu pastor e nada me faltará</a:t>
+            </a:r>
+          </a:p>
+        </p:txBody>
+      </p:sp>
+    </p:spTree>
+  </p:cSld>
+  <p:clrMapOvr>
+    <a:masterClrMapping/>
+  </p:clrMapOvr>
+</p:sld>
+</file>
+
+<file path=ppt/slides/slide31.xml><?xml version="1.0" encoding="utf-8"?>
+<p:sld xmlns:a="http://schemas.openxmlformats.org/drawingml/2006/main" xmlns:p="http://schemas.openxmlformats.org/presentationml/2006/main" xmlns:r="http://schemas.openxmlformats.org/officeDocument/2006/relationships">
+  <p:cSld>
+    <p:bg>
+      <p:bgPr>
+        <a:solidFill>
+          <a:srgbClr val="000000"/>
+        </a:solidFill>
+        <a:effectLst/>
+      </p:bgPr>
+    </p:bg>
+    <p:spTree>
+      <p:nvGrpSpPr>
+        <p:cNvPr id="1" name=""/>
+        <p:cNvGrpSpPr/>
+        <p:nvPr/>
+      </p:nvGrpSpPr>
+      <p:grpSpPr/>
+      <p:sp>
+        <p:nvSpPr>
+          <p:cNvPr id="2" name="TextBox 1"/>
+          <p:cNvSpPr txBox="1"/>
+          <p:nvPr/>
+        </p:nvSpPr>
+        <p:spPr>
+          <a:xfrm>
+            <a:off x="640080" y="2702052"/>
+            <a:ext cx="10911535" cy="731520"/>
+          </a:xfrm>
+          <a:prstGeom prst="rect">
+            <a:avLst/>
+          </a:prstGeom>
+          <a:noFill/>
+        </p:spPr>
+        <p:txBody>
+          <a:bodyPr wrap="square">
+            <a:spAutoFit/>
+          </a:bodyPr>
+          <a:lstStyle/>
+          <a:p>
+            <a:pPr algn="ctr"/>
+            <a:r>
+              <a:rPr sz="4800" b="1" i="0">
+                <a:solidFill>
+                  <a:srgbClr val="FFFFFF"/>
                 </a:solidFill>
                 <a:latin typeface="Arial"/>
               </a:rPr>
@@ -5774,6 +5548,102 @@
           </a:p>
         </p:txBody>
       </p:sp>
+    </p:spTree>
+  </p:cSld>
+  <p:clrMapOvr>
+    <a:masterClrMapping/>
+  </p:clrMapOvr>
+</p:sld>
+</file>
+
+<file path=ppt/slides/slide32.xml><?xml version="1.0" encoding="utf-8"?>
+<p:sld xmlns:a="http://schemas.openxmlformats.org/drawingml/2006/main" xmlns:p="http://schemas.openxmlformats.org/presentationml/2006/main" xmlns:r="http://schemas.openxmlformats.org/officeDocument/2006/relationships">
+  <p:cSld>
+    <p:bg>
+      <p:bgPr>
+        <a:solidFill>
+          <a:srgbClr val="000000"/>
+        </a:solidFill>
+        <a:effectLst/>
+      </p:bgPr>
+    </p:bg>
+    <p:spTree>
+      <p:nvGrpSpPr>
+        <p:cNvPr id="1" name=""/>
+        <p:cNvGrpSpPr/>
+        <p:nvPr/>
+      </p:nvGrpSpPr>
+      <p:grpSpPr/>
+      <p:sp>
+        <p:nvSpPr>
+          <p:cNvPr id="2" name="TextBox 1"/>
+          <p:cNvSpPr txBox="1"/>
+          <p:nvPr/>
+        </p:nvSpPr>
+        <p:spPr>
+          <a:xfrm>
+            <a:off x="640080" y="2500884"/>
+            <a:ext cx="10911535" cy="731520"/>
+          </a:xfrm>
+          <a:prstGeom prst="rect">
+            <a:avLst/>
+          </a:prstGeom>
+          <a:noFill/>
+        </p:spPr>
+        <p:txBody>
+          <a:bodyPr wrap="square">
+            <a:spAutoFit/>
+          </a:bodyPr>
+          <a:lstStyle/>
+          <a:p>
+            <a:pPr algn="ctr"/>
+            <a:r>
+              <a:rPr sz="4800" b="1" i="0">
+                <a:solidFill>
+                  <a:srgbClr val="FFFFFF"/>
+                </a:solidFill>
+                <a:latin typeface="Arial"/>
+              </a:rPr>
+              <a:t>主がともにいるから</a:t>
+            </a:r>
+          </a:p>
+        </p:txBody>
+      </p:sp>
+      <p:sp>
+        <p:nvSpPr>
+          <p:cNvPr id="3" name="TextBox 2"/>
+          <p:cNvSpPr txBox="1"/>
+          <p:nvPr/>
+        </p:nvSpPr>
+        <p:spPr>
+          <a:xfrm>
+            <a:off x="640080" y="3268980"/>
+            <a:ext cx="10911535" cy="365760"/>
+          </a:xfrm>
+          <a:prstGeom prst="rect">
+            <a:avLst/>
+          </a:prstGeom>
+          <a:noFill/>
+        </p:spPr>
+        <p:txBody>
+          <a:bodyPr wrap="square">
+            <a:spAutoFit/>
+          </a:bodyPr>
+          <a:lstStyle/>
+          <a:p>
+            <a:pPr algn="ctr"/>
+            <a:r>
+              <a:rPr sz="2400" b="0" i="1">
+                <a:solidFill>
+                  <a:srgbClr val="AAAAAA"/>
+                </a:solidFill>
+                <a:latin typeface="Arial"/>
+              </a:rPr>
+              <a:t>shu gatomoniirukara</a:t>
+            </a:r>
+          </a:p>
+        </p:txBody>
+      </p:sp>
       <p:sp>
         <p:nvSpPr>
           <p:cNvPr id="4" name="TextBox 3"/>
@@ -5782,60 +5652,697 @@
         </p:nvSpPr>
         <p:spPr>
           <a:xfrm>
-            <a:off x="594360" y="3529584"/>
-            <a:ext cx="11002975" cy="685800"/>
-          </a:xfrm>
-          <a:prstGeom prst="rect">
-            <a:avLst/>
-          </a:prstGeom>
-          <a:noFill/>
-        </p:spPr>
-        <p:txBody>
-          <a:bodyPr wrap="square">
-            <a:spAutoFit/>
-          </a:bodyPr>
-          <a:lstStyle/>
-          <a:p>
-            <a:pPr algn="ctr"/>
-            <a:r>
-              <a:rPr sz="3805" b="1" i="0">
+            <a:off x="640080" y="4046220"/>
+            <a:ext cx="10911535" cy="310896"/>
+          </a:xfrm>
+          <a:prstGeom prst="rect">
+            <a:avLst/>
+          </a:prstGeom>
+          <a:noFill/>
+        </p:spPr>
+        <p:txBody>
+          <a:bodyPr wrap="square">
+            <a:spAutoFit/>
+          </a:bodyPr>
+          <a:lstStyle/>
+          <a:p>
+            <a:pPr algn="ctr"/>
+            <a:r>
+              <a:rPr sz="2000" b="0" i="1">
+                <a:solidFill>
+                  <a:srgbClr val="828282"/>
+                </a:solidFill>
+                <a:latin typeface="Arial"/>
+              </a:rPr>
+              <a:t>O Senhor é meu pastor e nada me faltará</a:t>
+            </a:r>
+          </a:p>
+        </p:txBody>
+      </p:sp>
+    </p:spTree>
+  </p:cSld>
+  <p:clrMapOvr>
+    <a:masterClrMapping/>
+  </p:clrMapOvr>
+</p:sld>
+</file>
+
+<file path=ppt/slides/slide33.xml><?xml version="1.0" encoding="utf-8"?>
+<p:sld xmlns:a="http://schemas.openxmlformats.org/drawingml/2006/main" xmlns:p="http://schemas.openxmlformats.org/presentationml/2006/main" xmlns:r="http://schemas.openxmlformats.org/officeDocument/2006/relationships">
+  <p:cSld>
+    <p:bg>
+      <p:bgPr>
+        <a:solidFill>
+          <a:srgbClr val="000000"/>
+        </a:solidFill>
+        <a:effectLst/>
+      </p:bgPr>
+    </p:bg>
+    <p:spTree>
+      <p:nvGrpSpPr>
+        <p:cNvPr id="1" name=""/>
+        <p:cNvGrpSpPr/>
+        <p:nvPr/>
+      </p:nvGrpSpPr>
+      <p:grpSpPr/>
+      <p:sp>
+        <p:nvSpPr>
+          <p:cNvPr id="2" name="TextBox 1"/>
+          <p:cNvSpPr txBox="1"/>
+          <p:nvPr/>
+        </p:nvSpPr>
+        <p:spPr>
+          <a:xfrm>
+            <a:off x="640080" y="2052828"/>
+            <a:ext cx="10911535" cy="731520"/>
+          </a:xfrm>
+          <a:prstGeom prst="rect">
+            <a:avLst/>
+          </a:prstGeom>
+          <a:noFill/>
+        </p:spPr>
+        <p:txBody>
+          <a:bodyPr wrap="square">
+            <a:spAutoFit/>
+          </a:bodyPr>
+          <a:lstStyle/>
+          <a:p>
+            <a:pPr algn="ctr"/>
+            <a:r>
+              <a:rPr sz="4800" b="1" i="0">
                 <a:solidFill>
                   <a:srgbClr val="FFFFFF"/>
                 </a:solidFill>
                 <a:latin typeface="Arial"/>
               </a:rPr>
-              <a:t>Ainda que eu ande pelo vale da sombra</a:t>
-            </a:r>
-          </a:p>
-        </p:txBody>
-      </p:sp>
-      <p:sp>
-        <p:nvSpPr>
-          <p:cNvPr id="5" name="TextBox 4"/>
-          <p:cNvSpPr txBox="1"/>
-          <p:nvPr/>
-        </p:nvSpPr>
-        <p:spPr>
-          <a:xfrm>
-            <a:off x="594360" y="4251960"/>
-            <a:ext cx="11002975" cy="347472"/>
-          </a:xfrm>
-          <a:prstGeom prst="rect">
-            <a:avLst/>
-          </a:prstGeom>
-          <a:noFill/>
-        </p:spPr>
-        <p:txBody>
-          <a:bodyPr wrap="square">
-            <a:spAutoFit/>
-          </a:bodyPr>
-          <a:lstStyle/>
-          <a:p>
-            <a:pPr algn="ctr"/>
-            <a:r>
-              <a:rPr sz="2200" b="0" i="1">
-                <a:solidFill>
-                  <a:srgbClr val="8C8C8C"/>
+              <a:t/>
+            </a:r>
+          </a:p>
+        </p:txBody>
+      </p:sp>
+      <p:sp>
+        <p:nvSpPr>
+          <p:cNvPr id="3" name="TextBox 2"/>
+          <p:cNvSpPr txBox="1"/>
+          <p:nvPr/>
+        </p:nvSpPr>
+        <p:spPr>
+          <a:xfrm>
+            <a:off x="640080" y="2985516"/>
+            <a:ext cx="10911535" cy="731520"/>
+          </a:xfrm>
+          <a:prstGeom prst="rect">
+            <a:avLst/>
+          </a:prstGeom>
+          <a:noFill/>
+        </p:spPr>
+        <p:txBody>
+          <a:bodyPr wrap="square">
+            <a:spAutoFit/>
+          </a:bodyPr>
+          <a:lstStyle/>
+          <a:p>
+            <a:pPr algn="ctr"/>
+            <a:r>
+              <a:rPr sz="4800" b="1" i="0">
+                <a:solidFill>
+                  <a:srgbClr val="FFFFFF"/>
+                </a:solidFill>
+                <a:latin typeface="Arial"/>
+              </a:rPr>
+              <a:t/>
+            </a:r>
+          </a:p>
+        </p:txBody>
+      </p:sp>
+    </p:spTree>
+  </p:cSld>
+  <p:clrMapOvr>
+    <a:masterClrMapping/>
+  </p:clrMapOvr>
+</p:sld>
+</file>
+
+<file path=ppt/slides/slide34.xml><?xml version="1.0" encoding="utf-8"?>
+<p:sld xmlns:a="http://schemas.openxmlformats.org/drawingml/2006/main" xmlns:p="http://schemas.openxmlformats.org/presentationml/2006/main" xmlns:r="http://schemas.openxmlformats.org/officeDocument/2006/relationships">
+  <p:cSld>
+    <p:bg>
+      <p:bgPr>
+        <a:solidFill>
+          <a:srgbClr val="000000"/>
+        </a:solidFill>
+        <a:effectLst/>
+      </p:bgPr>
+    </p:bg>
+    <p:spTree>
+      <p:nvGrpSpPr>
+        <p:cNvPr id="1" name=""/>
+        <p:cNvGrpSpPr/>
+        <p:nvPr/>
+      </p:nvGrpSpPr>
+      <p:grpSpPr/>
+      <p:sp>
+        <p:nvSpPr>
+          <p:cNvPr id="2" name="TextBox 1"/>
+          <p:cNvSpPr txBox="1"/>
+          <p:nvPr/>
+        </p:nvSpPr>
+        <p:spPr>
+          <a:xfrm>
+            <a:off x="640080" y="2500884"/>
+            <a:ext cx="10911535" cy="731520"/>
+          </a:xfrm>
+          <a:prstGeom prst="rect">
+            <a:avLst/>
+          </a:prstGeom>
+          <a:noFill/>
+        </p:spPr>
+        <p:txBody>
+          <a:bodyPr wrap="square">
+            <a:spAutoFit/>
+          </a:bodyPr>
+          <a:lstStyle/>
+          <a:p>
+            <a:pPr algn="ctr"/>
+            <a:r>
+              <a:rPr sz="4800" b="1" i="0">
+                <a:solidFill>
+                  <a:srgbClr val="FFFFFF"/>
+                </a:solidFill>
+                <a:latin typeface="Arial"/>
+              </a:rPr>
+              <a:t>主よ　あなただけを</a:t>
+            </a:r>
+          </a:p>
+        </p:txBody>
+      </p:sp>
+      <p:sp>
+        <p:nvSpPr>
+          <p:cNvPr id="3" name="TextBox 2"/>
+          <p:cNvSpPr txBox="1"/>
+          <p:nvPr/>
+        </p:nvSpPr>
+        <p:spPr>
+          <a:xfrm>
+            <a:off x="640080" y="3268980"/>
+            <a:ext cx="10911535" cy="365760"/>
+          </a:xfrm>
+          <a:prstGeom prst="rect">
+            <a:avLst/>
+          </a:prstGeom>
+          <a:noFill/>
+        </p:spPr>
+        <p:txBody>
+          <a:bodyPr wrap="square">
+            <a:spAutoFit/>
+          </a:bodyPr>
+          <a:lstStyle/>
+          <a:p>
+            <a:pPr algn="ctr"/>
+            <a:r>
+              <a:rPr sz="2400" b="0" i="1">
+                <a:solidFill>
+                  <a:srgbClr val="AAAAAA"/>
+                </a:solidFill>
+                <a:latin typeface="Arial"/>
+              </a:rPr>
+              <a:t>shu yo anatadakewo</a:t>
+            </a:r>
+          </a:p>
+        </p:txBody>
+      </p:sp>
+      <p:sp>
+        <p:nvSpPr>
+          <p:cNvPr id="4" name="TextBox 3"/>
+          <p:cNvSpPr txBox="1"/>
+          <p:nvPr/>
+        </p:nvSpPr>
+        <p:spPr>
+          <a:xfrm>
+            <a:off x="640080" y="4046220"/>
+            <a:ext cx="10911535" cy="310896"/>
+          </a:xfrm>
+          <a:prstGeom prst="rect">
+            <a:avLst/>
+          </a:prstGeom>
+          <a:noFill/>
+        </p:spPr>
+        <p:txBody>
+          <a:bodyPr wrap="square">
+            <a:spAutoFit/>
+          </a:bodyPr>
+          <a:lstStyle/>
+          <a:p>
+            <a:pPr algn="ctr"/>
+            <a:r>
+              <a:rPr sz="2000" b="0" i="1">
+                <a:solidFill>
+                  <a:srgbClr val="828282"/>
+                </a:solidFill>
+                <a:latin typeface="Arial"/>
+              </a:rPr>
+              <a:t>O Senhor é meu pastor e nada me faltará</a:t>
+            </a:r>
+          </a:p>
+        </p:txBody>
+      </p:sp>
+    </p:spTree>
+  </p:cSld>
+  <p:clrMapOvr>
+    <a:masterClrMapping/>
+  </p:clrMapOvr>
+</p:sld>
+</file>
+
+<file path=ppt/slides/slide35.xml><?xml version="1.0" encoding="utf-8"?>
+<p:sld xmlns:a="http://schemas.openxmlformats.org/drawingml/2006/main" xmlns:p="http://schemas.openxmlformats.org/presentationml/2006/main" xmlns:r="http://schemas.openxmlformats.org/officeDocument/2006/relationships">
+  <p:cSld>
+    <p:bg>
+      <p:bgPr>
+        <a:solidFill>
+          <a:srgbClr val="000000"/>
+        </a:solidFill>
+        <a:effectLst/>
+      </p:bgPr>
+    </p:bg>
+    <p:spTree>
+      <p:nvGrpSpPr>
+        <p:cNvPr id="1" name=""/>
+        <p:cNvGrpSpPr/>
+        <p:nvPr/>
+      </p:nvGrpSpPr>
+      <p:grpSpPr/>
+      <p:sp>
+        <p:nvSpPr>
+          <p:cNvPr id="2" name="TextBox 1"/>
+          <p:cNvSpPr txBox="1"/>
+          <p:nvPr/>
+        </p:nvSpPr>
+        <p:spPr>
+          <a:xfrm>
+            <a:off x="640080" y="2702052"/>
+            <a:ext cx="10911535" cy="731520"/>
+          </a:xfrm>
+          <a:prstGeom prst="rect">
+            <a:avLst/>
+          </a:prstGeom>
+          <a:noFill/>
+        </p:spPr>
+        <p:txBody>
+          <a:bodyPr wrap="square">
+            <a:spAutoFit/>
+          </a:bodyPr>
+          <a:lstStyle/>
+          <a:p>
+            <a:pPr algn="ctr"/>
+            <a:r>
+              <a:rPr sz="4800" b="1" i="0">
+                <a:solidFill>
+                  <a:srgbClr val="FFFFFF"/>
+                </a:solidFill>
+                <a:latin typeface="Arial"/>
+              </a:rPr>
+              <a:t/>
+            </a:r>
+          </a:p>
+        </p:txBody>
+      </p:sp>
+    </p:spTree>
+  </p:cSld>
+  <p:clrMapOvr>
+    <a:masterClrMapping/>
+  </p:clrMapOvr>
+</p:sld>
+</file>
+
+<file path=ppt/slides/slide36.xml><?xml version="1.0" encoding="utf-8"?>
+<p:sld xmlns:a="http://schemas.openxmlformats.org/drawingml/2006/main" xmlns:p="http://schemas.openxmlformats.org/presentationml/2006/main" xmlns:r="http://schemas.openxmlformats.org/officeDocument/2006/relationships">
+  <p:cSld>
+    <p:bg>
+      <p:bgPr>
+        <a:solidFill>
+          <a:srgbClr val="000000"/>
+        </a:solidFill>
+        <a:effectLst/>
+      </p:bgPr>
+    </p:bg>
+    <p:spTree>
+      <p:nvGrpSpPr>
+        <p:cNvPr id="1" name=""/>
+        <p:cNvGrpSpPr/>
+        <p:nvPr/>
+      </p:nvGrpSpPr>
+      <p:grpSpPr/>
+      <p:sp>
+        <p:nvSpPr>
+          <p:cNvPr id="2" name="TextBox 1"/>
+          <p:cNvSpPr txBox="1"/>
+          <p:nvPr/>
+        </p:nvSpPr>
+        <p:spPr>
+          <a:xfrm>
+            <a:off x="640080" y="2500884"/>
+            <a:ext cx="10911535" cy="731520"/>
+          </a:xfrm>
+          <a:prstGeom prst="rect">
+            <a:avLst/>
+          </a:prstGeom>
+          <a:noFill/>
+        </p:spPr>
+        <p:txBody>
+          <a:bodyPr wrap="square">
+            <a:spAutoFit/>
+          </a:bodyPr>
+          <a:lstStyle/>
+          <a:p>
+            <a:pPr algn="ctr"/>
+            <a:r>
+              <a:rPr sz="4800" b="1" i="0">
+                <a:solidFill>
+                  <a:srgbClr val="FFFFFF"/>
+                </a:solidFill>
+                <a:latin typeface="Arial"/>
+              </a:rPr>
+              <a:t>信じ　歩みます</a:t>
+            </a:r>
+          </a:p>
+        </p:txBody>
+      </p:sp>
+      <p:sp>
+        <p:nvSpPr>
+          <p:cNvPr id="3" name="TextBox 2"/>
+          <p:cNvSpPr txBox="1"/>
+          <p:nvPr/>
+        </p:nvSpPr>
+        <p:spPr>
+          <a:xfrm>
+            <a:off x="640080" y="3268980"/>
+            <a:ext cx="10911535" cy="365760"/>
+          </a:xfrm>
+          <a:prstGeom prst="rect">
+            <a:avLst/>
+          </a:prstGeom>
+          <a:noFill/>
+        </p:spPr>
+        <p:txBody>
+          <a:bodyPr wrap="square">
+            <a:spAutoFit/>
+          </a:bodyPr>
+          <a:lstStyle/>
+          <a:p>
+            <a:pPr algn="ctr"/>
+            <a:r>
+              <a:rPr sz="2400" b="0" i="1">
+                <a:solidFill>
+                  <a:srgbClr val="AAAAAA"/>
+                </a:solidFill>
+                <a:latin typeface="Arial"/>
+              </a:rPr>
+              <a:t>shinji ayumi masu</a:t>
+            </a:r>
+          </a:p>
+        </p:txBody>
+      </p:sp>
+      <p:sp>
+        <p:nvSpPr>
+          <p:cNvPr id="4" name="TextBox 3"/>
+          <p:cNvSpPr txBox="1"/>
+          <p:nvPr/>
+        </p:nvSpPr>
+        <p:spPr>
+          <a:xfrm>
+            <a:off x="640080" y="4046220"/>
+            <a:ext cx="10911535" cy="310896"/>
+          </a:xfrm>
+          <a:prstGeom prst="rect">
+            <a:avLst/>
+          </a:prstGeom>
+          <a:noFill/>
+        </p:spPr>
+        <p:txBody>
+          <a:bodyPr wrap="square">
+            <a:spAutoFit/>
+          </a:bodyPr>
+          <a:lstStyle/>
+          <a:p>
+            <a:pPr algn="ctr"/>
+            <a:r>
+              <a:rPr sz="2000" b="0" i="1">
+                <a:solidFill>
+                  <a:srgbClr val="828282"/>
+                </a:solidFill>
+                <a:latin typeface="Arial"/>
+              </a:rPr>
+              <a:t>O Senhor é meu pastor e nada me faltará</a:t>
+            </a:r>
+          </a:p>
+        </p:txBody>
+      </p:sp>
+    </p:spTree>
+  </p:cSld>
+  <p:clrMapOvr>
+    <a:masterClrMapping/>
+  </p:clrMapOvr>
+</p:sld>
+</file>
+
+<file path=ppt/slides/slide37.xml><?xml version="1.0" encoding="utf-8"?>
+<p:sld xmlns:a="http://schemas.openxmlformats.org/drawingml/2006/main" xmlns:p="http://schemas.openxmlformats.org/presentationml/2006/main" xmlns:r="http://schemas.openxmlformats.org/officeDocument/2006/relationships">
+  <p:cSld>
+    <p:bg>
+      <p:bgPr>
+        <a:solidFill>
+          <a:srgbClr val="000000"/>
+        </a:solidFill>
+        <a:effectLst/>
+      </p:bgPr>
+    </p:bg>
+    <p:spTree>
+      <p:nvGrpSpPr>
+        <p:cNvPr id="1" name=""/>
+        <p:cNvGrpSpPr/>
+        <p:nvPr/>
+      </p:nvGrpSpPr>
+      <p:grpSpPr/>
+      <p:sp>
+        <p:nvSpPr>
+          <p:cNvPr id="2" name="TextBox 1"/>
+          <p:cNvSpPr txBox="1"/>
+          <p:nvPr/>
+        </p:nvSpPr>
+        <p:spPr>
+          <a:xfrm>
+            <a:off x="640080" y="2702052"/>
+            <a:ext cx="10911535" cy="731520"/>
+          </a:xfrm>
+          <a:prstGeom prst="rect">
+            <a:avLst/>
+          </a:prstGeom>
+          <a:noFill/>
+        </p:spPr>
+        <p:txBody>
+          <a:bodyPr wrap="square">
+            <a:spAutoFit/>
+          </a:bodyPr>
+          <a:lstStyle/>
+          <a:p>
+            <a:pPr algn="ctr"/>
+            <a:r>
+              <a:rPr sz="4800" b="1" i="0">
+                <a:solidFill>
+                  <a:srgbClr val="FFFFFF"/>
+                </a:solidFill>
+                <a:latin typeface="Arial"/>
+              </a:rPr>
+              <a:t/>
+            </a:r>
+          </a:p>
+        </p:txBody>
+      </p:sp>
+    </p:spTree>
+  </p:cSld>
+  <p:clrMapOvr>
+    <a:masterClrMapping/>
+  </p:clrMapOvr>
+</p:sld>
+</file>
+
+<file path=ppt/slides/slide38.xml><?xml version="1.0" encoding="utf-8"?>
+<p:sld xmlns:a="http://schemas.openxmlformats.org/drawingml/2006/main" xmlns:p="http://schemas.openxmlformats.org/presentationml/2006/main" xmlns:r="http://schemas.openxmlformats.org/officeDocument/2006/relationships">
+  <p:cSld>
+    <p:bg>
+      <p:bgPr>
+        <a:solidFill>
+          <a:srgbClr val="000000"/>
+        </a:solidFill>
+        <a:effectLst/>
+      </p:bgPr>
+    </p:bg>
+    <p:spTree>
+      <p:nvGrpSpPr>
+        <p:cNvPr id="1" name=""/>
+        <p:cNvGrpSpPr/>
+        <p:nvPr/>
+      </p:nvGrpSpPr>
+      <p:grpSpPr/>
+      <p:sp>
+        <p:nvSpPr>
+          <p:cNvPr id="2" name="TextBox 1"/>
+          <p:cNvSpPr txBox="1"/>
+          <p:nvPr/>
+        </p:nvSpPr>
+        <p:spPr>
+          <a:xfrm>
+            <a:off x="640080" y="2500884"/>
+            <a:ext cx="10911535" cy="731520"/>
+          </a:xfrm>
+          <a:prstGeom prst="rect">
+            <a:avLst/>
+          </a:prstGeom>
+          <a:noFill/>
+        </p:spPr>
+        <p:txBody>
+          <a:bodyPr wrap="square">
+            <a:spAutoFit/>
+          </a:bodyPr>
+          <a:lstStyle/>
+          <a:p>
+            <a:pPr algn="ctr"/>
+            <a:r>
+              <a:rPr sz="4800" b="1" i="0">
+                <a:solidFill>
+                  <a:srgbClr val="FFFFFF"/>
+                </a:solidFill>
+                <a:latin typeface="Arial"/>
+              </a:rPr>
+              <a:t>いつくしみと　恵みが</a:t>
+            </a:r>
+          </a:p>
+        </p:txBody>
+      </p:sp>
+      <p:sp>
+        <p:nvSpPr>
+          <p:cNvPr id="3" name="TextBox 2"/>
+          <p:cNvSpPr txBox="1"/>
+          <p:nvPr/>
+        </p:nvSpPr>
+        <p:spPr>
+          <a:xfrm>
+            <a:off x="640080" y="3268980"/>
+            <a:ext cx="10911535" cy="365760"/>
+          </a:xfrm>
+          <a:prstGeom prst="rect">
+            <a:avLst/>
+          </a:prstGeom>
+          <a:noFill/>
+        </p:spPr>
+        <p:txBody>
+          <a:bodyPr wrap="square">
+            <a:spAutoFit/>
+          </a:bodyPr>
+          <a:lstStyle/>
+          <a:p>
+            <a:pPr algn="ctr"/>
+            <a:r>
+              <a:rPr sz="2400" b="0" i="1">
+                <a:solidFill>
+                  <a:srgbClr val="AAAAAA"/>
+                </a:solidFill>
+                <a:latin typeface="Arial"/>
+              </a:rPr>
+              <a:t>itsukushimito megumi ga</a:t>
+            </a:r>
+          </a:p>
+        </p:txBody>
+      </p:sp>
+      <p:sp>
+        <p:nvSpPr>
+          <p:cNvPr id="4" name="TextBox 3"/>
+          <p:cNvSpPr txBox="1"/>
+          <p:nvPr/>
+        </p:nvSpPr>
+        <p:spPr>
+          <a:xfrm>
+            <a:off x="640080" y="4046220"/>
+            <a:ext cx="10911535" cy="310896"/>
+          </a:xfrm>
+          <a:prstGeom prst="rect">
+            <a:avLst/>
+          </a:prstGeom>
+          <a:noFill/>
+        </p:spPr>
+        <p:txBody>
+          <a:bodyPr wrap="square">
+            <a:spAutoFit/>
+          </a:bodyPr>
+          <a:lstStyle/>
+          <a:p>
+            <a:pPr algn="ctr"/>
+            <a:r>
+              <a:rPr sz="2000" b="0" i="1">
+                <a:solidFill>
+                  <a:srgbClr val="828282"/>
+                </a:solidFill>
+                <a:latin typeface="Arial"/>
+              </a:rPr>
+              <a:t>O Senhor é meu pastor e nada me faltará</a:t>
+            </a:r>
+          </a:p>
+        </p:txBody>
+      </p:sp>
+    </p:spTree>
+  </p:cSld>
+  <p:clrMapOvr>
+    <a:masterClrMapping/>
+  </p:clrMapOvr>
+</p:sld>
+</file>
+
+<file path=ppt/slides/slide39.xml><?xml version="1.0" encoding="utf-8"?>
+<p:sld xmlns:a="http://schemas.openxmlformats.org/drawingml/2006/main" xmlns:p="http://schemas.openxmlformats.org/presentationml/2006/main" xmlns:r="http://schemas.openxmlformats.org/officeDocument/2006/relationships">
+  <p:cSld>
+    <p:bg>
+      <p:bgPr>
+        <a:solidFill>
+          <a:srgbClr val="000000"/>
+        </a:solidFill>
+        <a:effectLst/>
+      </p:bgPr>
+    </p:bg>
+    <p:spTree>
+      <p:nvGrpSpPr>
+        <p:cNvPr id="1" name=""/>
+        <p:cNvGrpSpPr/>
+        <p:nvPr/>
+      </p:nvGrpSpPr>
+      <p:grpSpPr/>
+      <p:sp>
+        <p:nvSpPr>
+          <p:cNvPr id="2" name="TextBox 1"/>
+          <p:cNvSpPr txBox="1"/>
+          <p:nvPr/>
+        </p:nvSpPr>
+        <p:spPr>
+          <a:xfrm>
+            <a:off x="640080" y="2702052"/>
+            <a:ext cx="10911535" cy="731520"/>
+          </a:xfrm>
+          <a:prstGeom prst="rect">
+            <a:avLst/>
+          </a:prstGeom>
+          <a:noFill/>
+        </p:spPr>
+        <p:txBody>
+          <a:bodyPr wrap="square">
+            <a:spAutoFit/>
+          </a:bodyPr>
+          <a:lstStyle/>
+          <a:p>
+            <a:pPr algn="ctr"/>
+            <a:r>
+              <a:rPr sz="4800" b="1" i="0">
+                <a:solidFill>
+                  <a:srgbClr val="FFFFFF"/>
                 </a:solidFill>
                 <a:latin typeface="Arial"/>
               </a:rPr>
@@ -5878,23 +6385,23 @@
         </p:nvSpPr>
         <p:spPr>
           <a:xfrm>
-            <a:off x="594360" y="2258568"/>
-            <a:ext cx="11002975" cy="685800"/>
-          </a:xfrm>
-          <a:prstGeom prst="rect">
-            <a:avLst/>
-          </a:prstGeom>
-          <a:noFill/>
-        </p:spPr>
-        <p:txBody>
-          <a:bodyPr wrap="square">
-            <a:spAutoFit/>
-          </a:bodyPr>
-          <a:lstStyle/>
-          <a:p>
-            <a:pPr algn="ctr"/>
-            <a:r>
-              <a:rPr sz="4400" b="1" i="0">
+            <a:off x="640080" y="2052828"/>
+            <a:ext cx="10911535" cy="731520"/>
+          </a:xfrm>
+          <a:prstGeom prst="rect">
+            <a:avLst/>
+          </a:prstGeom>
+          <a:noFill/>
+        </p:spPr>
+        <p:txBody>
+          <a:bodyPr wrap="square">
+            <a:spAutoFit/>
+          </a:bodyPr>
+          <a:lstStyle/>
+          <a:p>
+            <a:pPr algn="ctr"/>
+            <a:r>
+              <a:rPr sz="4800" b="1" i="0">
                 <a:solidFill>
                   <a:srgbClr val="FFFFFF"/>
                 </a:solidFill>
@@ -5913,25 +6420,217 @@
         </p:nvSpPr>
         <p:spPr>
           <a:xfrm>
-            <a:off x="594360" y="2980944"/>
-            <a:ext cx="11002975" cy="347472"/>
-          </a:xfrm>
-          <a:prstGeom prst="rect">
-            <a:avLst/>
-          </a:prstGeom>
-          <a:noFill/>
-        </p:spPr>
-        <p:txBody>
-          <a:bodyPr wrap="square">
-            <a:spAutoFit/>
-          </a:bodyPr>
-          <a:lstStyle/>
-          <a:p>
-            <a:pPr algn="ctr"/>
-            <a:r>
-              <a:rPr sz="2200" b="0" i="1">
-                <a:solidFill>
-                  <a:srgbClr val="8C8C8C"/>
+            <a:off x="640080" y="2985516"/>
+            <a:ext cx="10911535" cy="731520"/>
+          </a:xfrm>
+          <a:prstGeom prst="rect">
+            <a:avLst/>
+          </a:prstGeom>
+          <a:noFill/>
+        </p:spPr>
+        <p:txBody>
+          <a:bodyPr wrap="square">
+            <a:spAutoFit/>
+          </a:bodyPr>
+          <a:lstStyle/>
+          <a:p>
+            <a:pPr algn="ctr"/>
+            <a:r>
+              <a:rPr sz="4800" b="1" i="0">
+                <a:solidFill>
+                  <a:srgbClr val="FFFFFF"/>
+                </a:solidFill>
+                <a:latin typeface="Arial"/>
+              </a:rPr>
+              <a:t>Pois Tu estás comigo</a:t>
+            </a:r>
+          </a:p>
+        </p:txBody>
+      </p:sp>
+    </p:spTree>
+  </p:cSld>
+  <p:clrMapOvr>
+    <a:masterClrMapping/>
+  </p:clrMapOvr>
+</p:sld>
+</file>
+
+<file path=ppt/slides/slide40.xml><?xml version="1.0" encoding="utf-8"?>
+<p:sld xmlns:a="http://schemas.openxmlformats.org/drawingml/2006/main" xmlns:p="http://schemas.openxmlformats.org/presentationml/2006/main" xmlns:r="http://schemas.openxmlformats.org/officeDocument/2006/relationships">
+  <p:cSld>
+    <p:bg>
+      <p:bgPr>
+        <a:solidFill>
+          <a:srgbClr val="000000"/>
+        </a:solidFill>
+        <a:effectLst/>
+      </p:bgPr>
+    </p:bg>
+    <p:spTree>
+      <p:nvGrpSpPr>
+        <p:cNvPr id="1" name=""/>
+        <p:cNvGrpSpPr/>
+        <p:nvPr/>
+      </p:nvGrpSpPr>
+      <p:grpSpPr/>
+      <p:sp>
+        <p:nvSpPr>
+          <p:cNvPr id="2" name="TextBox 1"/>
+          <p:cNvSpPr txBox="1"/>
+          <p:nvPr/>
+        </p:nvSpPr>
+        <p:spPr>
+          <a:xfrm>
+            <a:off x="640080" y="2500884"/>
+            <a:ext cx="10911535" cy="731520"/>
+          </a:xfrm>
+          <a:prstGeom prst="rect">
+            <a:avLst/>
+          </a:prstGeom>
+          <a:noFill/>
+        </p:spPr>
+        <p:txBody>
+          <a:bodyPr wrap="square">
+            <a:spAutoFit/>
+          </a:bodyPr>
+          <a:lstStyle/>
+          <a:p>
+            <a:pPr algn="ctr"/>
+            <a:r>
+              <a:rPr sz="4800" b="1" i="0">
+                <a:solidFill>
+                  <a:srgbClr val="FFFFFF"/>
+                </a:solidFill>
+                <a:latin typeface="Arial"/>
+              </a:rPr>
+              <a:t>私を追うでしょう</a:t>
+            </a:r>
+          </a:p>
+        </p:txBody>
+      </p:sp>
+      <p:sp>
+        <p:nvSpPr>
+          <p:cNvPr id="3" name="TextBox 2"/>
+          <p:cNvSpPr txBox="1"/>
+          <p:nvPr/>
+        </p:nvSpPr>
+        <p:spPr>
+          <a:xfrm>
+            <a:off x="640080" y="3268980"/>
+            <a:ext cx="10911535" cy="365760"/>
+          </a:xfrm>
+          <a:prstGeom prst="rect">
+            <a:avLst/>
+          </a:prstGeom>
+          <a:noFill/>
+        </p:spPr>
+        <p:txBody>
+          <a:bodyPr wrap="square">
+            <a:spAutoFit/>
+          </a:bodyPr>
+          <a:lstStyle/>
+          <a:p>
+            <a:pPr algn="ctr"/>
+            <a:r>
+              <a:rPr sz="2400" b="0" i="1">
+                <a:solidFill>
+                  <a:srgbClr val="AAAAAA"/>
+                </a:solidFill>
+                <a:latin typeface="Arial"/>
+              </a:rPr>
+              <a:t>watashi wo ou deshou</a:t>
+            </a:r>
+          </a:p>
+        </p:txBody>
+      </p:sp>
+      <p:sp>
+        <p:nvSpPr>
+          <p:cNvPr id="4" name="TextBox 3"/>
+          <p:cNvSpPr txBox="1"/>
+          <p:nvPr/>
+        </p:nvSpPr>
+        <p:spPr>
+          <a:xfrm>
+            <a:off x="640080" y="4046220"/>
+            <a:ext cx="10911535" cy="310896"/>
+          </a:xfrm>
+          <a:prstGeom prst="rect">
+            <a:avLst/>
+          </a:prstGeom>
+          <a:noFill/>
+        </p:spPr>
+        <p:txBody>
+          <a:bodyPr wrap="square">
+            <a:spAutoFit/>
+          </a:bodyPr>
+          <a:lstStyle/>
+          <a:p>
+            <a:pPr algn="ctr"/>
+            <a:r>
+              <a:rPr sz="2000" b="0" i="1">
+                <a:solidFill>
+                  <a:srgbClr val="828282"/>
+                </a:solidFill>
+                <a:latin typeface="Arial"/>
+              </a:rPr>
+              <a:t>O Senhor é meu pastor e nada me faltará</a:t>
+            </a:r>
+          </a:p>
+        </p:txBody>
+      </p:sp>
+    </p:spTree>
+  </p:cSld>
+  <p:clrMapOvr>
+    <a:masterClrMapping/>
+  </p:clrMapOvr>
+</p:sld>
+</file>
+
+<file path=ppt/slides/slide41.xml><?xml version="1.0" encoding="utf-8"?>
+<p:sld xmlns:a="http://schemas.openxmlformats.org/drawingml/2006/main" xmlns:p="http://schemas.openxmlformats.org/presentationml/2006/main" xmlns:r="http://schemas.openxmlformats.org/officeDocument/2006/relationships">
+  <p:cSld>
+    <p:bg>
+      <p:bgPr>
+        <a:solidFill>
+          <a:srgbClr val="000000"/>
+        </a:solidFill>
+        <a:effectLst/>
+      </p:bgPr>
+    </p:bg>
+    <p:spTree>
+      <p:nvGrpSpPr>
+        <p:cNvPr id="1" name=""/>
+        <p:cNvGrpSpPr/>
+        <p:nvPr/>
+      </p:nvGrpSpPr>
+      <p:grpSpPr/>
+      <p:sp>
+        <p:nvSpPr>
+          <p:cNvPr id="2" name="TextBox 1"/>
+          <p:cNvSpPr txBox="1"/>
+          <p:nvPr/>
+        </p:nvSpPr>
+        <p:spPr>
+          <a:xfrm>
+            <a:off x="640080" y="2052828"/>
+            <a:ext cx="10911535" cy="731520"/>
+          </a:xfrm>
+          <a:prstGeom prst="rect">
+            <a:avLst/>
+          </a:prstGeom>
+          <a:noFill/>
+        </p:spPr>
+        <p:txBody>
+          <a:bodyPr wrap="square">
+            <a:spAutoFit/>
+          </a:bodyPr>
+          <a:lstStyle/>
+          <a:p>
+            <a:pPr algn="ctr"/>
+            <a:r>
+              <a:rPr sz="4800" b="1" i="0">
+                <a:solidFill>
+                  <a:srgbClr val="FFFFFF"/>
                 </a:solidFill>
                 <a:latin typeface="Arial"/>
               </a:rPr>
@@ -5942,66 +6641,284 @@
       </p:sp>
       <p:sp>
         <p:nvSpPr>
-          <p:cNvPr id="4" name="TextBox 3"/>
-          <p:cNvSpPr txBox="1"/>
-          <p:nvPr/>
-        </p:nvSpPr>
-        <p:spPr>
-          <a:xfrm>
-            <a:off x="594360" y="3529584"/>
-            <a:ext cx="11002975" cy="685800"/>
-          </a:xfrm>
-          <a:prstGeom prst="rect">
-            <a:avLst/>
-          </a:prstGeom>
-          <a:noFill/>
-        </p:spPr>
-        <p:txBody>
-          <a:bodyPr wrap="square">
-            <a:spAutoFit/>
-          </a:bodyPr>
-          <a:lstStyle/>
-          <a:p>
-            <a:pPr algn="ctr"/>
-            <a:r>
-              <a:rPr sz="4400" b="1" i="0">
+          <p:cNvPr id="3" name="TextBox 2"/>
+          <p:cNvSpPr txBox="1"/>
+          <p:nvPr/>
+        </p:nvSpPr>
+        <p:spPr>
+          <a:xfrm>
+            <a:off x="640080" y="2985516"/>
+            <a:ext cx="10911535" cy="731520"/>
+          </a:xfrm>
+          <a:prstGeom prst="rect">
+            <a:avLst/>
+          </a:prstGeom>
+          <a:noFill/>
+        </p:spPr>
+        <p:txBody>
+          <a:bodyPr wrap="square">
+            <a:spAutoFit/>
+          </a:bodyPr>
+          <a:lstStyle/>
+          <a:p>
+            <a:pPr algn="ctr"/>
+            <a:r>
+              <a:rPr sz="4800" b="1" i="0">
                 <a:solidFill>
                   <a:srgbClr val="FFFFFF"/>
                 </a:solidFill>
                 <a:latin typeface="Arial"/>
               </a:rPr>
-              <a:t>Pois Tu estás comigo</a:t>
-            </a:r>
-          </a:p>
-        </p:txBody>
-      </p:sp>
-      <p:sp>
-        <p:nvSpPr>
-          <p:cNvPr id="5" name="TextBox 4"/>
-          <p:cNvSpPr txBox="1"/>
-          <p:nvPr/>
-        </p:nvSpPr>
-        <p:spPr>
-          <a:xfrm>
-            <a:off x="594360" y="4251960"/>
-            <a:ext cx="11002975" cy="347472"/>
-          </a:xfrm>
-          <a:prstGeom prst="rect">
-            <a:avLst/>
-          </a:prstGeom>
-          <a:noFill/>
-        </p:spPr>
-        <p:txBody>
-          <a:bodyPr wrap="square">
-            <a:spAutoFit/>
-          </a:bodyPr>
-          <a:lstStyle/>
-          <a:p>
-            <a:pPr algn="ctr"/>
-            <a:r>
-              <a:rPr sz="2200" b="0" i="1">
-                <a:solidFill>
-                  <a:srgbClr val="8C8C8C"/>
+              <a:t/>
+            </a:r>
+          </a:p>
+        </p:txBody>
+      </p:sp>
+    </p:spTree>
+  </p:cSld>
+  <p:clrMapOvr>
+    <a:masterClrMapping/>
+  </p:clrMapOvr>
+</p:sld>
+</file>
+
+<file path=ppt/slides/slide42.xml><?xml version="1.0" encoding="utf-8"?>
+<p:sld xmlns:a="http://schemas.openxmlformats.org/drawingml/2006/main" xmlns:p="http://schemas.openxmlformats.org/presentationml/2006/main" xmlns:r="http://schemas.openxmlformats.org/officeDocument/2006/relationships">
+  <p:cSld>
+    <p:bg>
+      <p:bgPr>
+        <a:solidFill>
+          <a:srgbClr val="000000"/>
+        </a:solidFill>
+        <a:effectLst/>
+      </p:bgPr>
+    </p:bg>
+    <p:spTree>
+      <p:nvGrpSpPr>
+        <p:cNvPr id="1" name=""/>
+        <p:cNvGrpSpPr/>
+        <p:nvPr/>
+      </p:nvGrpSpPr>
+      <p:grpSpPr/>
+      <p:sp>
+        <p:nvSpPr>
+          <p:cNvPr id="2" name="TextBox 1"/>
+          <p:cNvSpPr txBox="1"/>
+          <p:nvPr/>
+        </p:nvSpPr>
+        <p:spPr>
+          <a:xfrm>
+            <a:off x="640080" y="2052828"/>
+            <a:ext cx="10911535" cy="731520"/>
+          </a:xfrm>
+          <a:prstGeom prst="rect">
+            <a:avLst/>
+          </a:prstGeom>
+          <a:noFill/>
+        </p:spPr>
+        <p:txBody>
+          <a:bodyPr wrap="square">
+            <a:spAutoFit/>
+          </a:bodyPr>
+          <a:lstStyle/>
+          <a:p>
+            <a:pPr algn="ctr"/>
+            <a:r>
+              <a:rPr sz="4800" b="1" i="0">
+                <a:solidFill>
+                  <a:srgbClr val="FFFFFF"/>
+                </a:solidFill>
+                <a:latin typeface="Arial"/>
+              </a:rPr>
+              <a:t/>
+            </a:r>
+          </a:p>
+        </p:txBody>
+      </p:sp>
+      <p:sp>
+        <p:nvSpPr>
+          <p:cNvPr id="3" name="TextBox 2"/>
+          <p:cNvSpPr txBox="1"/>
+          <p:nvPr/>
+        </p:nvSpPr>
+        <p:spPr>
+          <a:xfrm>
+            <a:off x="640080" y="2985516"/>
+            <a:ext cx="10911535" cy="731520"/>
+          </a:xfrm>
+          <a:prstGeom prst="rect">
+            <a:avLst/>
+          </a:prstGeom>
+          <a:noFill/>
+        </p:spPr>
+        <p:txBody>
+          <a:bodyPr wrap="square">
+            <a:spAutoFit/>
+          </a:bodyPr>
+          <a:lstStyle/>
+          <a:p>
+            <a:pPr algn="ctr"/>
+            <a:r>
+              <a:rPr sz="4800" b="1" i="0">
+                <a:solidFill>
+                  <a:srgbClr val="FFFFFF"/>
+                </a:solidFill>
+                <a:latin typeface="Arial"/>
+              </a:rPr>
+              <a:t/>
+            </a:r>
+          </a:p>
+        </p:txBody>
+      </p:sp>
+    </p:spTree>
+  </p:cSld>
+  <p:clrMapOvr>
+    <a:masterClrMapping/>
+  </p:clrMapOvr>
+</p:sld>
+</file>
+
+<file path=ppt/slides/slide43.xml><?xml version="1.0" encoding="utf-8"?>
+<p:sld xmlns:a="http://schemas.openxmlformats.org/drawingml/2006/main" xmlns:p="http://schemas.openxmlformats.org/presentationml/2006/main" xmlns:r="http://schemas.openxmlformats.org/officeDocument/2006/relationships">
+  <p:cSld>
+    <p:bg>
+      <p:bgPr>
+        <a:solidFill>
+          <a:srgbClr val="000000"/>
+        </a:solidFill>
+        <a:effectLst/>
+      </p:bgPr>
+    </p:bg>
+    <p:spTree>
+      <p:nvGrpSpPr>
+        <p:cNvPr id="1" name=""/>
+        <p:cNvGrpSpPr/>
+        <p:nvPr/>
+      </p:nvGrpSpPr>
+      <p:grpSpPr/>
+      <p:sp>
+        <p:nvSpPr>
+          <p:cNvPr id="2" name="TextBox 1"/>
+          <p:cNvSpPr txBox="1"/>
+          <p:nvPr/>
+        </p:nvSpPr>
+        <p:spPr>
+          <a:xfrm>
+            <a:off x="640080" y="2052828"/>
+            <a:ext cx="10911535" cy="731520"/>
+          </a:xfrm>
+          <a:prstGeom prst="rect">
+            <a:avLst/>
+          </a:prstGeom>
+          <a:noFill/>
+        </p:spPr>
+        <p:txBody>
+          <a:bodyPr wrap="square">
+            <a:spAutoFit/>
+          </a:bodyPr>
+          <a:lstStyle/>
+          <a:p>
+            <a:pPr algn="ctr"/>
+            <a:r>
+              <a:rPr sz="4800" b="1" i="0">
+                <a:solidFill>
+                  <a:srgbClr val="FFFFFF"/>
+                </a:solidFill>
+                <a:latin typeface="Arial"/>
+              </a:rPr>
+              <a:t/>
+            </a:r>
+          </a:p>
+        </p:txBody>
+      </p:sp>
+      <p:sp>
+        <p:nvSpPr>
+          <p:cNvPr id="3" name="TextBox 2"/>
+          <p:cNvSpPr txBox="1"/>
+          <p:nvPr/>
+        </p:nvSpPr>
+        <p:spPr>
+          <a:xfrm>
+            <a:off x="640080" y="2985516"/>
+            <a:ext cx="10911535" cy="731520"/>
+          </a:xfrm>
+          <a:prstGeom prst="rect">
+            <a:avLst/>
+          </a:prstGeom>
+          <a:noFill/>
+        </p:spPr>
+        <p:txBody>
+          <a:bodyPr wrap="square">
+            <a:spAutoFit/>
+          </a:bodyPr>
+          <a:lstStyle/>
+          <a:p>
+            <a:pPr algn="ctr"/>
+            <a:r>
+              <a:rPr sz="4800" b="1" i="0">
+                <a:solidFill>
+                  <a:srgbClr val="FFFFFF"/>
+                </a:solidFill>
+                <a:latin typeface="Arial"/>
+              </a:rPr>
+              <a:t/>
+            </a:r>
+          </a:p>
+        </p:txBody>
+      </p:sp>
+    </p:spTree>
+  </p:cSld>
+  <p:clrMapOvr>
+    <a:masterClrMapping/>
+  </p:clrMapOvr>
+</p:sld>
+</file>
+
+<file path=ppt/slides/slide44.xml><?xml version="1.0" encoding="utf-8"?>
+<p:sld xmlns:a="http://schemas.openxmlformats.org/drawingml/2006/main" xmlns:p="http://schemas.openxmlformats.org/presentationml/2006/main" xmlns:r="http://schemas.openxmlformats.org/officeDocument/2006/relationships">
+  <p:cSld>
+    <p:bg>
+      <p:bgPr>
+        <a:solidFill>
+          <a:srgbClr val="000000"/>
+        </a:solidFill>
+        <a:effectLst/>
+      </p:bgPr>
+    </p:bg>
+    <p:spTree>
+      <p:nvGrpSpPr>
+        <p:cNvPr id="1" name=""/>
+        <p:cNvGrpSpPr/>
+        <p:nvPr/>
+      </p:nvGrpSpPr>
+      <p:grpSpPr/>
+      <p:sp>
+        <p:nvSpPr>
+          <p:cNvPr id="2" name="TextBox 1"/>
+          <p:cNvSpPr txBox="1"/>
+          <p:nvPr/>
+        </p:nvSpPr>
+        <p:spPr>
+          <a:xfrm>
+            <a:off x="640080" y="2702052"/>
+            <a:ext cx="10911535" cy="731520"/>
+          </a:xfrm>
+          <a:prstGeom prst="rect">
+            <a:avLst/>
+          </a:prstGeom>
+          <a:noFill/>
+        </p:spPr>
+        <p:txBody>
+          <a:bodyPr wrap="square">
+            <a:spAutoFit/>
+          </a:bodyPr>
+          <a:lstStyle/>
+          <a:p>
+            <a:pPr algn="ctr"/>
+            <a:r>
+              <a:rPr sz="4800" b="1" i="0">
+                <a:solidFill>
+                  <a:srgbClr val="FFFFFF"/>
                 </a:solidFill>
                 <a:latin typeface="Arial"/>
               </a:rPr>
@@ -6044,29 +6961,29 @@
         </p:nvSpPr>
         <p:spPr>
           <a:xfrm>
-            <a:off x="594360" y="2258568"/>
-            <a:ext cx="11002975" cy="685800"/>
-          </a:xfrm>
-          <a:prstGeom prst="rect">
-            <a:avLst/>
-          </a:prstGeom>
-          <a:noFill/>
-        </p:spPr>
-        <p:txBody>
-          <a:bodyPr wrap="square">
-            <a:spAutoFit/>
-          </a:bodyPr>
-          <a:lstStyle/>
-          <a:p>
-            <a:pPr algn="ctr"/>
-            <a:r>
-              <a:rPr sz="4400" b="1" i="0">
+            <a:off x="640080" y="2500884"/>
+            <a:ext cx="10911535" cy="731520"/>
+          </a:xfrm>
+          <a:prstGeom prst="rect">
+            <a:avLst/>
+          </a:prstGeom>
+          <a:noFill/>
+        </p:spPr>
+        <p:txBody>
+          <a:bodyPr wrap="square">
+            <a:spAutoFit/>
+          </a:bodyPr>
+          <a:lstStyle/>
+          <a:p>
+            <a:pPr algn="ctr"/>
+            <a:r>
+              <a:rPr sz="4800" b="1" i="0">
                 <a:solidFill>
                   <a:srgbClr val="FFFFFF"/>
                 </a:solidFill>
                 <a:latin typeface="Arial"/>
               </a:rPr>
-              <a:t>Por águas tranquilas me guiará</a:t>
+              <a:t>主は我が羊飼い</a:t>
             </a:r>
           </a:p>
         </p:txBody>
@@ -6079,29 +6996,29 @@
         </p:nvSpPr>
         <p:spPr>
           <a:xfrm>
-            <a:off x="594360" y="2980944"/>
-            <a:ext cx="11002975" cy="347472"/>
-          </a:xfrm>
-          <a:prstGeom prst="rect">
-            <a:avLst/>
-          </a:prstGeom>
-          <a:noFill/>
-        </p:spPr>
-        <p:txBody>
-          <a:bodyPr wrap="square">
-            <a:spAutoFit/>
-          </a:bodyPr>
-          <a:lstStyle/>
-          <a:p>
-            <a:pPr algn="ctr"/>
-            <a:r>
-              <a:rPr sz="2200" b="0" i="1">
-                <a:solidFill>
-                  <a:srgbClr val="8C8C8C"/>
-                </a:solidFill>
-                <a:latin typeface="Arial"/>
-              </a:rPr>
-              <a:t/>
+            <a:off x="640080" y="3268980"/>
+            <a:ext cx="10911535" cy="365760"/>
+          </a:xfrm>
+          <a:prstGeom prst="rect">
+            <a:avLst/>
+          </a:prstGeom>
+          <a:noFill/>
+        </p:spPr>
+        <p:txBody>
+          <a:bodyPr wrap="square">
+            <a:spAutoFit/>
+          </a:bodyPr>
+          <a:lstStyle/>
+          <a:p>
+            <a:pPr algn="ctr"/>
+            <a:r>
+              <a:rPr sz="2400" b="0" i="1">
+                <a:solidFill>
+                  <a:srgbClr val="AAAAAA"/>
+                </a:solidFill>
+                <a:latin typeface="Arial"/>
+              </a:rPr>
+              <a:t>shu ha waga hitsujikai</a:t>
             </a:r>
           </a:p>
         </p:txBody>
@@ -6114,64 +7031,29 @@
         </p:nvSpPr>
         <p:spPr>
           <a:xfrm>
-            <a:off x="594360" y="3529584"/>
-            <a:ext cx="11002975" cy="685800"/>
-          </a:xfrm>
-          <a:prstGeom prst="rect">
-            <a:avLst/>
-          </a:prstGeom>
-          <a:noFill/>
-        </p:spPr>
-        <p:txBody>
-          <a:bodyPr wrap="square">
-            <a:spAutoFit/>
-          </a:bodyPr>
-          <a:lstStyle/>
-          <a:p>
-            <a:pPr algn="ctr"/>
-            <a:r>
-              <a:rPr sz="4400" b="1" i="0">
-                <a:solidFill>
-                  <a:srgbClr val="FFFFFF"/>
-                </a:solidFill>
-                <a:latin typeface="Arial"/>
-              </a:rPr>
-              <a:t>Restaurada é minha alma</a:t>
-            </a:r>
-          </a:p>
-        </p:txBody>
-      </p:sp>
-      <p:sp>
-        <p:nvSpPr>
-          <p:cNvPr id="5" name="TextBox 4"/>
-          <p:cNvSpPr txBox="1"/>
-          <p:nvPr/>
-        </p:nvSpPr>
-        <p:spPr>
-          <a:xfrm>
-            <a:off x="594360" y="4251960"/>
-            <a:ext cx="11002975" cy="347472"/>
-          </a:xfrm>
-          <a:prstGeom prst="rect">
-            <a:avLst/>
-          </a:prstGeom>
-          <a:noFill/>
-        </p:spPr>
-        <p:txBody>
-          <a:bodyPr wrap="square">
-            <a:spAutoFit/>
-          </a:bodyPr>
-          <a:lstStyle/>
-          <a:p>
-            <a:pPr algn="ctr"/>
-            <a:r>
-              <a:rPr sz="2200" b="0" i="1">
-                <a:solidFill>
-                  <a:srgbClr val="8C8C8C"/>
-                </a:solidFill>
-                <a:latin typeface="Arial"/>
-              </a:rPr>
-              <a:t/>
+            <a:off x="640080" y="4046220"/>
+            <a:ext cx="10911535" cy="310896"/>
+          </a:xfrm>
+          <a:prstGeom prst="rect">
+            <a:avLst/>
+          </a:prstGeom>
+          <a:noFill/>
+        </p:spPr>
+        <p:txBody>
+          <a:bodyPr wrap="square">
+            <a:spAutoFit/>
+          </a:bodyPr>
+          <a:lstStyle/>
+          <a:p>
+            <a:pPr algn="ctr"/>
+            <a:r>
+              <a:rPr sz="2000" b="0" i="1">
+                <a:solidFill>
+                  <a:srgbClr val="828282"/>
+                </a:solidFill>
+                <a:latin typeface="Arial"/>
+              </a:rPr>
+              <a:t>O Senhor é meu pastor e nada me faltará</a:t>
             </a:r>
           </a:p>
         </p:txBody>
@@ -6210,134 +7092,29 @@
         </p:nvSpPr>
         <p:spPr>
           <a:xfrm>
-            <a:off x="594360" y="2258568"/>
-            <a:ext cx="11002975" cy="685800"/>
-          </a:xfrm>
-          <a:prstGeom prst="rect">
-            <a:avLst/>
-          </a:prstGeom>
-          <a:noFill/>
-        </p:spPr>
-        <p:txBody>
-          <a:bodyPr wrap="square">
-            <a:spAutoFit/>
-          </a:bodyPr>
-          <a:lstStyle/>
-          <a:p>
-            <a:pPr algn="ctr"/>
-            <a:r>
-              <a:rPr sz="4400" b="1" i="0">
+            <a:off x="640080" y="2702052"/>
+            <a:ext cx="10911535" cy="731520"/>
+          </a:xfrm>
+          <a:prstGeom prst="rect">
+            <a:avLst/>
+          </a:prstGeom>
+          <a:noFill/>
+        </p:spPr>
+        <p:txBody>
+          <a:bodyPr wrap="square">
+            <a:spAutoFit/>
+          </a:bodyPr>
+          <a:lstStyle/>
+          <a:p>
+            <a:pPr algn="ctr"/>
+            <a:r>
+              <a:rPr sz="4800" b="1" i="0">
                 <a:solidFill>
                   <a:srgbClr val="FFFFFF"/>
                 </a:solidFill>
                 <a:latin typeface="Arial"/>
               </a:rPr>
-              <a:t>Caminhando na vereda da justiça</a:t>
-            </a:r>
-          </a:p>
-        </p:txBody>
-      </p:sp>
-      <p:sp>
-        <p:nvSpPr>
-          <p:cNvPr id="3" name="TextBox 2"/>
-          <p:cNvSpPr txBox="1"/>
-          <p:nvPr/>
-        </p:nvSpPr>
-        <p:spPr>
-          <a:xfrm>
-            <a:off x="594360" y="2980944"/>
-            <a:ext cx="11002975" cy="347472"/>
-          </a:xfrm>
-          <a:prstGeom prst="rect">
-            <a:avLst/>
-          </a:prstGeom>
-          <a:noFill/>
-        </p:spPr>
-        <p:txBody>
-          <a:bodyPr wrap="square">
-            <a:spAutoFit/>
-          </a:bodyPr>
-          <a:lstStyle/>
-          <a:p>
-            <a:pPr algn="ctr"/>
-            <a:r>
-              <a:rPr sz="2200" b="0" i="1">
-                <a:solidFill>
-                  <a:srgbClr val="8C8C8C"/>
-                </a:solidFill>
-                <a:latin typeface="Arial"/>
-              </a:rPr>
-              <a:t/>
-            </a:r>
-          </a:p>
-        </p:txBody>
-      </p:sp>
-      <p:sp>
-        <p:nvSpPr>
-          <p:cNvPr id="4" name="TextBox 3"/>
-          <p:cNvSpPr txBox="1"/>
-          <p:nvPr/>
-        </p:nvSpPr>
-        <p:spPr>
-          <a:xfrm>
-            <a:off x="594360" y="3529584"/>
-            <a:ext cx="11002975" cy="685800"/>
-          </a:xfrm>
-          <a:prstGeom prst="rect">
-            <a:avLst/>
-          </a:prstGeom>
-          <a:noFill/>
-        </p:spPr>
-        <p:txBody>
-          <a:bodyPr wrap="square">
-            <a:spAutoFit/>
-          </a:bodyPr>
-          <a:lstStyle/>
-          <a:p>
-            <a:pPr algn="ctr"/>
-            <a:r>
-              <a:rPr sz="4400" b="1" i="0">
-                <a:solidFill>
-                  <a:srgbClr val="FFFFFF"/>
-                </a:solidFill>
-                <a:latin typeface="Arial"/>
-              </a:rPr>
-              <a:t>Por amor do Seu nome</a:t>
-            </a:r>
-          </a:p>
-        </p:txBody>
-      </p:sp>
-      <p:sp>
-        <p:nvSpPr>
-          <p:cNvPr id="5" name="TextBox 4"/>
-          <p:cNvSpPr txBox="1"/>
-          <p:nvPr/>
-        </p:nvSpPr>
-        <p:spPr>
-          <a:xfrm>
-            <a:off x="594360" y="4251960"/>
-            <a:ext cx="11002975" cy="347472"/>
-          </a:xfrm>
-          <a:prstGeom prst="rect">
-            <a:avLst/>
-          </a:prstGeom>
-          <a:noFill/>
-        </p:spPr>
-        <p:txBody>
-          <a:bodyPr wrap="square">
-            <a:spAutoFit/>
-          </a:bodyPr>
-          <a:lstStyle/>
-          <a:p>
-            <a:pPr algn="ctr"/>
-            <a:r>
-              <a:rPr sz="2200" b="0" i="1">
-                <a:solidFill>
-                  <a:srgbClr val="8C8C8C"/>
-                </a:solidFill>
-                <a:latin typeface="Arial"/>
-              </a:rPr>
-              <a:t/>
+              <a:t>Por águas tranquilas me guiará</a:t>
             </a:r>
           </a:p>
         </p:txBody>
@@ -6376,29 +7153,29 @@
         </p:nvSpPr>
         <p:spPr>
           <a:xfrm>
-            <a:off x="594360" y="2258568"/>
-            <a:ext cx="11002975" cy="685800"/>
-          </a:xfrm>
-          <a:prstGeom prst="rect">
-            <a:avLst/>
-          </a:prstGeom>
-          <a:noFill/>
-        </p:spPr>
-        <p:txBody>
-          <a:bodyPr wrap="square">
-            <a:spAutoFit/>
-          </a:bodyPr>
-          <a:lstStyle/>
-          <a:p>
-            <a:pPr algn="ctr"/>
-            <a:r>
-              <a:rPr sz="3805" b="1" i="0">
+            <a:off x="640080" y="2500884"/>
+            <a:ext cx="10911535" cy="731520"/>
+          </a:xfrm>
+          <a:prstGeom prst="rect">
+            <a:avLst/>
+          </a:prstGeom>
+          <a:noFill/>
+        </p:spPr>
+        <p:txBody>
+          <a:bodyPr wrap="square">
+            <a:spAutoFit/>
+          </a:bodyPr>
+          <a:lstStyle/>
+          <a:p>
+            <a:pPr algn="ctr"/>
+            <a:r>
+              <a:rPr sz="4800" b="1" i="0">
                 <a:solidFill>
                   <a:srgbClr val="FFFFFF"/>
                 </a:solidFill>
                 <a:latin typeface="Arial"/>
               </a:rPr>
-              <a:t>Ainda que eu ande pelo vale da sombra</a:t>
+              <a:t>緑の牧場に</a:t>
             </a:r>
           </a:p>
         </p:txBody>
@@ -6411,29 +7188,29 @@
         </p:nvSpPr>
         <p:spPr>
           <a:xfrm>
-            <a:off x="594360" y="2980944"/>
-            <a:ext cx="11002975" cy="347472"/>
-          </a:xfrm>
-          <a:prstGeom prst="rect">
-            <a:avLst/>
-          </a:prstGeom>
-          <a:noFill/>
-        </p:spPr>
-        <p:txBody>
-          <a:bodyPr wrap="square">
-            <a:spAutoFit/>
-          </a:bodyPr>
-          <a:lstStyle/>
-          <a:p>
-            <a:pPr algn="ctr"/>
-            <a:r>
-              <a:rPr sz="2200" b="0" i="1">
-                <a:solidFill>
-                  <a:srgbClr val="8C8C8C"/>
-                </a:solidFill>
-                <a:latin typeface="Arial"/>
-              </a:rPr>
-              <a:t/>
+            <a:off x="640080" y="3268980"/>
+            <a:ext cx="10911535" cy="365760"/>
+          </a:xfrm>
+          <a:prstGeom prst="rect">
+            <a:avLst/>
+          </a:prstGeom>
+          <a:noFill/>
+        </p:spPr>
+        <p:txBody>
+          <a:bodyPr wrap="square">
+            <a:spAutoFit/>
+          </a:bodyPr>
+          <a:lstStyle/>
+          <a:p>
+            <a:pPr algn="ctr"/>
+            <a:r>
+              <a:rPr sz="2400" b="0" i="1">
+                <a:solidFill>
+                  <a:srgbClr val="AAAAAA"/>
+                </a:solidFill>
+                <a:latin typeface="Arial"/>
+              </a:rPr>
+              <a:t>midori no bokujou ni</a:t>
             </a:r>
           </a:p>
         </p:txBody>
@@ -6446,64 +7223,29 @@
         </p:nvSpPr>
         <p:spPr>
           <a:xfrm>
-            <a:off x="594360" y="3529584"/>
-            <a:ext cx="11002975" cy="685800"/>
-          </a:xfrm>
-          <a:prstGeom prst="rect">
-            <a:avLst/>
-          </a:prstGeom>
-          <a:noFill/>
-        </p:spPr>
-        <p:txBody>
-          <a:bodyPr wrap="square">
-            <a:spAutoFit/>
-          </a:bodyPr>
-          <a:lstStyle/>
-          <a:p>
-            <a:pPr algn="ctr"/>
-            <a:r>
-              <a:rPr sz="4400" b="1" i="0">
-                <a:solidFill>
-                  <a:srgbClr val="FFFFFF"/>
-                </a:solidFill>
-                <a:latin typeface="Arial"/>
-              </a:rPr>
-              <a:t>Pois Tu estás comigo</a:t>
-            </a:r>
-          </a:p>
-        </p:txBody>
-      </p:sp>
-      <p:sp>
-        <p:nvSpPr>
-          <p:cNvPr id="5" name="TextBox 4"/>
-          <p:cNvSpPr txBox="1"/>
-          <p:nvPr/>
-        </p:nvSpPr>
-        <p:spPr>
-          <a:xfrm>
-            <a:off x="594360" y="4251960"/>
-            <a:ext cx="11002975" cy="347472"/>
-          </a:xfrm>
-          <a:prstGeom prst="rect">
-            <a:avLst/>
-          </a:prstGeom>
-          <a:noFill/>
-        </p:spPr>
-        <p:txBody>
-          <a:bodyPr wrap="square">
-            <a:spAutoFit/>
-          </a:bodyPr>
-          <a:lstStyle/>
-          <a:p>
-            <a:pPr algn="ctr"/>
-            <a:r>
-              <a:rPr sz="2200" b="0" i="1">
-                <a:solidFill>
-                  <a:srgbClr val="8C8C8C"/>
-                </a:solidFill>
-                <a:latin typeface="Arial"/>
-              </a:rPr>
-              <a:t/>
+            <a:off x="640080" y="4046220"/>
+            <a:ext cx="10911535" cy="310896"/>
+          </a:xfrm>
+          <a:prstGeom prst="rect">
+            <a:avLst/>
+          </a:prstGeom>
+          <a:noFill/>
+        </p:spPr>
+        <p:txBody>
+          <a:bodyPr wrap="square">
+            <a:spAutoFit/>
+          </a:bodyPr>
+          <a:lstStyle/>
+          <a:p>
+            <a:pPr algn="ctr"/>
+            <a:r>
+              <a:rPr sz="2000" b="0" i="1">
+                <a:solidFill>
+                  <a:srgbClr val="828282"/>
+                </a:solidFill>
+                <a:latin typeface="Arial"/>
+              </a:rPr>
+              <a:t>O Senhor é meu pastor e nada me faltará</a:t>
             </a:r>
           </a:p>
         </p:txBody>
@@ -6542,134 +7284,29 @@
         </p:nvSpPr>
         <p:spPr>
           <a:xfrm>
-            <a:off x="594360" y="2258568"/>
-            <a:ext cx="11002975" cy="685800"/>
-          </a:xfrm>
-          <a:prstGeom prst="rect">
-            <a:avLst/>
-          </a:prstGeom>
-          <a:noFill/>
-        </p:spPr>
-        <p:txBody>
-          <a:bodyPr wrap="square">
-            <a:spAutoFit/>
-          </a:bodyPr>
-          <a:lstStyle/>
-          <a:p>
-            <a:pPr algn="ctr"/>
-            <a:r>
-              <a:rPr sz="4022" b="1" i="0">
+            <a:off x="640080" y="2702052"/>
+            <a:ext cx="10911535" cy="731520"/>
+          </a:xfrm>
+          <a:prstGeom prst="rect">
+            <a:avLst/>
+          </a:prstGeom>
+          <a:noFill/>
+        </p:spPr>
+        <p:txBody>
+          <a:bodyPr wrap="square">
+            <a:spAutoFit/>
+          </a:bodyPr>
+          <a:lstStyle/>
+          <a:p>
+            <a:pPr algn="ctr"/>
+            <a:r>
+              <a:rPr sz="4800" b="1" i="0">
                 <a:solidFill>
                   <a:srgbClr val="FFFFFF"/>
                 </a:solidFill>
                 <a:latin typeface="Arial"/>
               </a:rPr>
-              <a:t>Teu cajado e teu bordão me consolam</a:t>
-            </a:r>
-          </a:p>
-        </p:txBody>
-      </p:sp>
-      <p:sp>
-        <p:nvSpPr>
-          <p:cNvPr id="3" name="TextBox 2"/>
-          <p:cNvSpPr txBox="1"/>
-          <p:nvPr/>
-        </p:nvSpPr>
-        <p:spPr>
-          <a:xfrm>
-            <a:off x="594360" y="2980944"/>
-            <a:ext cx="11002975" cy="347472"/>
-          </a:xfrm>
-          <a:prstGeom prst="rect">
-            <a:avLst/>
-          </a:prstGeom>
-          <a:noFill/>
-        </p:spPr>
-        <p:txBody>
-          <a:bodyPr wrap="square">
-            <a:spAutoFit/>
-          </a:bodyPr>
-          <a:lstStyle/>
-          <a:p>
-            <a:pPr algn="ctr"/>
-            <a:r>
-              <a:rPr sz="2200" b="0" i="1">
-                <a:solidFill>
-                  <a:srgbClr val="8C8C8C"/>
-                </a:solidFill>
-                <a:latin typeface="Arial"/>
-              </a:rPr>
-              <a:t/>
-            </a:r>
-          </a:p>
-        </p:txBody>
-      </p:sp>
-      <p:sp>
-        <p:nvSpPr>
-          <p:cNvPr id="4" name="TextBox 3"/>
-          <p:cNvSpPr txBox="1"/>
-          <p:nvPr/>
-        </p:nvSpPr>
-        <p:spPr>
-          <a:xfrm>
-            <a:off x="594360" y="3529584"/>
-            <a:ext cx="11002975" cy="685800"/>
-          </a:xfrm>
-          <a:prstGeom prst="rect">
-            <a:avLst/>
-          </a:prstGeom>
-          <a:noFill/>
-        </p:spPr>
-        <p:txBody>
-          <a:bodyPr wrap="square">
-            <a:spAutoFit/>
-          </a:bodyPr>
-          <a:lstStyle/>
-          <a:p>
-            <a:pPr algn="ctr"/>
-            <a:r>
-              <a:rPr sz="3610" b="1" i="0">
-                <a:solidFill>
-                  <a:srgbClr val="FFFFFF"/>
-                </a:solidFill>
-                <a:latin typeface="Arial"/>
-              </a:rPr>
-              <a:t>O Senhor é meu pastor e nada me faltará</a:t>
-            </a:r>
-          </a:p>
-        </p:txBody>
-      </p:sp>
-      <p:sp>
-        <p:nvSpPr>
-          <p:cNvPr id="5" name="TextBox 4"/>
-          <p:cNvSpPr txBox="1"/>
-          <p:nvPr/>
-        </p:nvSpPr>
-        <p:spPr>
-          <a:xfrm>
-            <a:off x="594360" y="4251960"/>
-            <a:ext cx="11002975" cy="347472"/>
-          </a:xfrm>
-          <a:prstGeom prst="rect">
-            <a:avLst/>
-          </a:prstGeom>
-          <a:noFill/>
-        </p:spPr>
-        <p:txBody>
-          <a:bodyPr wrap="square">
-            <a:spAutoFit/>
-          </a:bodyPr>
-          <a:lstStyle/>
-          <a:p>
-            <a:pPr algn="ctr"/>
-            <a:r>
-              <a:rPr sz="2200" b="0" i="1">
-                <a:solidFill>
-                  <a:srgbClr val="8C8C8C"/>
-                </a:solidFill>
-                <a:latin typeface="Arial"/>
-              </a:rPr>
-              <a:t/>
+              <a:t>Restaurada é minha alma</a:t>
             </a:r>
           </a:p>
         </p:txBody>
@@ -6708,29 +7345,29 @@
         </p:nvSpPr>
         <p:spPr>
           <a:xfrm>
-            <a:off x="594360" y="2258568"/>
-            <a:ext cx="11002975" cy="685800"/>
-          </a:xfrm>
-          <a:prstGeom prst="rect">
-            <a:avLst/>
-          </a:prstGeom>
-          <a:noFill/>
-        </p:spPr>
-        <p:txBody>
-          <a:bodyPr wrap="square">
-            <a:spAutoFit/>
-          </a:bodyPr>
-          <a:lstStyle/>
-          <a:p>
-            <a:pPr algn="ctr"/>
-            <a:r>
-              <a:rPr sz="4400" b="1" i="0">
+            <a:off x="640080" y="2500884"/>
+            <a:ext cx="10911535" cy="731520"/>
+          </a:xfrm>
+          <a:prstGeom prst="rect">
+            <a:avLst/>
+          </a:prstGeom>
+          <a:noFill/>
+        </p:spPr>
+        <p:txBody>
+          <a:bodyPr wrap="square">
+            <a:spAutoFit/>
+          </a:bodyPr>
+          <a:lstStyle/>
+          <a:p>
+            <a:pPr algn="ctr"/>
+            <a:r>
+              <a:rPr sz="4800" b="1" i="0">
                 <a:solidFill>
                   <a:srgbClr val="FFFFFF"/>
                 </a:solidFill>
                 <a:latin typeface="Arial"/>
               </a:rPr>
-              <a:t>Faz-me deitar em verdes pastos</a:t>
+              <a:t>いこいのみぎわに　主は</a:t>
             </a:r>
           </a:p>
         </p:txBody>
@@ -6743,29 +7380,29 @@
         </p:nvSpPr>
         <p:spPr>
           <a:xfrm>
-            <a:off x="594360" y="2980944"/>
-            <a:ext cx="11002975" cy="347472"/>
-          </a:xfrm>
-          <a:prstGeom prst="rect">
-            <a:avLst/>
-          </a:prstGeom>
-          <a:noFill/>
-        </p:spPr>
-        <p:txBody>
-          <a:bodyPr wrap="square">
-            <a:spAutoFit/>
-          </a:bodyPr>
-          <a:lstStyle/>
-          <a:p>
-            <a:pPr algn="ctr"/>
-            <a:r>
-              <a:rPr sz="2200" b="0" i="1">
-                <a:solidFill>
-                  <a:srgbClr val="8C8C8C"/>
-                </a:solidFill>
-                <a:latin typeface="Arial"/>
-              </a:rPr>
-              <a:t/>
+            <a:off x="640080" y="3268980"/>
+            <a:ext cx="10911535" cy="365760"/>
+          </a:xfrm>
+          <a:prstGeom prst="rect">
+            <a:avLst/>
+          </a:prstGeom>
+          <a:noFill/>
+        </p:spPr>
+        <p:txBody>
+          <a:bodyPr wrap="square">
+            <a:spAutoFit/>
+          </a:bodyPr>
+          <a:lstStyle/>
+          <a:p>
+            <a:pPr algn="ctr"/>
+            <a:r>
+              <a:rPr sz="2400" b="0" i="1">
+                <a:solidFill>
+                  <a:srgbClr val="AAAAAA"/>
+                </a:solidFill>
+                <a:latin typeface="Arial"/>
+              </a:rPr>
+              <a:t>ikoinomigiwani shu ha</a:t>
             </a:r>
           </a:p>
         </p:txBody>
@@ -6778,64 +7415,29 @@
         </p:nvSpPr>
         <p:spPr>
           <a:xfrm>
-            <a:off x="594360" y="3529584"/>
-            <a:ext cx="11002975" cy="685800"/>
-          </a:xfrm>
-          <a:prstGeom prst="rect">
-            <a:avLst/>
-          </a:prstGeom>
-          <a:noFill/>
-        </p:spPr>
-        <p:txBody>
-          <a:bodyPr wrap="square">
-            <a:spAutoFit/>
-          </a:bodyPr>
-          <a:lstStyle/>
-          <a:p>
-            <a:pPr algn="ctr"/>
-            <a:r>
-              <a:rPr sz="4400" b="1" i="0">
-                <a:solidFill>
-                  <a:srgbClr val="FFFFFF"/>
-                </a:solidFill>
-                <a:latin typeface="Arial"/>
-              </a:rPr>
-              <a:t>Por amor do Seu nome</a:t>
-            </a:r>
-          </a:p>
-        </p:txBody>
-      </p:sp>
-      <p:sp>
-        <p:nvSpPr>
-          <p:cNvPr id="5" name="TextBox 4"/>
-          <p:cNvSpPr txBox="1"/>
-          <p:nvPr/>
-        </p:nvSpPr>
-        <p:spPr>
-          <a:xfrm>
-            <a:off x="594360" y="4251960"/>
-            <a:ext cx="11002975" cy="347472"/>
-          </a:xfrm>
-          <a:prstGeom prst="rect">
-            <a:avLst/>
-          </a:prstGeom>
-          <a:noFill/>
-        </p:spPr>
-        <p:txBody>
-          <a:bodyPr wrap="square">
-            <a:spAutoFit/>
-          </a:bodyPr>
-          <a:lstStyle/>
-          <a:p>
-            <a:pPr algn="ctr"/>
-            <a:r>
-              <a:rPr sz="2200" b="0" i="1">
-                <a:solidFill>
-                  <a:srgbClr val="8C8C8C"/>
-                </a:solidFill>
-                <a:latin typeface="Arial"/>
-              </a:rPr>
-              <a:t/>
+            <a:off x="640080" y="4046220"/>
+            <a:ext cx="10911535" cy="310896"/>
+          </a:xfrm>
+          <a:prstGeom prst="rect">
+            <a:avLst/>
+          </a:prstGeom>
+          <a:noFill/>
+        </p:spPr>
+        <p:txBody>
+          <a:bodyPr wrap="square">
+            <a:spAutoFit/>
+          </a:bodyPr>
+          <a:lstStyle/>
+          <a:p>
+            <a:pPr algn="ctr"/>
+            <a:r>
+              <a:rPr sz="2000" b="0" i="1">
+                <a:solidFill>
+                  <a:srgbClr val="828282"/>
+                </a:solidFill>
+                <a:latin typeface="Arial"/>
+              </a:rPr>
+              <a:t>O Senhor é meu pastor e nada me faltará</a:t>
             </a:r>
           </a:p>
         </p:txBody>

--- a/output_pptx/Psalm_23.pptx
+++ b/output_pptx/Psalm_23.pptx
@@ -3209,6 +3209,76 @@
           </a:p>
         </p:txBody>
       </p:sp>
+      <p:sp>
+        <p:nvSpPr>
+          <p:cNvPr id="4" name="TextBox 3"/>
+          <p:cNvSpPr txBox="1"/>
+          <p:nvPr/>
+        </p:nvSpPr>
+        <p:spPr>
+          <a:xfrm>
+            <a:off x="640080" y="4128516"/>
+            <a:ext cx="10911535" cy="310896"/>
+          </a:xfrm>
+          <a:prstGeom prst="rect">
+            <a:avLst/>
+          </a:prstGeom>
+          <a:noFill/>
+        </p:spPr>
+        <p:txBody>
+          <a:bodyPr wrap="square">
+            <a:spAutoFit/>
+          </a:bodyPr>
+          <a:lstStyle/>
+          <a:p>
+            <a:pPr algn="ctr"/>
+            <a:r>
+              <a:rPr sz="2000" b="0" i="0">
+                <a:solidFill>
+                  <a:srgbClr val="828282"/>
+                </a:solidFill>
+                <a:latin typeface="Arial"/>
+              </a:rPr>
+              <a:t>主は私の羊飼いであり、私は何も欠けることがない</a:t>
+            </a:r>
+          </a:p>
+        </p:txBody>
+      </p:sp>
+      <p:sp>
+        <p:nvSpPr>
+          <p:cNvPr id="5" name="TextBox 4"/>
+          <p:cNvSpPr txBox="1"/>
+          <p:nvPr/>
+        </p:nvSpPr>
+        <p:spPr>
+          <a:xfrm>
+            <a:off x="640080" y="4494276"/>
+            <a:ext cx="10911535" cy="310896"/>
+          </a:xfrm>
+          <a:prstGeom prst="rect">
+            <a:avLst/>
+          </a:prstGeom>
+          <a:noFill/>
+        </p:spPr>
+        <p:txBody>
+          <a:bodyPr wrap="square">
+            <a:spAutoFit/>
+          </a:bodyPr>
+          <a:lstStyle/>
+          <a:p>
+            <a:pPr algn="ctr"/>
+            <a:r>
+              <a:rPr sz="2000" b="0" i="0">
+                <a:solidFill>
+                  <a:srgbClr val="828282"/>
+                </a:solidFill>
+                <a:latin typeface="Arial"/>
+              </a:rPr>
+              <a:t>緑の牧場に私を休ませてくださる</a:t>
+            </a:r>
+          </a:p>
+        </p:txBody>
+      </p:sp>
     </p:spTree>
   </p:cSld>
   <p:clrMapOvr>
@@ -3270,6 +3340,41 @@
           </a:p>
         </p:txBody>
       </p:sp>
+      <p:sp>
+        <p:nvSpPr>
+          <p:cNvPr id="3" name="TextBox 2"/>
+          <p:cNvSpPr txBox="1"/>
+          <p:nvPr/>
+        </p:nvSpPr>
+        <p:spPr>
+          <a:xfrm>
+            <a:off x="640080" y="3845052"/>
+            <a:ext cx="10911535" cy="310896"/>
+          </a:xfrm>
+          <a:prstGeom prst="rect">
+            <a:avLst/>
+          </a:prstGeom>
+          <a:noFill/>
+        </p:spPr>
+        <p:txBody>
+          <a:bodyPr wrap="square">
+            <a:spAutoFit/>
+          </a:bodyPr>
+          <a:lstStyle/>
+          <a:p>
+            <a:pPr algn="ctr"/>
+            <a:r>
+              <a:rPr sz="2000" b="0" i="0">
+                <a:solidFill>
+                  <a:srgbClr val="828282"/>
+                </a:solidFill>
+                <a:latin typeface="Arial"/>
+              </a:rPr>
+              <a:t>正義の道を歩みながら</a:t>
+            </a:r>
+          </a:p>
+        </p:txBody>
+      </p:sp>
     </p:spTree>
   </p:cSld>
   <p:clrMapOvr>
@@ -3497,6 +3602,76 @@
           </a:p>
         </p:txBody>
       </p:sp>
+      <p:sp>
+        <p:nvSpPr>
+          <p:cNvPr id="4" name="TextBox 3"/>
+          <p:cNvSpPr txBox="1"/>
+          <p:nvPr/>
+        </p:nvSpPr>
+        <p:spPr>
+          <a:xfrm>
+            <a:off x="640080" y="4128516"/>
+            <a:ext cx="10911535" cy="310896"/>
+          </a:xfrm>
+          <a:prstGeom prst="rect">
+            <a:avLst/>
+          </a:prstGeom>
+          <a:noFill/>
+        </p:spPr>
+        <p:txBody>
+          <a:bodyPr wrap="square">
+            <a:spAutoFit/>
+          </a:bodyPr>
+          <a:lstStyle/>
+          <a:p>
+            <a:pPr algn="ctr"/>
+            <a:r>
+              <a:rPr sz="2000" b="0" i="0">
+                <a:solidFill>
+                  <a:srgbClr val="828282"/>
+                </a:solidFill>
+                <a:latin typeface="Arial"/>
+              </a:rPr>
+              <a:t>御名のゆえに</a:t>
+            </a:r>
+          </a:p>
+        </p:txBody>
+      </p:sp>
+      <p:sp>
+        <p:nvSpPr>
+          <p:cNvPr id="5" name="TextBox 4"/>
+          <p:cNvSpPr txBox="1"/>
+          <p:nvPr/>
+        </p:nvSpPr>
+        <p:spPr>
+          <a:xfrm>
+            <a:off x="640080" y="4494276"/>
+            <a:ext cx="10911535" cy="310896"/>
+          </a:xfrm>
+          <a:prstGeom prst="rect">
+            <a:avLst/>
+          </a:prstGeom>
+          <a:noFill/>
+        </p:spPr>
+        <p:txBody>
+          <a:bodyPr wrap="square">
+            <a:spAutoFit/>
+          </a:bodyPr>
+          <a:lstStyle/>
+          <a:p>
+            <a:pPr algn="ctr"/>
+            <a:r>
+              <a:rPr sz="2000" b="0" i="0">
+                <a:solidFill>
+                  <a:srgbClr val="828282"/>
+                </a:solidFill>
+                <a:latin typeface="Arial"/>
+              </a:rPr>
+              <a:t>たとえ私が死の影の谷を歩むとしても</a:t>
+            </a:r>
+          </a:p>
+        </p:txBody>
+      </p:sp>
     </p:spTree>
   </p:cSld>
   <p:clrMapOvr>
@@ -3689,6 +3864,41 @@
           </a:p>
         </p:txBody>
       </p:sp>
+      <p:sp>
+        <p:nvSpPr>
+          <p:cNvPr id="3" name="TextBox 2"/>
+          <p:cNvSpPr txBox="1"/>
+          <p:nvPr/>
+        </p:nvSpPr>
+        <p:spPr>
+          <a:xfrm>
+            <a:off x="640080" y="3845052"/>
+            <a:ext cx="10911535" cy="310896"/>
+          </a:xfrm>
+          <a:prstGeom prst="rect">
+            <a:avLst/>
+          </a:prstGeom>
+          <a:noFill/>
+        </p:spPr>
+        <p:txBody>
+          <a:bodyPr wrap="square">
+            <a:spAutoFit/>
+          </a:bodyPr>
+          <a:lstStyle/>
+          <a:p>
+            <a:pPr algn="ctr"/>
+            <a:r>
+              <a:rPr sz="2000" b="0" i="0">
+                <a:solidFill>
+                  <a:srgbClr val="828282"/>
+                </a:solidFill>
+                <a:latin typeface="Arial"/>
+              </a:rPr>
+              <a:t>あなたが私とともにいるから</a:t>
+            </a:r>
+          </a:p>
+        </p:txBody>
+      </p:sp>
     </p:spTree>
   </p:cSld>
   <p:clrMapOvr>
@@ -3881,6 +4091,41 @@
           </a:p>
         </p:txBody>
       </p:sp>
+      <p:sp>
+        <p:nvSpPr>
+          <p:cNvPr id="3" name="TextBox 2"/>
+          <p:cNvSpPr txBox="1"/>
+          <p:nvPr/>
+        </p:nvSpPr>
+        <p:spPr>
+          <a:xfrm>
+            <a:off x="640080" y="3845052"/>
+            <a:ext cx="10911535" cy="310896"/>
+          </a:xfrm>
+          <a:prstGeom prst="rect">
+            <a:avLst/>
+          </a:prstGeom>
+          <a:noFill/>
+        </p:spPr>
+        <p:txBody>
+          <a:bodyPr wrap="square">
+            <a:spAutoFit/>
+          </a:bodyPr>
+          <a:lstStyle/>
+          <a:p>
+            <a:pPr algn="ctr"/>
+            <a:r>
+              <a:rPr sz="2000" b="0" i="0">
+                <a:solidFill>
+                  <a:srgbClr val="828282"/>
+                </a:solidFill>
+                <a:latin typeface="Arial"/>
+              </a:rPr>
+              <a:t>あなたの杖とあなたの笏が私を慰める</a:t>
+            </a:r>
+          </a:p>
+        </p:txBody>
+      </p:sp>
     </p:spTree>
   </p:cSld>
   <p:clrMapOvr>
@@ -4073,6 +4318,41 @@
           </a:p>
         </p:txBody>
       </p:sp>
+      <p:sp>
+        <p:nvSpPr>
+          <p:cNvPr id="3" name="TextBox 2"/>
+          <p:cNvSpPr txBox="1"/>
+          <p:nvPr/>
+        </p:nvSpPr>
+        <p:spPr>
+          <a:xfrm>
+            <a:off x="640080" y="3845052"/>
+            <a:ext cx="10911535" cy="310896"/>
+          </a:xfrm>
+          <a:prstGeom prst="rect">
+            <a:avLst/>
+          </a:prstGeom>
+          <a:noFill/>
+        </p:spPr>
+        <p:txBody>
+          <a:bodyPr wrap="square">
+            <a:spAutoFit/>
+          </a:bodyPr>
+          <a:lstStyle/>
+          <a:p>
+            <a:pPr algn="ctr"/>
+            <a:r>
+              <a:rPr sz="2000" b="0" i="0">
+                <a:solidFill>
+                  <a:srgbClr val="828282"/>
+                </a:solidFill>
+                <a:latin typeface="Arial"/>
+              </a:rPr>
+              <a:t>主は私の羊飼いであり、私は何も欠けることがない</a:t>
+            </a:r>
+          </a:p>
+        </p:txBody>
+      </p:sp>
     </p:spTree>
   </p:cSld>
   <p:clrMapOvr>
@@ -4300,6 +4580,76 @@
           </a:p>
         </p:txBody>
       </p:sp>
+      <p:sp>
+        <p:nvSpPr>
+          <p:cNvPr id="4" name="TextBox 3"/>
+          <p:cNvSpPr txBox="1"/>
+          <p:nvPr/>
+        </p:nvSpPr>
+        <p:spPr>
+          <a:xfrm>
+            <a:off x="640080" y="4128516"/>
+            <a:ext cx="10911535" cy="310896"/>
+          </a:xfrm>
+          <a:prstGeom prst="rect">
+            <a:avLst/>
+          </a:prstGeom>
+          <a:noFill/>
+        </p:spPr>
+        <p:txBody>
+          <a:bodyPr wrap="square">
+            <a:spAutoFit/>
+          </a:bodyPr>
+          <a:lstStyle/>
+          <a:p>
+            <a:pPr algn="ctr"/>
+            <a:r>
+              <a:rPr sz="2000" b="0" i="0">
+                <a:solidFill>
+                  <a:srgbClr val="828282"/>
+                </a:solidFill>
+                <a:latin typeface="Arial"/>
+              </a:rPr>
+              <a:t>静かな水のほとりに私を導いてくださる</a:t>
+            </a:r>
+          </a:p>
+        </p:txBody>
+      </p:sp>
+      <p:sp>
+        <p:nvSpPr>
+          <p:cNvPr id="5" name="TextBox 4"/>
+          <p:cNvSpPr txBox="1"/>
+          <p:nvPr/>
+        </p:nvSpPr>
+        <p:spPr>
+          <a:xfrm>
+            <a:off x="640080" y="4494276"/>
+            <a:ext cx="10911535" cy="310896"/>
+          </a:xfrm>
+          <a:prstGeom prst="rect">
+            <a:avLst/>
+          </a:prstGeom>
+          <a:noFill/>
+        </p:spPr>
+        <p:txBody>
+          <a:bodyPr wrap="square">
+            <a:spAutoFit/>
+          </a:bodyPr>
+          <a:lstStyle/>
+          <a:p>
+            <a:pPr algn="ctr"/>
+            <a:r>
+              <a:rPr sz="2000" b="0" i="0">
+                <a:solidFill>
+                  <a:srgbClr val="828282"/>
+                </a:solidFill>
+                <a:latin typeface="Arial"/>
+              </a:rPr>
+              <a:t>私のたましいは回復される</a:t>
+            </a:r>
+          </a:p>
+        </p:txBody>
+      </p:sp>
     </p:spTree>
   </p:cSld>
   <p:clrMapOvr>
@@ -4396,6 +4746,76 @@
           </a:p>
         </p:txBody>
       </p:sp>
+      <p:sp>
+        <p:nvSpPr>
+          <p:cNvPr id="4" name="TextBox 3"/>
+          <p:cNvSpPr txBox="1"/>
+          <p:nvPr/>
+        </p:nvSpPr>
+        <p:spPr>
+          <a:xfrm>
+            <a:off x="640080" y="4128516"/>
+            <a:ext cx="10911535" cy="310896"/>
+          </a:xfrm>
+          <a:prstGeom prst="rect">
+            <a:avLst/>
+          </a:prstGeom>
+          <a:noFill/>
+        </p:spPr>
+        <p:txBody>
+          <a:bodyPr wrap="square">
+            <a:spAutoFit/>
+          </a:bodyPr>
+          <a:lstStyle/>
+          <a:p>
+            <a:pPr algn="ctr"/>
+            <a:r>
+              <a:rPr sz="2000" b="0" i="0">
+                <a:solidFill>
+                  <a:srgbClr val="828282"/>
+                </a:solidFill>
+                <a:latin typeface="Arial"/>
+              </a:rPr>
+              <a:t>緑の牧場に私を休ませてくださる</a:t>
+            </a:r>
+          </a:p>
+        </p:txBody>
+      </p:sp>
+      <p:sp>
+        <p:nvSpPr>
+          <p:cNvPr id="5" name="TextBox 4"/>
+          <p:cNvSpPr txBox="1"/>
+          <p:nvPr/>
+        </p:nvSpPr>
+        <p:spPr>
+          <a:xfrm>
+            <a:off x="640080" y="4494276"/>
+            <a:ext cx="10911535" cy="310896"/>
+          </a:xfrm>
+          <a:prstGeom prst="rect">
+            <a:avLst/>
+          </a:prstGeom>
+          <a:noFill/>
+        </p:spPr>
+        <p:txBody>
+          <a:bodyPr wrap="square">
+            <a:spAutoFit/>
+          </a:bodyPr>
+          <a:lstStyle/>
+          <a:p>
+            <a:pPr algn="ctr"/>
+            <a:r>
+              <a:rPr sz="2000" b="0" i="0">
+                <a:solidFill>
+                  <a:srgbClr val="828282"/>
+                </a:solidFill>
+                <a:latin typeface="Arial"/>
+              </a:rPr>
+              <a:t>御名のゆえに</a:t>
+            </a:r>
+          </a:p>
+        </p:txBody>
+      </p:sp>
     </p:spTree>
   </p:cSld>
   <p:clrMapOvr>
@@ -4492,6 +4912,76 @@
           </a:p>
         </p:txBody>
       </p:sp>
+      <p:sp>
+        <p:nvSpPr>
+          <p:cNvPr id="4" name="TextBox 3"/>
+          <p:cNvSpPr txBox="1"/>
+          <p:nvPr/>
+        </p:nvSpPr>
+        <p:spPr>
+          <a:xfrm>
+            <a:off x="640080" y="4128516"/>
+            <a:ext cx="10911535" cy="310896"/>
+          </a:xfrm>
+          <a:prstGeom prst="rect">
+            <a:avLst/>
+          </a:prstGeom>
+          <a:noFill/>
+        </p:spPr>
+        <p:txBody>
+          <a:bodyPr wrap="square">
+            <a:spAutoFit/>
+          </a:bodyPr>
+          <a:lstStyle/>
+          <a:p>
+            <a:pPr algn="ctr"/>
+            <a:r>
+              <a:rPr sz="2000" b="0" i="0">
+                <a:solidFill>
+                  <a:srgbClr val="828282"/>
+                </a:solidFill>
+                <a:latin typeface="Arial"/>
+              </a:rPr>
+              <a:t>たとえ私が死の影の谷を歩むとしても</a:t>
+            </a:r>
+          </a:p>
+        </p:txBody>
+      </p:sp>
+      <p:sp>
+        <p:nvSpPr>
+          <p:cNvPr id="5" name="TextBox 4"/>
+          <p:cNvSpPr txBox="1"/>
+          <p:nvPr/>
+        </p:nvSpPr>
+        <p:spPr>
+          <a:xfrm>
+            <a:off x="640080" y="4494276"/>
+            <a:ext cx="10911535" cy="310896"/>
+          </a:xfrm>
+          <a:prstGeom prst="rect">
+            <a:avLst/>
+          </a:prstGeom>
+          <a:noFill/>
+        </p:spPr>
+        <p:txBody>
+          <a:bodyPr wrap="square">
+            <a:spAutoFit/>
+          </a:bodyPr>
+          <a:lstStyle/>
+          <a:p>
+            <a:pPr algn="ctr"/>
+            <a:r>
+              <a:rPr sz="2000" b="0" i="0">
+                <a:solidFill>
+                  <a:srgbClr val="828282"/>
+                </a:solidFill>
+                <a:latin typeface="Arial"/>
+              </a:rPr>
+              <a:t>私は悪を恐れない</a:t>
+            </a:r>
+          </a:p>
+        </p:txBody>
+      </p:sp>
     </p:spTree>
   </p:cSld>
   <p:clrMapOvr>
@@ -4588,6 +5078,76 @@
           </a:p>
         </p:txBody>
       </p:sp>
+      <p:sp>
+        <p:nvSpPr>
+          <p:cNvPr id="4" name="TextBox 3"/>
+          <p:cNvSpPr txBox="1"/>
+          <p:nvPr/>
+        </p:nvSpPr>
+        <p:spPr>
+          <a:xfrm>
+            <a:off x="640080" y="4128516"/>
+            <a:ext cx="10911535" cy="310896"/>
+          </a:xfrm>
+          <a:prstGeom prst="rect">
+            <a:avLst/>
+          </a:prstGeom>
+          <a:noFill/>
+        </p:spPr>
+        <p:txBody>
+          <a:bodyPr wrap="square">
+            <a:spAutoFit/>
+          </a:bodyPr>
+          <a:lstStyle/>
+          <a:p>
+            <a:pPr algn="ctr"/>
+            <a:r>
+              <a:rPr sz="2000" b="0" i="0">
+                <a:solidFill>
+                  <a:srgbClr val="828282"/>
+                </a:solidFill>
+                <a:latin typeface="Arial"/>
+              </a:rPr>
+              <a:t>あなたが私とともにいるから</a:t>
+            </a:r>
+          </a:p>
+        </p:txBody>
+      </p:sp>
+      <p:sp>
+        <p:nvSpPr>
+          <p:cNvPr id="5" name="TextBox 4"/>
+          <p:cNvSpPr txBox="1"/>
+          <p:nvPr/>
+        </p:nvSpPr>
+        <p:spPr>
+          <a:xfrm>
+            <a:off x="640080" y="4494276"/>
+            <a:ext cx="10911535" cy="310896"/>
+          </a:xfrm>
+          <a:prstGeom prst="rect">
+            <a:avLst/>
+          </a:prstGeom>
+          <a:noFill/>
+        </p:spPr>
+        <p:txBody>
+          <a:bodyPr wrap="square">
+            <a:spAutoFit/>
+          </a:bodyPr>
+          <a:lstStyle/>
+          <a:p>
+            <a:pPr algn="ctr"/>
+            <a:r>
+              <a:rPr sz="2000" b="0" i="0">
+                <a:solidFill>
+                  <a:srgbClr val="828282"/>
+                </a:solidFill>
+                <a:latin typeface="Arial"/>
+              </a:rPr>
+              <a:t>あなたの杖とあなたの笏が私を慰める</a:t>
+            </a:r>
+          </a:p>
+        </p:txBody>
+      </p:sp>
     </p:spTree>
   </p:cSld>
   <p:clrMapOvr>
@@ -4684,6 +5244,41 @@
           </a:p>
         </p:txBody>
       </p:sp>
+      <p:sp>
+        <p:nvSpPr>
+          <p:cNvPr id="4" name="TextBox 3"/>
+          <p:cNvSpPr txBox="1"/>
+          <p:nvPr/>
+        </p:nvSpPr>
+        <p:spPr>
+          <a:xfrm>
+            <a:off x="640080" y="4128516"/>
+            <a:ext cx="10911535" cy="310896"/>
+          </a:xfrm>
+          <a:prstGeom prst="rect">
+            <a:avLst/>
+          </a:prstGeom>
+          <a:noFill/>
+        </p:spPr>
+        <p:txBody>
+          <a:bodyPr wrap="square">
+            <a:spAutoFit/>
+          </a:bodyPr>
+          <a:lstStyle/>
+          <a:p>
+            <a:pPr algn="ctr"/>
+            <a:r>
+              <a:rPr sz="2000" b="0" i="0">
+                <a:solidFill>
+                  <a:srgbClr val="828282"/>
+                </a:solidFill>
+                <a:latin typeface="Arial"/>
+              </a:rPr>
+              <a:t>主は私の羊飼いであり、私は何も欠けることがない</a:t>
+            </a:r>
+          </a:p>
+        </p:txBody>
+      </p:sp>
     </p:spTree>
   </p:cSld>
   <p:clrMapOvr>
@@ -5356,6 +5951,76 @@
           </a:p>
         </p:txBody>
       </p:sp>
+      <p:sp>
+        <p:nvSpPr>
+          <p:cNvPr id="4" name="TextBox 3"/>
+          <p:cNvSpPr txBox="1"/>
+          <p:nvPr/>
+        </p:nvSpPr>
+        <p:spPr>
+          <a:xfrm>
+            <a:off x="640080" y="4128516"/>
+            <a:ext cx="10911535" cy="310896"/>
+          </a:xfrm>
+          <a:prstGeom prst="rect">
+            <a:avLst/>
+          </a:prstGeom>
+          <a:noFill/>
+        </p:spPr>
+        <p:txBody>
+          <a:bodyPr wrap="square">
+            <a:spAutoFit/>
+          </a:bodyPr>
+          <a:lstStyle/>
+          <a:p>
+            <a:pPr algn="ctr"/>
+            <a:r>
+              <a:rPr sz="2000" b="0" i="0">
+                <a:solidFill>
+                  <a:srgbClr val="828282"/>
+                </a:solidFill>
+                <a:latin typeface="Arial"/>
+              </a:rPr>
+              <a:t>御名のゆえに</a:t>
+            </a:r>
+          </a:p>
+        </p:txBody>
+      </p:sp>
+      <p:sp>
+        <p:nvSpPr>
+          <p:cNvPr id="5" name="TextBox 4"/>
+          <p:cNvSpPr txBox="1"/>
+          <p:nvPr/>
+        </p:nvSpPr>
+        <p:spPr>
+          <a:xfrm>
+            <a:off x="640080" y="4494276"/>
+            <a:ext cx="10911535" cy="310896"/>
+          </a:xfrm>
+          <a:prstGeom prst="rect">
+            <a:avLst/>
+          </a:prstGeom>
+          <a:noFill/>
+        </p:spPr>
+        <p:txBody>
+          <a:bodyPr wrap="square">
+            <a:spAutoFit/>
+          </a:bodyPr>
+          <a:lstStyle/>
+          <a:p>
+            <a:pPr algn="ctr"/>
+            <a:r>
+              <a:rPr sz="2000" b="0" i="0">
+                <a:solidFill>
+                  <a:srgbClr val="828282"/>
+                </a:solidFill>
+                <a:latin typeface="Arial"/>
+              </a:rPr>
+              <a:t>たとえ私が死の影の谷を歩むとしても</a:t>
+            </a:r>
+          </a:p>
+        </p:txBody>
+      </p:sp>
     </p:spTree>
   </p:cSld>
   <p:clrMapOvr>
@@ -6447,6 +7112,76 @@
           </a:p>
         </p:txBody>
       </p:sp>
+      <p:sp>
+        <p:nvSpPr>
+          <p:cNvPr id="4" name="TextBox 3"/>
+          <p:cNvSpPr txBox="1"/>
+          <p:nvPr/>
+        </p:nvSpPr>
+        <p:spPr>
+          <a:xfrm>
+            <a:off x="640080" y="4128516"/>
+            <a:ext cx="10911535" cy="310896"/>
+          </a:xfrm>
+          <a:prstGeom prst="rect">
+            <a:avLst/>
+          </a:prstGeom>
+          <a:noFill/>
+        </p:spPr>
+        <p:txBody>
+          <a:bodyPr wrap="square">
+            <a:spAutoFit/>
+          </a:bodyPr>
+          <a:lstStyle/>
+          <a:p>
+            <a:pPr algn="ctr"/>
+            <a:r>
+              <a:rPr sz="2000" b="0" i="0">
+                <a:solidFill>
+                  <a:srgbClr val="828282"/>
+                </a:solidFill>
+                <a:latin typeface="Arial"/>
+              </a:rPr>
+              <a:t>私は悪を恐れない</a:t>
+            </a:r>
+          </a:p>
+        </p:txBody>
+      </p:sp>
+      <p:sp>
+        <p:nvSpPr>
+          <p:cNvPr id="5" name="TextBox 4"/>
+          <p:cNvSpPr txBox="1"/>
+          <p:nvPr/>
+        </p:nvSpPr>
+        <p:spPr>
+          <a:xfrm>
+            <a:off x="640080" y="4494276"/>
+            <a:ext cx="10911535" cy="310896"/>
+          </a:xfrm>
+          <a:prstGeom prst="rect">
+            <a:avLst/>
+          </a:prstGeom>
+          <a:noFill/>
+        </p:spPr>
+        <p:txBody>
+          <a:bodyPr wrap="square">
+            <a:spAutoFit/>
+          </a:bodyPr>
+          <a:lstStyle/>
+          <a:p>
+            <a:pPr algn="ctr"/>
+            <a:r>
+              <a:rPr sz="2000" b="0" i="0">
+                <a:solidFill>
+                  <a:srgbClr val="828282"/>
+                </a:solidFill>
+                <a:latin typeface="Arial"/>
+              </a:rPr>
+              <a:t>あなたが私とともにいるから</a:t>
+            </a:r>
+          </a:p>
+        </p:txBody>
+      </p:sp>
     </p:spTree>
   </p:cSld>
   <p:clrMapOvr>
@@ -7119,6 +7854,41 @@
           </a:p>
         </p:txBody>
       </p:sp>
+      <p:sp>
+        <p:nvSpPr>
+          <p:cNvPr id="3" name="TextBox 2"/>
+          <p:cNvSpPr txBox="1"/>
+          <p:nvPr/>
+        </p:nvSpPr>
+        <p:spPr>
+          <a:xfrm>
+            <a:off x="640080" y="3845052"/>
+            <a:ext cx="10911535" cy="310896"/>
+          </a:xfrm>
+          <a:prstGeom prst="rect">
+            <a:avLst/>
+          </a:prstGeom>
+          <a:noFill/>
+        </p:spPr>
+        <p:txBody>
+          <a:bodyPr wrap="square">
+            <a:spAutoFit/>
+          </a:bodyPr>
+          <a:lstStyle/>
+          <a:p>
+            <a:pPr algn="ctr"/>
+            <a:r>
+              <a:rPr sz="2000" b="0" i="0">
+                <a:solidFill>
+                  <a:srgbClr val="828282"/>
+                </a:solidFill>
+                <a:latin typeface="Arial"/>
+              </a:rPr>
+              <a:t>静かな水のほとりに私を導いてくださる</a:t>
+            </a:r>
+          </a:p>
+        </p:txBody>
+      </p:sp>
     </p:spTree>
   </p:cSld>
   <p:clrMapOvr>
@@ -7307,6 +8077,41 @@
                 <a:latin typeface="Arial"/>
               </a:rPr>
               <a:t>Restaurada é minha alma</a:t>
+            </a:r>
+          </a:p>
+        </p:txBody>
+      </p:sp>
+      <p:sp>
+        <p:nvSpPr>
+          <p:cNvPr id="3" name="TextBox 2"/>
+          <p:cNvSpPr txBox="1"/>
+          <p:nvPr/>
+        </p:nvSpPr>
+        <p:spPr>
+          <a:xfrm>
+            <a:off x="640080" y="3845052"/>
+            <a:ext cx="10911535" cy="310896"/>
+          </a:xfrm>
+          <a:prstGeom prst="rect">
+            <a:avLst/>
+          </a:prstGeom>
+          <a:noFill/>
+        </p:spPr>
+        <p:txBody>
+          <a:bodyPr wrap="square">
+            <a:spAutoFit/>
+          </a:bodyPr>
+          <a:lstStyle/>
+          <a:p>
+            <a:pPr algn="ctr"/>
+            <a:r>
+              <a:rPr sz="2000" b="0" i="0">
+                <a:solidFill>
+                  <a:srgbClr val="828282"/>
+                </a:solidFill>
+                <a:latin typeface="Arial"/>
+              </a:rPr>
+              <a:t>私のたましいは回復される</a:t>
             </a:r>
           </a:p>
         </p:txBody>
